--- a/Summary.pptx
+++ b/Summary.pptx
@@ -5,7 +5,7 @@
     <p:sldMasterId id="2147483648" r:id="rId1"/>
   </p:sldMasterIdLst>
   <p:notesMasterIdLst>
-    <p:notesMasterId r:id="rId29"/>
+    <p:notesMasterId r:id="rId32"/>
   </p:notesMasterIdLst>
   <p:sldIdLst>
     <p:sldId id="256" r:id="rId2"/>
@@ -23,18 +23,21 @@
     <p:sldId id="257" r:id="rId14"/>
     <p:sldId id="258" r:id="rId15"/>
     <p:sldId id="270" r:id="rId16"/>
-    <p:sldId id="277" r:id="rId17"/>
-    <p:sldId id="266" r:id="rId18"/>
-    <p:sldId id="278" r:id="rId19"/>
-    <p:sldId id="279" r:id="rId20"/>
-    <p:sldId id="271" r:id="rId21"/>
-    <p:sldId id="272" r:id="rId22"/>
-    <p:sldId id="273" r:id="rId23"/>
-    <p:sldId id="274" r:id="rId24"/>
-    <p:sldId id="275" r:id="rId25"/>
-    <p:sldId id="276" r:id="rId26"/>
+    <p:sldId id="276" r:id="rId17"/>
+    <p:sldId id="277" r:id="rId18"/>
+    <p:sldId id="271" r:id="rId19"/>
+    <p:sldId id="272" r:id="rId20"/>
+    <p:sldId id="273" r:id="rId21"/>
+    <p:sldId id="274" r:id="rId22"/>
+    <p:sldId id="266" r:id="rId23"/>
+    <p:sldId id="278" r:id="rId24"/>
+    <p:sldId id="279" r:id="rId25"/>
+    <p:sldId id="275" r:id="rId26"/>
     <p:sldId id="267" r:id="rId27"/>
     <p:sldId id="268" r:id="rId28"/>
+    <p:sldId id="283" r:id="rId29"/>
+    <p:sldId id="284" r:id="rId30"/>
+    <p:sldId id="285" r:id="rId31"/>
   </p:sldIdLst>
   <p:sldSz cx="12192000" cy="6858000"/>
   <p:notesSz cx="6858000" cy="9144000"/>
@@ -223,7 +226,7 @@
           <a:p>
             <a:fld id="{4528D89E-93E6-4A17-A5FA-EDA1DD3FB786}" type="datetimeFigureOut">
               <a:rPr lang="es-ES" smtClean="0"/>
-              <a:t>11/05/2026</a:t>
+              <a:t>12/05/2026</a:t>
             </a:fld>
             <a:endParaRPr lang="es-ES"/>
           </a:p>
@@ -937,7 +940,7 @@
           <a:p>
             <a:fld id="{8D5359BF-8E6C-4C36-9C95-3C97ED27A0FA}" type="datetimeFigureOut">
               <a:rPr lang="es-ES" smtClean="0"/>
-              <a:t>11/05/2026</a:t>
+              <a:t>12/05/2026</a:t>
             </a:fld>
             <a:endParaRPr lang="es-ES"/>
           </a:p>
@@ -1135,7 +1138,7 @@
           <a:p>
             <a:fld id="{8D5359BF-8E6C-4C36-9C95-3C97ED27A0FA}" type="datetimeFigureOut">
               <a:rPr lang="es-ES" smtClean="0"/>
-              <a:t>11/05/2026</a:t>
+              <a:t>12/05/2026</a:t>
             </a:fld>
             <a:endParaRPr lang="es-ES"/>
           </a:p>
@@ -1343,7 +1346,7 @@
           <a:p>
             <a:fld id="{8D5359BF-8E6C-4C36-9C95-3C97ED27A0FA}" type="datetimeFigureOut">
               <a:rPr lang="es-ES" smtClean="0"/>
-              <a:t>11/05/2026</a:t>
+              <a:t>12/05/2026</a:t>
             </a:fld>
             <a:endParaRPr lang="es-ES"/>
           </a:p>
@@ -1541,7 +1544,7 @@
           <a:p>
             <a:fld id="{8D5359BF-8E6C-4C36-9C95-3C97ED27A0FA}" type="datetimeFigureOut">
               <a:rPr lang="es-ES" smtClean="0"/>
-              <a:t>11/05/2026</a:t>
+              <a:t>12/05/2026</a:t>
             </a:fld>
             <a:endParaRPr lang="es-ES"/>
           </a:p>
@@ -1816,7 +1819,7 @@
           <a:p>
             <a:fld id="{8D5359BF-8E6C-4C36-9C95-3C97ED27A0FA}" type="datetimeFigureOut">
               <a:rPr lang="es-ES" smtClean="0"/>
-              <a:t>11/05/2026</a:t>
+              <a:t>12/05/2026</a:t>
             </a:fld>
             <a:endParaRPr lang="es-ES"/>
           </a:p>
@@ -2081,7 +2084,7 @@
           <a:p>
             <a:fld id="{8D5359BF-8E6C-4C36-9C95-3C97ED27A0FA}" type="datetimeFigureOut">
               <a:rPr lang="es-ES" smtClean="0"/>
-              <a:t>11/05/2026</a:t>
+              <a:t>12/05/2026</a:t>
             </a:fld>
             <a:endParaRPr lang="es-ES"/>
           </a:p>
@@ -2493,7 +2496,7 @@
           <a:p>
             <a:fld id="{8D5359BF-8E6C-4C36-9C95-3C97ED27A0FA}" type="datetimeFigureOut">
               <a:rPr lang="es-ES" smtClean="0"/>
-              <a:t>11/05/2026</a:t>
+              <a:t>12/05/2026</a:t>
             </a:fld>
             <a:endParaRPr lang="es-ES"/>
           </a:p>
@@ -2634,7 +2637,7 @@
           <a:p>
             <a:fld id="{8D5359BF-8E6C-4C36-9C95-3C97ED27A0FA}" type="datetimeFigureOut">
               <a:rPr lang="es-ES" smtClean="0"/>
-              <a:t>11/05/2026</a:t>
+              <a:t>12/05/2026</a:t>
             </a:fld>
             <a:endParaRPr lang="es-ES"/>
           </a:p>
@@ -2747,7 +2750,7 @@
           <a:p>
             <a:fld id="{8D5359BF-8E6C-4C36-9C95-3C97ED27A0FA}" type="datetimeFigureOut">
               <a:rPr lang="es-ES" smtClean="0"/>
-              <a:t>11/05/2026</a:t>
+              <a:t>12/05/2026</a:t>
             </a:fld>
             <a:endParaRPr lang="es-ES"/>
           </a:p>
@@ -3058,7 +3061,7 @@
           <a:p>
             <a:fld id="{8D5359BF-8E6C-4C36-9C95-3C97ED27A0FA}" type="datetimeFigureOut">
               <a:rPr lang="es-ES" smtClean="0"/>
-              <a:t>11/05/2026</a:t>
+              <a:t>12/05/2026</a:t>
             </a:fld>
             <a:endParaRPr lang="es-ES"/>
           </a:p>
@@ -3346,7 +3349,7 @@
           <a:p>
             <a:fld id="{8D5359BF-8E6C-4C36-9C95-3C97ED27A0FA}" type="datetimeFigureOut">
               <a:rPr lang="es-ES" smtClean="0"/>
-              <a:t>11/05/2026</a:t>
+              <a:t>12/05/2026</a:t>
             </a:fld>
             <a:endParaRPr lang="es-ES"/>
           </a:p>
@@ -3587,7 +3590,7 @@
           <a:p>
             <a:fld id="{8D5359BF-8E6C-4C36-9C95-3C97ED27A0FA}" type="datetimeFigureOut">
               <a:rPr lang="es-ES" smtClean="0"/>
-              <a:t>11/05/2026</a:t>
+              <a:t>12/05/2026</a:t>
             </a:fld>
             <a:endParaRPr lang="es-ES"/>
           </a:p>
@@ -6148,7 +6151,7 @@
           <p:cNvPr id="2" name="Título 1">
             <a:extLst>
               <a:ext uri="{FF2B5EF4-FFF2-40B4-BE49-F238E27FC236}">
-                <a16:creationId xmlns:a16="http://schemas.microsoft.com/office/drawing/2014/main" id="{9BC807E3-3C9D-F06B-418A-FB8EA4EB0E4D}"/>
+                <a16:creationId xmlns:a16="http://schemas.microsoft.com/office/drawing/2014/main" id="{70AE218E-6817-3D67-B637-7C6AA7C33B72}"/>
               </a:ext>
             </a:extLst>
           </p:cNvPr>
@@ -6159,2677 +6162,6 @@
             <p:ph type="title"/>
           </p:nvPr>
         </p:nvSpPr>
-        <p:spPr/>
-        <p:txBody>
-          <a:bodyPr>
-            <a:normAutofit/>
-          </a:bodyPr>
-          <a:lstStyle/>
-          <a:p>
-            <a:r>
-              <a:rPr lang="es-ES" sz="4000" dirty="0" err="1"/>
-              <a:t>Prevalence</a:t>
-            </a:r>
-            <a:r>
-              <a:rPr lang="es-ES" sz="4000" dirty="0"/>
-              <a:t> </a:t>
-            </a:r>
-            <a:r>
-              <a:rPr lang="es-ES" sz="4000" dirty="0" err="1"/>
-              <a:t>comparison</a:t>
-            </a:r>
-            <a:r>
-              <a:rPr lang="es-ES" sz="4000" dirty="0"/>
-              <a:t> (after 1st </a:t>
-            </a:r>
-            <a:r>
-              <a:rPr lang="es-ES" sz="4000" dirty="0" err="1"/>
-              <a:t>lab</a:t>
-            </a:r>
-            <a:r>
-              <a:rPr lang="es-ES" sz="4000" dirty="0"/>
-              <a:t> meeting )</a:t>
-            </a:r>
-          </a:p>
-        </p:txBody>
-      </p:sp>
-      <p:pic>
-        <p:nvPicPr>
-          <p:cNvPr id="5" name="Imagen 4">
-            <a:extLst>
-              <a:ext uri="{FF2B5EF4-FFF2-40B4-BE49-F238E27FC236}">
-                <a16:creationId xmlns:a16="http://schemas.microsoft.com/office/drawing/2014/main" id="{54F4A075-63DA-38B4-0E86-04CC0D3F5A9F}"/>
-              </a:ext>
-            </a:extLst>
-          </p:cNvPr>
-          <p:cNvPicPr>
-            <a:picLocks noChangeAspect="1"/>
-          </p:cNvPicPr>
-          <p:nvPr/>
-        </p:nvPicPr>
-        <p:blipFill>
-          <a:blip r:embed="rId2"/>
-          <a:stretch>
-            <a:fillRect/>
-          </a:stretch>
-        </p:blipFill>
-        <p:spPr>
-          <a:xfrm>
-            <a:off x="141732" y="1494558"/>
-            <a:ext cx="11908536" cy="3868883"/>
-          </a:xfrm>
-          <a:prstGeom prst="rect">
-            <a:avLst/>
-          </a:prstGeom>
-        </p:spPr>
-      </p:pic>
-      <p:sp>
-        <p:nvSpPr>
-          <p:cNvPr id="6" name="CuadroTexto 5">
-            <a:extLst>
-              <a:ext uri="{FF2B5EF4-FFF2-40B4-BE49-F238E27FC236}">
-                <a16:creationId xmlns:a16="http://schemas.microsoft.com/office/drawing/2014/main" id="{73736F13-E5BA-73BC-CB69-A355110DCB99}"/>
-              </a:ext>
-            </a:extLst>
-          </p:cNvPr>
-          <p:cNvSpPr txBox="1"/>
-          <p:nvPr/>
-        </p:nvSpPr>
-        <p:spPr>
-          <a:xfrm>
-            <a:off x="2638425" y="5867400"/>
-            <a:ext cx="7248525" cy="369332"/>
-          </a:xfrm>
-          <a:prstGeom prst="rect">
-            <a:avLst/>
-          </a:prstGeom>
-          <a:noFill/>
-        </p:spPr>
-        <p:txBody>
-          <a:bodyPr wrap="square" rtlCol="0">
-            <a:spAutoFit/>
-          </a:bodyPr>
-          <a:lstStyle/>
-          <a:p>
-            <a:r>
-              <a:rPr lang="es-ES" dirty="0"/>
-              <a:t>Very, </a:t>
-            </a:r>
-            <a:r>
-              <a:rPr lang="es-ES" dirty="0" err="1"/>
-              <a:t>very</a:t>
-            </a:r>
-            <a:r>
-              <a:rPr lang="es-ES" dirty="0"/>
-              <a:t> similar</a:t>
-            </a:r>
-          </a:p>
-        </p:txBody>
-      </p:sp>
-    </p:spTree>
-    <p:extLst>
-      <p:ext uri="{BB962C8B-B14F-4D97-AF65-F5344CB8AC3E}">
-        <p14:creationId xmlns:p14="http://schemas.microsoft.com/office/powerpoint/2010/main" val="63626245"/>
-      </p:ext>
-    </p:extLst>
-  </p:cSld>
-  <p:clrMapOvr>
-    <a:masterClrMapping/>
-  </p:clrMapOvr>
-</p:sld>
-</file>
-
-<file path=ppt/slides/slide17.xml><?xml version="1.0" encoding="utf-8"?>
-<p:sld xmlns:a="http://schemas.openxmlformats.org/drawingml/2006/main" xmlns:r="http://schemas.openxmlformats.org/officeDocument/2006/relationships" xmlns:p="http://schemas.openxmlformats.org/presentationml/2006/main">
-  <p:cSld>
-    <p:spTree>
-      <p:nvGrpSpPr>
-        <p:cNvPr id="1" name="">
-          <a:extLst>
-            <a:ext uri="{FF2B5EF4-FFF2-40B4-BE49-F238E27FC236}">
-              <a16:creationId xmlns:a16="http://schemas.microsoft.com/office/drawing/2014/main" id="{04A4E669-1478-CEED-6AEE-DBEB7F2F42D1}"/>
-            </a:ext>
-          </a:extLst>
-        </p:cNvPr>
-        <p:cNvGrpSpPr/>
-        <p:nvPr/>
-      </p:nvGrpSpPr>
-      <p:grpSpPr>
-        <a:xfrm>
-          <a:off x="0" y="0"/>
-          <a:ext cx="0" cy="0"/>
-          <a:chOff x="0" y="0"/>
-          <a:chExt cx="0" cy="0"/>
-        </a:xfrm>
-      </p:grpSpPr>
-      <p:sp>
-        <p:nvSpPr>
-          <p:cNvPr id="2" name="Título 1">
-            <a:extLst>
-              <a:ext uri="{FF2B5EF4-FFF2-40B4-BE49-F238E27FC236}">
-                <a16:creationId xmlns:a16="http://schemas.microsoft.com/office/drawing/2014/main" id="{97EDEE69-126B-9402-890C-24E333C9D886}"/>
-              </a:ext>
-            </a:extLst>
-          </p:cNvPr>
-          <p:cNvSpPr>
-            <a:spLocks noGrp="1"/>
-          </p:cNvSpPr>
-          <p:nvPr>
-            <p:ph type="title"/>
-          </p:nvPr>
-        </p:nvSpPr>
-        <p:spPr>
-          <a:xfrm>
-            <a:off x="1038225" y="1"/>
-            <a:ext cx="10515600" cy="819150"/>
-          </a:xfrm>
-        </p:spPr>
-        <p:txBody>
-          <a:bodyPr/>
-          <a:lstStyle/>
-          <a:p>
-            <a:r>
-              <a:rPr lang="es-ES" dirty="0" err="1"/>
-              <a:t>What</a:t>
-            </a:r>
-            <a:r>
-              <a:rPr lang="es-ES" dirty="0"/>
-              <a:t> </a:t>
-            </a:r>
-            <a:r>
-              <a:rPr lang="es-ES" dirty="0" err="1"/>
-              <a:t>happens</a:t>
-            </a:r>
-            <a:r>
-              <a:rPr lang="es-ES" dirty="0"/>
-              <a:t> </a:t>
-            </a:r>
-            <a:r>
-              <a:rPr lang="es-ES" dirty="0" err="1"/>
-              <a:t>with</a:t>
-            </a:r>
-            <a:r>
-              <a:rPr lang="es-ES" dirty="0"/>
-              <a:t> sex</a:t>
-            </a:r>
-          </a:p>
-        </p:txBody>
-      </p:sp>
-      <p:pic>
-        <p:nvPicPr>
-          <p:cNvPr id="5" name="Imagen 4">
-            <a:extLst>
-              <a:ext uri="{FF2B5EF4-FFF2-40B4-BE49-F238E27FC236}">
-                <a16:creationId xmlns:a16="http://schemas.microsoft.com/office/drawing/2014/main" id="{7E43E153-5310-56BB-0D03-6C7D0C5D6165}"/>
-              </a:ext>
-            </a:extLst>
-          </p:cNvPr>
-          <p:cNvPicPr>
-            <a:picLocks noChangeAspect="1"/>
-          </p:cNvPicPr>
-          <p:nvPr/>
-        </p:nvPicPr>
-        <p:blipFill>
-          <a:blip r:embed="rId2"/>
-          <a:stretch>
-            <a:fillRect/>
-          </a:stretch>
-        </p:blipFill>
-        <p:spPr>
-          <a:xfrm>
-            <a:off x="1038225" y="1051899"/>
-            <a:ext cx="9659165" cy="5168362"/>
-          </a:xfrm>
-          <a:prstGeom prst="rect">
-            <a:avLst/>
-          </a:prstGeom>
-        </p:spPr>
-      </p:pic>
-      <p:sp>
-        <p:nvSpPr>
-          <p:cNvPr id="6" name="Elipse 5">
-            <a:extLst>
-              <a:ext uri="{FF2B5EF4-FFF2-40B4-BE49-F238E27FC236}">
-                <a16:creationId xmlns:a16="http://schemas.microsoft.com/office/drawing/2014/main" id="{51614AD5-587E-789C-B36B-48F1348BB2B3}"/>
-              </a:ext>
-            </a:extLst>
-          </p:cNvPr>
-          <p:cNvSpPr/>
-          <p:nvPr/>
-        </p:nvSpPr>
-        <p:spPr>
-          <a:xfrm>
-            <a:off x="800100" y="4762500"/>
-            <a:ext cx="2428875" cy="1690509"/>
-          </a:xfrm>
-          <a:prstGeom prst="ellipse">
-            <a:avLst/>
-          </a:prstGeom>
-          <a:noFill/>
-          <a:ln w="38100">
-            <a:solidFill>
-              <a:srgbClr val="FF0000"/>
-            </a:solidFill>
-          </a:ln>
-        </p:spPr>
-        <p:style>
-          <a:lnRef idx="2">
-            <a:schemeClr val="accent1">
-              <a:shade val="15000"/>
-            </a:schemeClr>
-          </a:lnRef>
-          <a:fillRef idx="1">
-            <a:schemeClr val="accent1"/>
-          </a:fillRef>
-          <a:effectRef idx="0">
-            <a:schemeClr val="accent1"/>
-          </a:effectRef>
-          <a:fontRef idx="minor">
-            <a:schemeClr val="lt1"/>
-          </a:fontRef>
-        </p:style>
-        <p:txBody>
-          <a:bodyPr rtlCol="0" anchor="ctr"/>
-          <a:lstStyle/>
-          <a:p>
-            <a:pPr algn="ctr"/>
-            <a:endParaRPr lang="es-ES"/>
-          </a:p>
-        </p:txBody>
-      </p:sp>
-      <p:sp>
-        <p:nvSpPr>
-          <p:cNvPr id="7" name="CuadroTexto 6">
-            <a:extLst>
-              <a:ext uri="{FF2B5EF4-FFF2-40B4-BE49-F238E27FC236}">
-                <a16:creationId xmlns:a16="http://schemas.microsoft.com/office/drawing/2014/main" id="{88DBB865-E19C-1471-A2FB-9BA3B5DB0F46}"/>
-              </a:ext>
-            </a:extLst>
-          </p:cNvPr>
-          <p:cNvSpPr txBox="1"/>
-          <p:nvPr/>
-        </p:nvSpPr>
-        <p:spPr>
-          <a:xfrm>
-            <a:off x="3210331" y="6211668"/>
-            <a:ext cx="6838543" cy="646331"/>
-          </a:xfrm>
-          <a:prstGeom prst="rect">
-            <a:avLst/>
-          </a:prstGeom>
-          <a:noFill/>
-        </p:spPr>
-        <p:txBody>
-          <a:bodyPr wrap="square" rtlCol="0">
-            <a:spAutoFit/>
-          </a:bodyPr>
-          <a:lstStyle/>
-          <a:p>
-            <a:r>
-              <a:rPr lang="es-ES" dirty="0" err="1"/>
-              <a:t>Expected</a:t>
-            </a:r>
-            <a:r>
-              <a:rPr lang="es-ES" dirty="0"/>
-              <a:t> </a:t>
-            </a:r>
-            <a:r>
-              <a:rPr lang="es-ES" dirty="0" err="1"/>
-              <a:t>diff</a:t>
-            </a:r>
-            <a:r>
-              <a:rPr lang="es-ES" dirty="0"/>
-              <a:t> </a:t>
-            </a:r>
-            <a:r>
-              <a:rPr lang="es-ES" dirty="0" err="1"/>
-              <a:t>between</a:t>
-            </a:r>
-            <a:r>
-              <a:rPr lang="es-ES" dirty="0"/>
-              <a:t> males and </a:t>
-            </a:r>
-            <a:r>
-              <a:rPr lang="es-ES" dirty="0" err="1"/>
-              <a:t>females</a:t>
-            </a:r>
-            <a:r>
-              <a:rPr lang="es-ES" dirty="0"/>
-              <a:t>. </a:t>
-            </a:r>
-            <a:r>
-              <a:rPr lang="es-ES" dirty="0" err="1"/>
-              <a:t>If</a:t>
-            </a:r>
-            <a:r>
-              <a:rPr lang="es-ES" dirty="0"/>
-              <a:t> </a:t>
-            </a:r>
-            <a:r>
-              <a:rPr lang="es-ES" dirty="0" err="1"/>
-              <a:t>considering</a:t>
-            </a:r>
-            <a:r>
-              <a:rPr lang="es-ES" dirty="0"/>
-              <a:t> non-</a:t>
-            </a:r>
-            <a:r>
-              <a:rPr lang="es-ES" dirty="0" err="1"/>
-              <a:t>right</a:t>
-            </a:r>
-            <a:r>
-              <a:rPr lang="es-ES" dirty="0"/>
-              <a:t>-</a:t>
-            </a:r>
-            <a:r>
-              <a:rPr lang="es-ES" dirty="0" err="1"/>
-              <a:t>handedness</a:t>
-            </a:r>
-            <a:r>
-              <a:rPr lang="es-ES" dirty="0"/>
-              <a:t> (</a:t>
-            </a:r>
-            <a:r>
-              <a:rPr lang="es-ES" dirty="0" err="1"/>
-              <a:t>left+mixed</a:t>
-            </a:r>
-            <a:r>
-              <a:rPr lang="es-ES" dirty="0"/>
-              <a:t>) </a:t>
-            </a:r>
-            <a:r>
-              <a:rPr lang="es-ES" dirty="0" err="1"/>
-              <a:t>would</a:t>
-            </a:r>
-            <a:r>
-              <a:rPr lang="es-ES" dirty="0"/>
-              <a:t> </a:t>
-            </a:r>
-            <a:r>
-              <a:rPr lang="es-ES" dirty="0" err="1"/>
-              <a:t>still</a:t>
-            </a:r>
-            <a:r>
-              <a:rPr lang="es-ES" dirty="0"/>
-              <a:t> be </a:t>
-            </a:r>
-            <a:r>
-              <a:rPr lang="es-ES" dirty="0" err="1"/>
-              <a:t>there</a:t>
-            </a:r>
-            <a:endParaRPr lang="es-ES" dirty="0"/>
-          </a:p>
-        </p:txBody>
-      </p:sp>
-    </p:spTree>
-    <p:extLst>
-      <p:ext uri="{BB962C8B-B14F-4D97-AF65-F5344CB8AC3E}">
-        <p14:creationId xmlns:p14="http://schemas.microsoft.com/office/powerpoint/2010/main" val="3445623569"/>
-      </p:ext>
-    </p:extLst>
-  </p:cSld>
-  <p:clrMapOvr>
-    <a:masterClrMapping/>
-  </p:clrMapOvr>
-</p:sld>
-</file>
-
-<file path=ppt/slides/slide18.xml><?xml version="1.0" encoding="utf-8"?>
-<p:sld xmlns:a="http://schemas.openxmlformats.org/drawingml/2006/main" xmlns:r="http://schemas.openxmlformats.org/officeDocument/2006/relationships" xmlns:p="http://schemas.openxmlformats.org/presentationml/2006/main">
-  <p:cSld>
-    <p:spTree>
-      <p:nvGrpSpPr>
-        <p:cNvPr id="1" name="">
-          <a:extLst>
-            <a:ext uri="{FF2B5EF4-FFF2-40B4-BE49-F238E27FC236}">
-              <a16:creationId xmlns:a16="http://schemas.microsoft.com/office/drawing/2014/main" id="{93C73D13-F5E6-74EF-78D8-8804418279CF}"/>
-            </a:ext>
-          </a:extLst>
-        </p:cNvPr>
-        <p:cNvGrpSpPr/>
-        <p:nvPr/>
-      </p:nvGrpSpPr>
-      <p:grpSpPr>
-        <a:xfrm>
-          <a:off x="0" y="0"/>
-          <a:ext cx="0" cy="0"/>
-          <a:chOff x="0" y="0"/>
-          <a:chExt cx="0" cy="0"/>
-        </a:xfrm>
-      </p:grpSpPr>
-      <p:sp>
-        <p:nvSpPr>
-          <p:cNvPr id="2" name="Título 1">
-            <a:extLst>
-              <a:ext uri="{FF2B5EF4-FFF2-40B4-BE49-F238E27FC236}">
-                <a16:creationId xmlns:a16="http://schemas.microsoft.com/office/drawing/2014/main" id="{205CE274-A2A1-8C50-FEF7-FCB965094DE8}"/>
-              </a:ext>
-            </a:extLst>
-          </p:cNvPr>
-          <p:cNvSpPr>
-            <a:spLocks noGrp="1"/>
-          </p:cNvSpPr>
-          <p:nvPr>
-            <p:ph type="title"/>
-          </p:nvPr>
-        </p:nvSpPr>
-        <p:spPr>
-          <a:xfrm>
-            <a:off x="1038225" y="1"/>
-            <a:ext cx="10515600" cy="819150"/>
-          </a:xfrm>
-        </p:spPr>
-        <p:txBody>
-          <a:bodyPr/>
-          <a:lstStyle/>
-          <a:p>
-            <a:r>
-              <a:rPr lang="es-ES" dirty="0" err="1"/>
-              <a:t>What</a:t>
-            </a:r>
-            <a:r>
-              <a:rPr lang="es-ES" dirty="0"/>
-              <a:t> </a:t>
-            </a:r>
-            <a:r>
-              <a:rPr lang="es-ES" dirty="0" err="1"/>
-              <a:t>happens</a:t>
-            </a:r>
-            <a:r>
-              <a:rPr lang="es-ES" dirty="0"/>
-              <a:t> </a:t>
-            </a:r>
-            <a:r>
-              <a:rPr lang="es-ES" dirty="0" err="1"/>
-              <a:t>with</a:t>
-            </a:r>
-            <a:r>
-              <a:rPr lang="es-ES" dirty="0"/>
-              <a:t> sex</a:t>
-            </a:r>
-          </a:p>
-        </p:txBody>
-      </p:sp>
-      <p:pic>
-        <p:nvPicPr>
-          <p:cNvPr id="5" name="Imagen 4">
-            <a:extLst>
-              <a:ext uri="{FF2B5EF4-FFF2-40B4-BE49-F238E27FC236}">
-                <a16:creationId xmlns:a16="http://schemas.microsoft.com/office/drawing/2014/main" id="{7ED23ADE-97CC-1A1C-8FA7-1E05655E0AE8}"/>
-              </a:ext>
-            </a:extLst>
-          </p:cNvPr>
-          <p:cNvPicPr>
-            <a:picLocks noChangeAspect="1"/>
-          </p:cNvPicPr>
-          <p:nvPr/>
-        </p:nvPicPr>
-        <p:blipFill>
-          <a:blip r:embed="rId2"/>
-          <a:stretch>
-            <a:fillRect/>
-          </a:stretch>
-        </p:blipFill>
-        <p:spPr>
-          <a:xfrm>
-            <a:off x="1038225" y="1051899"/>
-            <a:ext cx="9659165" cy="5168362"/>
-          </a:xfrm>
-          <a:prstGeom prst="rect">
-            <a:avLst/>
-          </a:prstGeom>
-        </p:spPr>
-      </p:pic>
-      <p:sp>
-        <p:nvSpPr>
-          <p:cNvPr id="6" name="Elipse 5">
-            <a:extLst>
-              <a:ext uri="{FF2B5EF4-FFF2-40B4-BE49-F238E27FC236}">
-                <a16:creationId xmlns:a16="http://schemas.microsoft.com/office/drawing/2014/main" id="{49F2C07E-B830-ED41-C7A8-24A44A918C1F}"/>
-              </a:ext>
-            </a:extLst>
-          </p:cNvPr>
-          <p:cNvSpPr/>
-          <p:nvPr/>
-        </p:nvSpPr>
-        <p:spPr>
-          <a:xfrm>
-            <a:off x="3590925" y="4657725"/>
-            <a:ext cx="2428875" cy="1690509"/>
-          </a:xfrm>
-          <a:prstGeom prst="ellipse">
-            <a:avLst/>
-          </a:prstGeom>
-          <a:noFill/>
-          <a:ln w="38100">
-            <a:solidFill>
-              <a:srgbClr val="FF0000"/>
-            </a:solidFill>
-          </a:ln>
-        </p:spPr>
-        <p:style>
-          <a:lnRef idx="2">
-            <a:schemeClr val="accent1">
-              <a:shade val="15000"/>
-            </a:schemeClr>
-          </a:lnRef>
-          <a:fillRef idx="1">
-            <a:schemeClr val="accent1"/>
-          </a:fillRef>
-          <a:effectRef idx="0">
-            <a:schemeClr val="accent1"/>
-          </a:effectRef>
-          <a:fontRef idx="minor">
-            <a:schemeClr val="lt1"/>
-          </a:fontRef>
-        </p:style>
-        <p:txBody>
-          <a:bodyPr rtlCol="0" anchor="ctr"/>
-          <a:lstStyle/>
-          <a:p>
-            <a:pPr algn="ctr"/>
-            <a:endParaRPr lang="es-ES"/>
-          </a:p>
-        </p:txBody>
-      </p:sp>
-      <p:sp>
-        <p:nvSpPr>
-          <p:cNvPr id="7" name="CuadroTexto 6">
-            <a:extLst>
-              <a:ext uri="{FF2B5EF4-FFF2-40B4-BE49-F238E27FC236}">
-                <a16:creationId xmlns:a16="http://schemas.microsoft.com/office/drawing/2014/main" id="{C750EB17-D696-A8D5-7D80-11BDB85EA69E}"/>
-              </a:ext>
-            </a:extLst>
-          </p:cNvPr>
-          <p:cNvSpPr txBox="1"/>
-          <p:nvPr/>
-        </p:nvSpPr>
-        <p:spPr>
-          <a:xfrm>
-            <a:off x="5058181" y="6348234"/>
-            <a:ext cx="6838543" cy="369332"/>
-          </a:xfrm>
-          <a:prstGeom prst="rect">
-            <a:avLst/>
-          </a:prstGeom>
-          <a:noFill/>
-        </p:spPr>
-        <p:txBody>
-          <a:bodyPr wrap="square" rtlCol="0">
-            <a:spAutoFit/>
-          </a:bodyPr>
-          <a:lstStyle/>
-          <a:p>
-            <a:r>
-              <a:rPr lang="es-ES" dirty="0"/>
-              <a:t>No </a:t>
-            </a:r>
-            <a:r>
-              <a:rPr lang="es-ES" dirty="0" err="1"/>
-              <a:t>differences</a:t>
-            </a:r>
-            <a:r>
-              <a:rPr lang="es-ES" dirty="0"/>
-              <a:t> </a:t>
-            </a:r>
-            <a:r>
-              <a:rPr lang="es-ES" dirty="0" err="1"/>
-              <a:t>between</a:t>
-            </a:r>
-            <a:r>
-              <a:rPr lang="es-ES" dirty="0"/>
-              <a:t> males and </a:t>
-            </a:r>
-            <a:r>
-              <a:rPr lang="es-ES" dirty="0" err="1"/>
-              <a:t>females</a:t>
-            </a:r>
-            <a:r>
-              <a:rPr lang="es-ES" dirty="0"/>
-              <a:t> in BD</a:t>
-            </a:r>
-          </a:p>
-        </p:txBody>
-      </p:sp>
-    </p:spTree>
-    <p:extLst>
-      <p:ext uri="{BB962C8B-B14F-4D97-AF65-F5344CB8AC3E}">
-        <p14:creationId xmlns:p14="http://schemas.microsoft.com/office/powerpoint/2010/main" val="2416488832"/>
-      </p:ext>
-    </p:extLst>
-  </p:cSld>
-  <p:clrMapOvr>
-    <a:masterClrMapping/>
-  </p:clrMapOvr>
-</p:sld>
-</file>
-
-<file path=ppt/slides/slide19.xml><?xml version="1.0" encoding="utf-8"?>
-<p:sld xmlns:a="http://schemas.openxmlformats.org/drawingml/2006/main" xmlns:r="http://schemas.openxmlformats.org/officeDocument/2006/relationships" xmlns:p="http://schemas.openxmlformats.org/presentationml/2006/main">
-  <p:cSld>
-    <p:spTree>
-      <p:nvGrpSpPr>
-        <p:cNvPr id="1" name="">
-          <a:extLst>
-            <a:ext uri="{FF2B5EF4-FFF2-40B4-BE49-F238E27FC236}">
-              <a16:creationId xmlns:a16="http://schemas.microsoft.com/office/drawing/2014/main" id="{2C45E69E-D6D1-4AD3-06B5-5B6A8EB08D61}"/>
-            </a:ext>
-          </a:extLst>
-        </p:cNvPr>
-        <p:cNvGrpSpPr/>
-        <p:nvPr/>
-      </p:nvGrpSpPr>
-      <p:grpSpPr>
-        <a:xfrm>
-          <a:off x="0" y="0"/>
-          <a:ext cx="0" cy="0"/>
-          <a:chOff x="0" y="0"/>
-          <a:chExt cx="0" cy="0"/>
-        </a:xfrm>
-      </p:grpSpPr>
-      <p:sp>
-        <p:nvSpPr>
-          <p:cNvPr id="2" name="Título 1">
-            <a:extLst>
-              <a:ext uri="{FF2B5EF4-FFF2-40B4-BE49-F238E27FC236}">
-                <a16:creationId xmlns:a16="http://schemas.microsoft.com/office/drawing/2014/main" id="{BD33C474-2D67-9B56-502E-CB96091AC8F6}"/>
-              </a:ext>
-            </a:extLst>
-          </p:cNvPr>
-          <p:cNvSpPr>
-            <a:spLocks noGrp="1"/>
-          </p:cNvSpPr>
-          <p:nvPr>
-            <p:ph type="title"/>
-          </p:nvPr>
-        </p:nvSpPr>
-        <p:spPr>
-          <a:xfrm>
-            <a:off x="1038225" y="1"/>
-            <a:ext cx="10515600" cy="819150"/>
-          </a:xfrm>
-        </p:spPr>
-        <p:txBody>
-          <a:bodyPr/>
-          <a:lstStyle/>
-          <a:p>
-            <a:r>
-              <a:rPr lang="es-ES" dirty="0" err="1"/>
-              <a:t>What</a:t>
-            </a:r>
-            <a:r>
-              <a:rPr lang="es-ES" dirty="0"/>
-              <a:t> </a:t>
-            </a:r>
-            <a:r>
-              <a:rPr lang="es-ES" dirty="0" err="1"/>
-              <a:t>happens</a:t>
-            </a:r>
-            <a:r>
-              <a:rPr lang="es-ES" dirty="0"/>
-              <a:t> </a:t>
-            </a:r>
-            <a:r>
-              <a:rPr lang="es-ES" dirty="0" err="1"/>
-              <a:t>with</a:t>
-            </a:r>
-            <a:r>
-              <a:rPr lang="es-ES" dirty="0"/>
-              <a:t> sex</a:t>
-            </a:r>
-          </a:p>
-        </p:txBody>
-      </p:sp>
-      <p:pic>
-        <p:nvPicPr>
-          <p:cNvPr id="5" name="Imagen 4">
-            <a:extLst>
-              <a:ext uri="{FF2B5EF4-FFF2-40B4-BE49-F238E27FC236}">
-                <a16:creationId xmlns:a16="http://schemas.microsoft.com/office/drawing/2014/main" id="{6B11D5FD-2E80-9ACA-B59D-3C7320B87C04}"/>
-              </a:ext>
-            </a:extLst>
-          </p:cNvPr>
-          <p:cNvPicPr>
-            <a:picLocks noChangeAspect="1"/>
-          </p:cNvPicPr>
-          <p:nvPr/>
-        </p:nvPicPr>
-        <p:blipFill>
-          <a:blip r:embed="rId2"/>
-          <a:stretch>
-            <a:fillRect/>
-          </a:stretch>
-        </p:blipFill>
-        <p:spPr>
-          <a:xfrm>
-            <a:off x="1038225" y="1051899"/>
-            <a:ext cx="9659165" cy="5168362"/>
-          </a:xfrm>
-          <a:prstGeom prst="rect">
-            <a:avLst/>
-          </a:prstGeom>
-        </p:spPr>
-      </p:pic>
-      <p:sp>
-        <p:nvSpPr>
-          <p:cNvPr id="6" name="Elipse 5">
-            <a:extLst>
-              <a:ext uri="{FF2B5EF4-FFF2-40B4-BE49-F238E27FC236}">
-                <a16:creationId xmlns:a16="http://schemas.microsoft.com/office/drawing/2014/main" id="{165A52C4-A52F-14F9-439C-0AF41AC8DAFB}"/>
-              </a:ext>
-            </a:extLst>
-          </p:cNvPr>
-          <p:cNvSpPr/>
-          <p:nvPr/>
-        </p:nvSpPr>
-        <p:spPr>
-          <a:xfrm>
-            <a:off x="8867775" y="1047929"/>
-            <a:ext cx="2428875" cy="3990796"/>
-          </a:xfrm>
-          <a:prstGeom prst="ellipse">
-            <a:avLst/>
-          </a:prstGeom>
-          <a:noFill/>
-          <a:ln w="38100">
-            <a:solidFill>
-              <a:srgbClr val="FF0000"/>
-            </a:solidFill>
-          </a:ln>
-        </p:spPr>
-        <p:style>
-          <a:lnRef idx="2">
-            <a:schemeClr val="accent1">
-              <a:shade val="15000"/>
-            </a:schemeClr>
-          </a:lnRef>
-          <a:fillRef idx="1">
-            <a:schemeClr val="accent1"/>
-          </a:fillRef>
-          <a:effectRef idx="0">
-            <a:schemeClr val="accent1"/>
-          </a:effectRef>
-          <a:fontRef idx="minor">
-            <a:schemeClr val="lt1"/>
-          </a:fontRef>
-        </p:style>
-        <p:txBody>
-          <a:bodyPr rtlCol="0" anchor="ctr"/>
-          <a:lstStyle/>
-          <a:p>
-            <a:pPr algn="ctr"/>
-            <a:endParaRPr lang="es-ES"/>
-          </a:p>
-        </p:txBody>
-      </p:sp>
-      <p:sp>
-        <p:nvSpPr>
-          <p:cNvPr id="7" name="CuadroTexto 6">
-            <a:extLst>
-              <a:ext uri="{FF2B5EF4-FFF2-40B4-BE49-F238E27FC236}">
-                <a16:creationId xmlns:a16="http://schemas.microsoft.com/office/drawing/2014/main" id="{A89E7F36-A2C7-9150-B682-F0852D91DB55}"/>
-              </a:ext>
-            </a:extLst>
-          </p:cNvPr>
-          <p:cNvSpPr txBox="1"/>
-          <p:nvPr/>
-        </p:nvSpPr>
-        <p:spPr>
-          <a:xfrm>
-            <a:off x="8496301" y="5267503"/>
-            <a:ext cx="3648074" cy="1200329"/>
-          </a:xfrm>
-          <a:prstGeom prst="rect">
-            <a:avLst/>
-          </a:prstGeom>
-          <a:noFill/>
-        </p:spPr>
-        <p:txBody>
-          <a:bodyPr wrap="square" rtlCol="0">
-            <a:spAutoFit/>
-          </a:bodyPr>
-          <a:lstStyle/>
-          <a:p>
-            <a:r>
-              <a:rPr lang="es-ES" dirty="0"/>
-              <a:t>More </a:t>
-            </a:r>
-            <a:r>
-              <a:rPr lang="es-ES" dirty="0" err="1"/>
-              <a:t>differences</a:t>
-            </a:r>
-            <a:r>
-              <a:rPr lang="es-ES" dirty="0"/>
-              <a:t> in </a:t>
-            </a:r>
-            <a:r>
-              <a:rPr lang="es-ES" dirty="0" err="1"/>
-              <a:t>mixed</a:t>
-            </a:r>
-            <a:r>
-              <a:rPr lang="es-ES" dirty="0"/>
-              <a:t> </a:t>
-            </a:r>
-            <a:r>
-              <a:rPr lang="es-ES" dirty="0" err="1"/>
-              <a:t>handedness</a:t>
-            </a:r>
-            <a:r>
-              <a:rPr lang="es-ES" dirty="0"/>
-              <a:t> in males </a:t>
-            </a:r>
-            <a:r>
-              <a:rPr lang="es-ES" dirty="0" err="1"/>
-              <a:t>when</a:t>
-            </a:r>
-            <a:r>
-              <a:rPr lang="es-ES" dirty="0"/>
-              <a:t> </a:t>
-            </a:r>
-            <a:r>
-              <a:rPr lang="es-ES" dirty="0" err="1"/>
-              <a:t>comparing</a:t>
-            </a:r>
-            <a:r>
-              <a:rPr lang="es-ES" dirty="0"/>
-              <a:t> BD and </a:t>
-            </a:r>
-            <a:r>
-              <a:rPr lang="es-ES" dirty="0" err="1"/>
-              <a:t>controls</a:t>
-            </a:r>
-            <a:r>
-              <a:rPr lang="es-ES" dirty="0"/>
-              <a:t>, </a:t>
-            </a:r>
-            <a:r>
-              <a:rPr lang="es-ES" dirty="0" err="1"/>
-              <a:t>but</a:t>
-            </a:r>
-            <a:r>
-              <a:rPr lang="es-ES" dirty="0"/>
-              <a:t> </a:t>
-            </a:r>
-            <a:r>
-              <a:rPr lang="es-ES" dirty="0" err="1"/>
-              <a:t>still</a:t>
-            </a:r>
-            <a:r>
-              <a:rPr lang="es-ES" dirty="0"/>
-              <a:t> </a:t>
-            </a:r>
-            <a:r>
-              <a:rPr lang="es-ES" dirty="0" err="1"/>
-              <a:t>some</a:t>
-            </a:r>
-            <a:r>
-              <a:rPr lang="es-ES" dirty="0"/>
-              <a:t> in </a:t>
-            </a:r>
-            <a:r>
-              <a:rPr lang="es-ES" dirty="0" err="1"/>
-              <a:t>females</a:t>
-            </a:r>
-            <a:endParaRPr lang="es-ES" dirty="0"/>
-          </a:p>
-        </p:txBody>
-      </p:sp>
-    </p:spTree>
-    <p:extLst>
-      <p:ext uri="{BB962C8B-B14F-4D97-AF65-F5344CB8AC3E}">
-        <p14:creationId xmlns:p14="http://schemas.microsoft.com/office/powerpoint/2010/main" val="2911881243"/>
-      </p:ext>
-    </p:extLst>
-  </p:cSld>
-  <p:clrMapOvr>
-    <a:masterClrMapping/>
-  </p:clrMapOvr>
-</p:sld>
-</file>
-
-<file path=ppt/slides/slide2.xml><?xml version="1.0" encoding="utf-8"?>
-<p:sld xmlns:a="http://schemas.openxmlformats.org/drawingml/2006/main" xmlns:r="http://schemas.openxmlformats.org/officeDocument/2006/relationships" xmlns:p="http://schemas.openxmlformats.org/presentationml/2006/main">
-  <p:cSld>
-    <p:spTree>
-      <p:nvGrpSpPr>
-        <p:cNvPr id="1" name="">
-          <a:extLst>
-            <a:ext uri="{FF2B5EF4-FFF2-40B4-BE49-F238E27FC236}">
-              <a16:creationId xmlns:a16="http://schemas.microsoft.com/office/drawing/2014/main" id="{14A6D52E-C582-5610-5F55-C680D3402604}"/>
-            </a:ext>
-          </a:extLst>
-        </p:cNvPr>
-        <p:cNvGrpSpPr/>
-        <p:nvPr/>
-      </p:nvGrpSpPr>
-      <p:grpSpPr>
-        <a:xfrm>
-          <a:off x="0" y="0"/>
-          <a:ext cx="0" cy="0"/>
-          <a:chOff x="0" y="0"/>
-          <a:chExt cx="0" cy="0"/>
-        </a:xfrm>
-      </p:grpSpPr>
-      <p:sp>
-        <p:nvSpPr>
-          <p:cNvPr id="2" name="Título 1">
-            <a:extLst>
-              <a:ext uri="{FF2B5EF4-FFF2-40B4-BE49-F238E27FC236}">
-                <a16:creationId xmlns:a16="http://schemas.microsoft.com/office/drawing/2014/main" id="{89142DFA-7875-B2A4-50D3-03BECAA82518}"/>
-              </a:ext>
-            </a:extLst>
-          </p:cNvPr>
-          <p:cNvSpPr>
-            <a:spLocks noGrp="1"/>
-          </p:cNvSpPr>
-          <p:nvPr>
-            <p:ph type="title"/>
-          </p:nvPr>
-        </p:nvSpPr>
-        <p:spPr/>
-        <p:txBody>
-          <a:bodyPr/>
-          <a:lstStyle/>
-          <a:p>
-            <a:r>
-              <a:rPr lang="es-ES" dirty="0" err="1"/>
-              <a:t>Where</a:t>
-            </a:r>
-            <a:r>
-              <a:rPr lang="es-ES" dirty="0"/>
-              <a:t> </a:t>
-            </a:r>
-            <a:r>
-              <a:rPr lang="es-ES" dirty="0" err="1"/>
-              <a:t>to</a:t>
-            </a:r>
-            <a:r>
-              <a:rPr lang="es-ES" dirty="0"/>
-              <a:t> set </a:t>
-            </a:r>
-            <a:r>
-              <a:rPr lang="es-ES" dirty="0" err="1"/>
-              <a:t>the</a:t>
-            </a:r>
-            <a:r>
-              <a:rPr lang="es-ES" dirty="0"/>
-              <a:t> </a:t>
-            </a:r>
-            <a:r>
-              <a:rPr lang="es-ES" dirty="0" err="1"/>
-              <a:t>threshold</a:t>
-            </a:r>
-            <a:r>
-              <a:rPr lang="es-ES" dirty="0"/>
-              <a:t>?</a:t>
-            </a:r>
-          </a:p>
-        </p:txBody>
-      </p:sp>
-      <p:sp>
-        <p:nvSpPr>
-          <p:cNvPr id="3" name="Marcador de contenido 2">
-            <a:extLst>
-              <a:ext uri="{FF2B5EF4-FFF2-40B4-BE49-F238E27FC236}">
-                <a16:creationId xmlns:a16="http://schemas.microsoft.com/office/drawing/2014/main" id="{1658E8DA-0730-FD86-1581-B5D3A962A2E0}"/>
-              </a:ext>
-            </a:extLst>
-          </p:cNvPr>
-          <p:cNvSpPr>
-            <a:spLocks noGrp="1"/>
-          </p:cNvSpPr>
-          <p:nvPr>
-            <p:ph idx="1"/>
-          </p:nvPr>
-        </p:nvSpPr>
-        <p:spPr>
-          <a:xfrm>
-            <a:off x="838200" y="1825625"/>
-            <a:ext cx="7208520" cy="222631"/>
-          </a:xfrm>
-        </p:spPr>
-        <p:txBody>
-          <a:bodyPr>
-            <a:normAutofit fontScale="40000" lnSpcReduction="20000"/>
-          </a:bodyPr>
-          <a:lstStyle/>
-          <a:p>
-            <a:pPr marL="0" indent="0">
-              <a:buNone/>
-            </a:pPr>
-            <a:r>
-              <a:rPr lang="es-ES" dirty="0">
-                <a:hlinkClick r:id="rId2"/>
-              </a:rPr>
-              <a:t>https://doi.org/10.1016/j.bandc.2015.01.003</a:t>
-            </a:r>
-            <a:endParaRPr lang="es-ES" dirty="0"/>
-          </a:p>
-          <a:p>
-            <a:pPr marL="0" indent="0">
-              <a:buNone/>
-            </a:pPr>
-            <a:endParaRPr lang="es-ES" dirty="0"/>
-          </a:p>
-        </p:txBody>
-      </p:sp>
-      <p:pic>
-        <p:nvPicPr>
-          <p:cNvPr id="4" name="Imagen 3">
-            <a:extLst>
-              <a:ext uri="{FF2B5EF4-FFF2-40B4-BE49-F238E27FC236}">
-                <a16:creationId xmlns:a16="http://schemas.microsoft.com/office/drawing/2014/main" id="{B01CAE9D-2DB0-0C57-74F6-A5F765C9F1E9}"/>
-              </a:ext>
-            </a:extLst>
-          </p:cNvPr>
-          <p:cNvPicPr>
-            <a:picLocks noChangeAspect="1" noChangeArrowheads="1"/>
-          </p:cNvPicPr>
-          <p:nvPr/>
-        </p:nvPicPr>
-        <p:blipFill>
-          <a:blip r:embed="rId3">
-            <a:extLst>
-              <a:ext uri="{28A0092B-C50C-407E-A947-70E740481C1C}">
-                <a14:useLocalDpi xmlns:a14="http://schemas.microsoft.com/office/drawing/2010/main" val="0"/>
-              </a:ext>
-            </a:extLst>
-          </a:blip>
-          <a:srcRect/>
-          <a:stretch>
-            <a:fillRect/>
-          </a:stretch>
-        </p:blipFill>
-        <p:spPr bwMode="auto">
-          <a:xfrm>
-            <a:off x="939615" y="3163824"/>
-            <a:ext cx="6266960" cy="3503750"/>
-          </a:xfrm>
-          <a:prstGeom prst="rect">
-            <a:avLst/>
-          </a:prstGeom>
-          <a:noFill/>
-          <a:extLst>
-            <a:ext uri="{909E8E84-426E-40DD-AFC4-6F175D3DCCD1}">
-              <a14:hiddenFill xmlns:a14="http://schemas.microsoft.com/office/drawing/2010/main">
-                <a:solidFill>
-                  <a:srgbClr val="FFFFFF"/>
-                </a:solidFill>
-              </a14:hiddenFill>
-            </a:ext>
-          </a:extLst>
-        </p:spPr>
-      </p:pic>
-      <p:pic>
-        <p:nvPicPr>
-          <p:cNvPr id="6" name="Imagen 5">
-            <a:extLst>
-              <a:ext uri="{FF2B5EF4-FFF2-40B4-BE49-F238E27FC236}">
-                <a16:creationId xmlns:a16="http://schemas.microsoft.com/office/drawing/2014/main" id="{FC4F1DF5-ED4F-C9F2-B3CC-34DE46D23EC3}"/>
-              </a:ext>
-            </a:extLst>
-          </p:cNvPr>
-          <p:cNvPicPr>
-            <a:picLocks noChangeAspect="1"/>
-          </p:cNvPicPr>
-          <p:nvPr/>
-        </p:nvPicPr>
-        <p:blipFill>
-          <a:blip r:embed="rId4"/>
-          <a:stretch>
-            <a:fillRect/>
-          </a:stretch>
-        </p:blipFill>
-        <p:spPr>
-          <a:xfrm>
-            <a:off x="5053759" y="1205686"/>
-            <a:ext cx="6597455" cy="2526388"/>
-          </a:xfrm>
-          <a:prstGeom prst="rect">
-            <a:avLst/>
-          </a:prstGeom>
-        </p:spPr>
-      </p:pic>
-    </p:spTree>
-    <p:extLst>
-      <p:ext uri="{BB962C8B-B14F-4D97-AF65-F5344CB8AC3E}">
-        <p14:creationId xmlns:p14="http://schemas.microsoft.com/office/powerpoint/2010/main" val="209783011"/>
-      </p:ext>
-    </p:extLst>
-  </p:cSld>
-  <p:clrMapOvr>
-    <a:masterClrMapping/>
-  </p:clrMapOvr>
-</p:sld>
-</file>
-
-<file path=ppt/slides/slide20.xml><?xml version="1.0" encoding="utf-8"?>
-<p:sld xmlns:a="http://schemas.openxmlformats.org/drawingml/2006/main" xmlns:r="http://schemas.openxmlformats.org/officeDocument/2006/relationships" xmlns:p="http://schemas.openxmlformats.org/presentationml/2006/main">
-  <p:cSld>
-    <p:spTree>
-      <p:nvGrpSpPr>
-        <p:cNvPr id="1" name=""/>
-        <p:cNvGrpSpPr/>
-        <p:nvPr/>
-      </p:nvGrpSpPr>
-      <p:grpSpPr>
-        <a:xfrm>
-          <a:off x="0" y="0"/>
-          <a:ext cx="0" cy="0"/>
-          <a:chOff x="0" y="0"/>
-          <a:chExt cx="0" cy="0"/>
-        </a:xfrm>
-      </p:grpSpPr>
-      <p:sp>
-        <p:nvSpPr>
-          <p:cNvPr id="2" name="Título 1">
-            <a:extLst>
-              <a:ext uri="{FF2B5EF4-FFF2-40B4-BE49-F238E27FC236}">
-                <a16:creationId xmlns:a16="http://schemas.microsoft.com/office/drawing/2014/main" id="{012B7AEC-912E-E537-49CF-8AB9562C2865}"/>
-              </a:ext>
-            </a:extLst>
-          </p:cNvPr>
-          <p:cNvSpPr>
-            <a:spLocks noGrp="1"/>
-          </p:cNvSpPr>
-          <p:nvPr>
-            <p:ph type="title"/>
-          </p:nvPr>
-        </p:nvSpPr>
-        <p:spPr/>
-        <p:txBody>
-          <a:bodyPr/>
-          <a:lstStyle/>
-          <a:p>
-            <a:r>
-              <a:rPr lang="es-ES" dirty="0" err="1"/>
-              <a:t>Integrating</a:t>
-            </a:r>
-            <a:r>
-              <a:rPr lang="es-ES" dirty="0"/>
-              <a:t> </a:t>
-            </a:r>
-            <a:r>
-              <a:rPr lang="es-ES" dirty="0" err="1"/>
-              <a:t>age</a:t>
-            </a:r>
-            <a:endParaRPr lang="es-ES" dirty="0"/>
-          </a:p>
-        </p:txBody>
-      </p:sp>
-      <p:pic>
-        <p:nvPicPr>
-          <p:cNvPr id="5" name="Imagen 4">
-            <a:extLst>
-              <a:ext uri="{FF2B5EF4-FFF2-40B4-BE49-F238E27FC236}">
-                <a16:creationId xmlns:a16="http://schemas.microsoft.com/office/drawing/2014/main" id="{B5195715-B22A-C533-80D7-65A0F98881C9}"/>
-              </a:ext>
-            </a:extLst>
-          </p:cNvPr>
-          <p:cNvPicPr>
-            <a:picLocks noChangeAspect="1"/>
-          </p:cNvPicPr>
-          <p:nvPr/>
-        </p:nvPicPr>
-        <p:blipFill>
-          <a:blip r:embed="rId2">
-            <a:extLst>
-              <a:ext uri="{28A0092B-C50C-407E-A947-70E740481C1C}">
-                <a14:useLocalDpi xmlns:a14="http://schemas.microsoft.com/office/drawing/2010/main" val="0"/>
-              </a:ext>
-            </a:extLst>
-          </a:blip>
-          <a:stretch>
-            <a:fillRect/>
-          </a:stretch>
-        </p:blipFill>
-        <p:spPr>
-          <a:xfrm>
-            <a:off x="1164337" y="1408703"/>
-            <a:ext cx="4572000" cy="4572000"/>
-          </a:xfrm>
-          <a:prstGeom prst="rect">
-            <a:avLst/>
-          </a:prstGeom>
-        </p:spPr>
-      </p:pic>
-      <p:sp>
-        <p:nvSpPr>
-          <p:cNvPr id="6" name="CuadroTexto 5">
-            <a:extLst>
-              <a:ext uri="{FF2B5EF4-FFF2-40B4-BE49-F238E27FC236}">
-                <a16:creationId xmlns:a16="http://schemas.microsoft.com/office/drawing/2014/main" id="{DC4DEDBA-266C-01CA-C825-0FCF0A413E91}"/>
-              </a:ext>
-            </a:extLst>
-          </p:cNvPr>
-          <p:cNvSpPr txBox="1"/>
-          <p:nvPr/>
-        </p:nvSpPr>
-        <p:spPr>
-          <a:xfrm>
-            <a:off x="4600575" y="800675"/>
-            <a:ext cx="4419600" cy="646331"/>
-          </a:xfrm>
-          <a:prstGeom prst="rect">
-            <a:avLst/>
-          </a:prstGeom>
-          <a:noFill/>
-        </p:spPr>
-        <p:txBody>
-          <a:bodyPr wrap="square" rtlCol="0">
-            <a:spAutoFit/>
-          </a:bodyPr>
-          <a:lstStyle/>
-          <a:p>
-            <a:r>
-              <a:rPr lang="es-ES" dirty="0"/>
-              <a:t>Wild </a:t>
-            </a:r>
-            <a:r>
-              <a:rPr lang="es-ES" dirty="0" err="1"/>
-              <a:t>difference</a:t>
-            </a:r>
-            <a:r>
-              <a:rPr lang="es-ES" dirty="0"/>
-              <a:t> in </a:t>
-            </a:r>
-            <a:r>
-              <a:rPr lang="es-ES" dirty="0" err="1"/>
-              <a:t>age</a:t>
-            </a:r>
-            <a:r>
-              <a:rPr lang="es-ES" dirty="0"/>
-              <a:t> </a:t>
-            </a:r>
-            <a:r>
-              <a:rPr lang="es-ES" dirty="0" err="1"/>
-              <a:t>distribution</a:t>
-            </a:r>
-            <a:r>
-              <a:rPr lang="es-ES" dirty="0"/>
-              <a:t> </a:t>
-            </a:r>
-            <a:r>
-              <a:rPr lang="es-ES" dirty="0" err="1"/>
-              <a:t>between</a:t>
-            </a:r>
-            <a:r>
-              <a:rPr lang="es-ES" dirty="0"/>
-              <a:t> cases and </a:t>
-            </a:r>
-            <a:r>
-              <a:rPr lang="es-ES" dirty="0" err="1"/>
-              <a:t>controls</a:t>
-            </a:r>
-            <a:r>
-              <a:rPr lang="es-ES" dirty="0"/>
-              <a:t>.</a:t>
-            </a:r>
-          </a:p>
-        </p:txBody>
-      </p:sp>
-      <p:pic>
-        <p:nvPicPr>
-          <p:cNvPr id="8" name="Imagen 7">
-            <a:extLst>
-              <a:ext uri="{FF2B5EF4-FFF2-40B4-BE49-F238E27FC236}">
-                <a16:creationId xmlns:a16="http://schemas.microsoft.com/office/drawing/2014/main" id="{774BE5A2-54E1-008F-D2E2-E5167E1A8924}"/>
-              </a:ext>
-            </a:extLst>
-          </p:cNvPr>
-          <p:cNvPicPr>
-            <a:picLocks noChangeAspect="1"/>
-          </p:cNvPicPr>
-          <p:nvPr/>
-        </p:nvPicPr>
-        <p:blipFill>
-          <a:blip r:embed="rId3">
-            <a:extLst>
-              <a:ext uri="{28A0092B-C50C-407E-A947-70E740481C1C}">
-                <a14:useLocalDpi xmlns:a14="http://schemas.microsoft.com/office/drawing/2010/main" val="0"/>
-              </a:ext>
-            </a:extLst>
-          </a:blip>
-          <a:stretch>
-            <a:fillRect/>
-          </a:stretch>
-        </p:blipFill>
-        <p:spPr>
-          <a:xfrm>
-            <a:off x="6781800" y="1447006"/>
-            <a:ext cx="4572000" cy="4572000"/>
-          </a:xfrm>
-          <a:prstGeom prst="rect">
-            <a:avLst/>
-          </a:prstGeom>
-        </p:spPr>
-      </p:pic>
-      <p:sp>
-        <p:nvSpPr>
-          <p:cNvPr id="9" name="Flecha: a la derecha 8">
-            <a:extLst>
-              <a:ext uri="{FF2B5EF4-FFF2-40B4-BE49-F238E27FC236}">
-                <a16:creationId xmlns:a16="http://schemas.microsoft.com/office/drawing/2014/main" id="{658A29A5-CAC4-1790-15E0-F363957C8876}"/>
-              </a:ext>
-            </a:extLst>
-          </p:cNvPr>
-          <p:cNvSpPr/>
-          <p:nvPr/>
-        </p:nvSpPr>
-        <p:spPr>
-          <a:xfrm>
-            <a:off x="5067300" y="4381500"/>
-            <a:ext cx="1628775" cy="133350"/>
-          </a:xfrm>
-          <a:prstGeom prst="rightArrow">
-            <a:avLst/>
-          </a:prstGeom>
-        </p:spPr>
-        <p:style>
-          <a:lnRef idx="2">
-            <a:schemeClr val="accent1">
-              <a:shade val="15000"/>
-            </a:schemeClr>
-          </a:lnRef>
-          <a:fillRef idx="1">
-            <a:schemeClr val="accent1"/>
-          </a:fillRef>
-          <a:effectRef idx="0">
-            <a:schemeClr val="accent1"/>
-          </a:effectRef>
-          <a:fontRef idx="minor">
-            <a:schemeClr val="lt1"/>
-          </a:fontRef>
-        </p:style>
-        <p:txBody>
-          <a:bodyPr rtlCol="0" anchor="ctr"/>
-          <a:lstStyle/>
-          <a:p>
-            <a:pPr algn="ctr"/>
-            <a:endParaRPr lang="es-ES"/>
-          </a:p>
-        </p:txBody>
-      </p:sp>
-      <p:sp>
-        <p:nvSpPr>
-          <p:cNvPr id="10" name="CuadroTexto 9">
-            <a:extLst>
-              <a:ext uri="{FF2B5EF4-FFF2-40B4-BE49-F238E27FC236}">
-                <a16:creationId xmlns:a16="http://schemas.microsoft.com/office/drawing/2014/main" id="{E7BEC117-03FE-FEDE-2893-7D8BCD55977F}"/>
-              </a:ext>
-            </a:extLst>
-          </p:cNvPr>
-          <p:cNvSpPr txBox="1"/>
-          <p:nvPr/>
-        </p:nvSpPr>
-        <p:spPr>
-          <a:xfrm>
-            <a:off x="114300" y="5808479"/>
-            <a:ext cx="3495675" cy="369332"/>
-          </a:xfrm>
-          <a:prstGeom prst="rect">
-            <a:avLst/>
-          </a:prstGeom>
-          <a:noFill/>
-        </p:spPr>
-        <p:txBody>
-          <a:bodyPr wrap="square" rtlCol="0">
-            <a:spAutoFit/>
-          </a:bodyPr>
-          <a:lstStyle/>
-          <a:p>
-            <a:r>
-              <a:rPr lang="es-ES" dirty="0"/>
-              <a:t>436 BD, 1,493 </a:t>
-            </a:r>
-            <a:r>
-              <a:rPr lang="es-ES" dirty="0" err="1"/>
-              <a:t>controls</a:t>
-            </a:r>
-            <a:endParaRPr lang="es-ES" dirty="0"/>
-          </a:p>
-        </p:txBody>
-      </p:sp>
-      <p:sp>
-        <p:nvSpPr>
-          <p:cNvPr id="11" name="CuadroTexto 10">
-            <a:extLst>
-              <a:ext uri="{FF2B5EF4-FFF2-40B4-BE49-F238E27FC236}">
-                <a16:creationId xmlns:a16="http://schemas.microsoft.com/office/drawing/2014/main" id="{78550E95-A3C5-0E2F-406C-F3B826B19225}"/>
-              </a:ext>
-            </a:extLst>
-          </p:cNvPr>
-          <p:cNvSpPr txBox="1"/>
-          <p:nvPr/>
-        </p:nvSpPr>
-        <p:spPr>
-          <a:xfrm>
-            <a:off x="6848285" y="6094202"/>
-            <a:ext cx="3495675" cy="369332"/>
-          </a:xfrm>
-          <a:prstGeom prst="rect">
-            <a:avLst/>
-          </a:prstGeom>
-          <a:noFill/>
-        </p:spPr>
-        <p:txBody>
-          <a:bodyPr wrap="square" rtlCol="0">
-            <a:spAutoFit/>
-          </a:bodyPr>
-          <a:lstStyle/>
-          <a:p>
-            <a:r>
-              <a:rPr lang="es-ES" dirty="0"/>
-              <a:t>433 BD, 433 </a:t>
-            </a:r>
-            <a:r>
-              <a:rPr lang="es-ES" dirty="0" err="1"/>
-              <a:t>controls</a:t>
-            </a:r>
-            <a:endParaRPr lang="es-ES" dirty="0"/>
-          </a:p>
-        </p:txBody>
-      </p:sp>
-      <p:pic>
-        <p:nvPicPr>
-          <p:cNvPr id="13" name="Imagen 12">
-            <a:extLst>
-              <a:ext uri="{FF2B5EF4-FFF2-40B4-BE49-F238E27FC236}">
-                <a16:creationId xmlns:a16="http://schemas.microsoft.com/office/drawing/2014/main" id="{2F465F3F-A552-3C79-0A04-D6BCD2636E33}"/>
-              </a:ext>
-            </a:extLst>
-          </p:cNvPr>
-          <p:cNvPicPr>
-            <a:picLocks noChangeAspect="1"/>
-          </p:cNvPicPr>
-          <p:nvPr/>
-        </p:nvPicPr>
-        <p:blipFill>
-          <a:blip r:embed="rId4"/>
-          <a:stretch>
-            <a:fillRect/>
-          </a:stretch>
-        </p:blipFill>
-        <p:spPr>
-          <a:xfrm>
-            <a:off x="9262873" y="5850520"/>
-            <a:ext cx="2715004" cy="800212"/>
-          </a:xfrm>
-          <a:prstGeom prst="rect">
-            <a:avLst/>
-          </a:prstGeom>
-        </p:spPr>
-      </p:pic>
-      <p:pic>
-        <p:nvPicPr>
-          <p:cNvPr id="15" name="Imagen 14">
-            <a:extLst>
-              <a:ext uri="{FF2B5EF4-FFF2-40B4-BE49-F238E27FC236}">
-                <a16:creationId xmlns:a16="http://schemas.microsoft.com/office/drawing/2014/main" id="{8C1A78F7-817A-9690-396C-1EE16677B88D}"/>
-              </a:ext>
-            </a:extLst>
-          </p:cNvPr>
-          <p:cNvPicPr>
-            <a:picLocks noChangeAspect="1"/>
-          </p:cNvPicPr>
-          <p:nvPr/>
-        </p:nvPicPr>
-        <p:blipFill>
-          <a:blip r:embed="rId5"/>
-          <a:stretch>
-            <a:fillRect/>
-          </a:stretch>
-        </p:blipFill>
-        <p:spPr>
-          <a:xfrm>
-            <a:off x="2175793" y="6152927"/>
-            <a:ext cx="2743583" cy="647790"/>
-          </a:xfrm>
-          <a:prstGeom prst="rect">
-            <a:avLst/>
-          </a:prstGeom>
-        </p:spPr>
-      </p:pic>
-    </p:spTree>
-    <p:extLst>
-      <p:ext uri="{BB962C8B-B14F-4D97-AF65-F5344CB8AC3E}">
-        <p14:creationId xmlns:p14="http://schemas.microsoft.com/office/powerpoint/2010/main" val="4285407713"/>
-      </p:ext>
-    </p:extLst>
-  </p:cSld>
-  <p:clrMapOvr>
-    <a:masterClrMapping/>
-  </p:clrMapOvr>
-</p:sld>
-</file>
-
-<file path=ppt/slides/slide21.xml><?xml version="1.0" encoding="utf-8"?>
-<p:sld xmlns:a="http://schemas.openxmlformats.org/drawingml/2006/main" xmlns:r="http://schemas.openxmlformats.org/officeDocument/2006/relationships" xmlns:p="http://schemas.openxmlformats.org/presentationml/2006/main">
-  <p:cSld>
-    <p:spTree>
-      <p:nvGrpSpPr>
-        <p:cNvPr id="1" name=""/>
-        <p:cNvGrpSpPr/>
-        <p:nvPr/>
-      </p:nvGrpSpPr>
-      <p:grpSpPr>
-        <a:xfrm>
-          <a:off x="0" y="0"/>
-          <a:ext cx="0" cy="0"/>
-          <a:chOff x="0" y="0"/>
-          <a:chExt cx="0" cy="0"/>
-        </a:xfrm>
-      </p:grpSpPr>
-      <p:sp>
-        <p:nvSpPr>
-          <p:cNvPr id="2" name="Título 1">
-            <a:extLst>
-              <a:ext uri="{FF2B5EF4-FFF2-40B4-BE49-F238E27FC236}">
-                <a16:creationId xmlns:a16="http://schemas.microsoft.com/office/drawing/2014/main" id="{38F04E80-F3F9-B73D-F4D7-21B314FC803C}"/>
-              </a:ext>
-            </a:extLst>
-          </p:cNvPr>
-          <p:cNvSpPr>
-            <a:spLocks noGrp="1"/>
-          </p:cNvSpPr>
-          <p:nvPr>
-            <p:ph type="title"/>
-          </p:nvPr>
-        </p:nvSpPr>
-        <p:spPr/>
-        <p:txBody>
-          <a:bodyPr/>
-          <a:lstStyle/>
-          <a:p>
-            <a:r>
-              <a:rPr lang="es-ES" dirty="0"/>
-              <a:t>LQ </a:t>
-            </a:r>
-            <a:r>
-              <a:rPr lang="es-ES" dirty="0" err="1"/>
-              <a:t>dist</a:t>
-            </a:r>
-            <a:r>
-              <a:rPr lang="es-ES" dirty="0"/>
-              <a:t> in </a:t>
-            </a:r>
-            <a:r>
-              <a:rPr lang="es-ES" dirty="0" err="1"/>
-              <a:t>all</a:t>
-            </a:r>
-            <a:endParaRPr lang="es-ES" dirty="0"/>
-          </a:p>
-        </p:txBody>
-      </p:sp>
-      <p:pic>
-        <p:nvPicPr>
-          <p:cNvPr id="5" name="Imagen 4">
-            <a:extLst>
-              <a:ext uri="{FF2B5EF4-FFF2-40B4-BE49-F238E27FC236}">
-                <a16:creationId xmlns:a16="http://schemas.microsoft.com/office/drawing/2014/main" id="{49A1E4D9-82F2-67CA-E789-8EF1CBE0B93F}"/>
-              </a:ext>
-            </a:extLst>
-          </p:cNvPr>
-          <p:cNvPicPr>
-            <a:picLocks noChangeAspect="1"/>
-          </p:cNvPicPr>
-          <p:nvPr/>
-        </p:nvPicPr>
-        <p:blipFill>
-          <a:blip r:embed="rId2">
-            <a:extLst>
-              <a:ext uri="{28A0092B-C50C-407E-A947-70E740481C1C}">
-                <a14:useLocalDpi xmlns:a14="http://schemas.microsoft.com/office/drawing/2010/main" val="0"/>
-              </a:ext>
-            </a:extLst>
-          </a:blip>
-          <a:stretch>
-            <a:fillRect/>
-          </a:stretch>
-        </p:blipFill>
-        <p:spPr>
-          <a:xfrm>
-            <a:off x="671816" y="1926554"/>
-            <a:ext cx="5719360" cy="4239465"/>
-          </a:xfrm>
-          <a:prstGeom prst="rect">
-            <a:avLst/>
-          </a:prstGeom>
-        </p:spPr>
-      </p:pic>
-      <p:pic>
-        <p:nvPicPr>
-          <p:cNvPr id="7" name="Imagen 6">
-            <a:extLst>
-              <a:ext uri="{FF2B5EF4-FFF2-40B4-BE49-F238E27FC236}">
-                <a16:creationId xmlns:a16="http://schemas.microsoft.com/office/drawing/2014/main" id="{1E0556F5-2FE0-7200-2248-ED34C79BF9E1}"/>
-              </a:ext>
-            </a:extLst>
-          </p:cNvPr>
-          <p:cNvPicPr>
-            <a:picLocks noChangeAspect="1"/>
-          </p:cNvPicPr>
-          <p:nvPr/>
-        </p:nvPicPr>
-        <p:blipFill>
-          <a:blip r:embed="rId3">
-            <a:extLst>
-              <a:ext uri="{28A0092B-C50C-407E-A947-70E740481C1C}">
-                <a14:useLocalDpi xmlns:a14="http://schemas.microsoft.com/office/drawing/2010/main" val="0"/>
-              </a:ext>
-            </a:extLst>
-          </a:blip>
-          <a:stretch>
-            <a:fillRect/>
-          </a:stretch>
-        </p:blipFill>
-        <p:spPr>
-          <a:xfrm>
-            <a:off x="6649453" y="1836019"/>
-            <a:ext cx="4572000" cy="4572000"/>
-          </a:xfrm>
-          <a:prstGeom prst="rect">
-            <a:avLst/>
-          </a:prstGeom>
-        </p:spPr>
-      </p:pic>
-      <p:sp>
-        <p:nvSpPr>
-          <p:cNvPr id="8" name="CuadroTexto 7">
-            <a:extLst>
-              <a:ext uri="{FF2B5EF4-FFF2-40B4-BE49-F238E27FC236}">
-                <a16:creationId xmlns:a16="http://schemas.microsoft.com/office/drawing/2014/main" id="{0D781989-FD45-6309-49DC-7AF3E6560E2C}"/>
-              </a:ext>
-            </a:extLst>
-          </p:cNvPr>
-          <p:cNvSpPr txBox="1"/>
-          <p:nvPr/>
-        </p:nvSpPr>
-        <p:spPr>
-          <a:xfrm>
-            <a:off x="1886552" y="6362299"/>
-            <a:ext cx="3397717" cy="369332"/>
-          </a:xfrm>
-          <a:prstGeom prst="rect">
-            <a:avLst/>
-          </a:prstGeom>
-          <a:noFill/>
-        </p:spPr>
-        <p:txBody>
-          <a:bodyPr wrap="square" rtlCol="0">
-            <a:spAutoFit/>
-          </a:bodyPr>
-          <a:lstStyle/>
-          <a:p>
-            <a:r>
-              <a:rPr lang="es-ES" dirty="0"/>
-              <a:t>Unbalanced</a:t>
-            </a:r>
-          </a:p>
-        </p:txBody>
-      </p:sp>
-      <p:sp>
-        <p:nvSpPr>
-          <p:cNvPr id="9" name="CuadroTexto 8">
-            <a:extLst>
-              <a:ext uri="{FF2B5EF4-FFF2-40B4-BE49-F238E27FC236}">
-                <a16:creationId xmlns:a16="http://schemas.microsoft.com/office/drawing/2014/main" id="{A03924BC-8173-6F02-DEAB-71264667233F}"/>
-              </a:ext>
-            </a:extLst>
-          </p:cNvPr>
-          <p:cNvSpPr txBox="1"/>
-          <p:nvPr/>
-        </p:nvSpPr>
-        <p:spPr>
-          <a:xfrm>
-            <a:off x="7823736" y="6376737"/>
-            <a:ext cx="3397717" cy="369332"/>
-          </a:xfrm>
-          <a:prstGeom prst="rect">
-            <a:avLst/>
-          </a:prstGeom>
-          <a:noFill/>
-        </p:spPr>
-        <p:txBody>
-          <a:bodyPr wrap="square" rtlCol="0">
-            <a:spAutoFit/>
-          </a:bodyPr>
-          <a:lstStyle/>
-          <a:p>
-            <a:r>
-              <a:rPr lang="es-ES" dirty="0" err="1"/>
-              <a:t>Balanced</a:t>
-            </a:r>
-            <a:endParaRPr lang="es-ES" dirty="0"/>
-          </a:p>
-        </p:txBody>
-      </p:sp>
-    </p:spTree>
-    <p:extLst>
-      <p:ext uri="{BB962C8B-B14F-4D97-AF65-F5344CB8AC3E}">
-        <p14:creationId xmlns:p14="http://schemas.microsoft.com/office/powerpoint/2010/main" val="3758407585"/>
-      </p:ext>
-    </p:extLst>
-  </p:cSld>
-  <p:clrMapOvr>
-    <a:masterClrMapping/>
-  </p:clrMapOvr>
-</p:sld>
-</file>
-
-<file path=ppt/slides/slide22.xml><?xml version="1.0" encoding="utf-8"?>
-<p:sld xmlns:a="http://schemas.openxmlformats.org/drawingml/2006/main" xmlns:r="http://schemas.openxmlformats.org/officeDocument/2006/relationships" xmlns:p="http://schemas.openxmlformats.org/presentationml/2006/main">
-  <p:cSld>
-    <p:spTree>
-      <p:nvGrpSpPr>
-        <p:cNvPr id="1" name=""/>
-        <p:cNvGrpSpPr/>
-        <p:nvPr/>
-      </p:nvGrpSpPr>
-      <p:grpSpPr>
-        <a:xfrm>
-          <a:off x="0" y="0"/>
-          <a:ext cx="0" cy="0"/>
-          <a:chOff x="0" y="0"/>
-          <a:chExt cx="0" cy="0"/>
-        </a:xfrm>
-      </p:grpSpPr>
-      <p:sp>
-        <p:nvSpPr>
-          <p:cNvPr id="2" name="Título 1">
-            <a:extLst>
-              <a:ext uri="{FF2B5EF4-FFF2-40B4-BE49-F238E27FC236}">
-                <a16:creationId xmlns:a16="http://schemas.microsoft.com/office/drawing/2014/main" id="{F3CD659E-4D6D-4319-DE56-24895C13FF15}"/>
-              </a:ext>
-            </a:extLst>
-          </p:cNvPr>
-          <p:cNvSpPr>
-            <a:spLocks noGrp="1"/>
-          </p:cNvSpPr>
-          <p:nvPr>
-            <p:ph type="title"/>
-          </p:nvPr>
-        </p:nvSpPr>
-        <p:spPr>
-          <a:xfrm>
-            <a:off x="510941" y="98976"/>
-            <a:ext cx="10515600" cy="1325563"/>
-          </a:xfrm>
-        </p:spPr>
-        <p:txBody>
-          <a:bodyPr/>
-          <a:lstStyle/>
-          <a:p>
-            <a:r>
-              <a:rPr lang="es-ES" dirty="0"/>
-              <a:t>LQ </a:t>
-            </a:r>
-            <a:r>
-              <a:rPr lang="es-ES" dirty="0" err="1"/>
-              <a:t>dist</a:t>
-            </a:r>
-            <a:r>
-              <a:rPr lang="es-ES" dirty="0"/>
-              <a:t> </a:t>
-            </a:r>
-            <a:r>
-              <a:rPr lang="es-ES" dirty="0" err="1"/>
-              <a:t>by</a:t>
-            </a:r>
-            <a:r>
-              <a:rPr lang="es-ES" dirty="0"/>
-              <a:t> BD</a:t>
-            </a:r>
-          </a:p>
-        </p:txBody>
-      </p:sp>
-      <p:pic>
-        <p:nvPicPr>
-          <p:cNvPr id="5" name="Imagen 4">
-            <a:extLst>
-              <a:ext uri="{FF2B5EF4-FFF2-40B4-BE49-F238E27FC236}">
-                <a16:creationId xmlns:a16="http://schemas.microsoft.com/office/drawing/2014/main" id="{A5BE3DDE-1516-F1DC-A3B3-013F65623606}"/>
-              </a:ext>
-            </a:extLst>
-          </p:cNvPr>
-          <p:cNvPicPr>
-            <a:picLocks noChangeAspect="1"/>
-          </p:cNvPicPr>
-          <p:nvPr/>
-        </p:nvPicPr>
-        <p:blipFill>
-          <a:blip r:embed="rId2">
-            <a:extLst>
-              <a:ext uri="{28A0092B-C50C-407E-A947-70E740481C1C}">
-                <a14:useLocalDpi xmlns:a14="http://schemas.microsoft.com/office/drawing/2010/main" val="0"/>
-              </a:ext>
-            </a:extLst>
-          </a:blip>
-          <a:stretch>
-            <a:fillRect/>
-          </a:stretch>
-        </p:blipFill>
-        <p:spPr>
-          <a:xfrm>
-            <a:off x="6161605" y="842845"/>
-            <a:ext cx="5519454" cy="5519454"/>
-          </a:xfrm>
-          <a:prstGeom prst="rect">
-            <a:avLst/>
-          </a:prstGeom>
-        </p:spPr>
-      </p:pic>
-      <p:pic>
-        <p:nvPicPr>
-          <p:cNvPr id="9" name="Imagen 8">
-            <a:extLst>
-              <a:ext uri="{FF2B5EF4-FFF2-40B4-BE49-F238E27FC236}">
-                <a16:creationId xmlns:a16="http://schemas.microsoft.com/office/drawing/2014/main" id="{E22F7A77-99D9-E860-9CE6-F671DC6FBD29}"/>
-              </a:ext>
-            </a:extLst>
-          </p:cNvPr>
-          <p:cNvPicPr>
-            <a:picLocks noChangeAspect="1"/>
-          </p:cNvPicPr>
-          <p:nvPr/>
-        </p:nvPicPr>
-        <p:blipFill>
-          <a:blip r:embed="rId3">
-            <a:extLst>
-              <a:ext uri="{28A0092B-C50C-407E-A947-70E740481C1C}">
-                <a14:useLocalDpi xmlns:a14="http://schemas.microsoft.com/office/drawing/2010/main" val="0"/>
-              </a:ext>
-            </a:extLst>
-          </a:blip>
-          <a:stretch>
-            <a:fillRect/>
-          </a:stretch>
-        </p:blipFill>
-        <p:spPr>
-          <a:xfrm>
-            <a:off x="802740" y="1086211"/>
-            <a:ext cx="5358865" cy="5358865"/>
-          </a:xfrm>
-          <a:prstGeom prst="rect">
-            <a:avLst/>
-          </a:prstGeom>
-        </p:spPr>
-      </p:pic>
-      <p:sp>
-        <p:nvSpPr>
-          <p:cNvPr id="10" name="CuadroTexto 9">
-            <a:extLst>
-              <a:ext uri="{FF2B5EF4-FFF2-40B4-BE49-F238E27FC236}">
-                <a16:creationId xmlns:a16="http://schemas.microsoft.com/office/drawing/2014/main" id="{8E8C694F-E9D5-BD4B-87DA-95624DCA1E31}"/>
-              </a:ext>
-            </a:extLst>
-          </p:cNvPr>
-          <p:cNvSpPr txBox="1"/>
-          <p:nvPr/>
-        </p:nvSpPr>
-        <p:spPr>
-          <a:xfrm>
-            <a:off x="1886552" y="6362299"/>
-            <a:ext cx="3397717" cy="369332"/>
-          </a:xfrm>
-          <a:prstGeom prst="rect">
-            <a:avLst/>
-          </a:prstGeom>
-          <a:noFill/>
-        </p:spPr>
-        <p:txBody>
-          <a:bodyPr wrap="square" rtlCol="0">
-            <a:spAutoFit/>
-          </a:bodyPr>
-          <a:lstStyle/>
-          <a:p>
-            <a:r>
-              <a:rPr lang="es-ES" dirty="0"/>
-              <a:t>Unbalanced</a:t>
-            </a:r>
-          </a:p>
-        </p:txBody>
-      </p:sp>
-      <p:sp>
-        <p:nvSpPr>
-          <p:cNvPr id="11" name="CuadroTexto 10">
-            <a:extLst>
-              <a:ext uri="{FF2B5EF4-FFF2-40B4-BE49-F238E27FC236}">
-                <a16:creationId xmlns:a16="http://schemas.microsoft.com/office/drawing/2014/main" id="{3B5EC3C7-77FD-989B-6C20-47600771EABE}"/>
-              </a:ext>
-            </a:extLst>
-          </p:cNvPr>
-          <p:cNvSpPr txBox="1"/>
-          <p:nvPr/>
-        </p:nvSpPr>
-        <p:spPr>
-          <a:xfrm>
-            <a:off x="7823736" y="6376737"/>
-            <a:ext cx="3397717" cy="369332"/>
-          </a:xfrm>
-          <a:prstGeom prst="rect">
-            <a:avLst/>
-          </a:prstGeom>
-          <a:noFill/>
-        </p:spPr>
-        <p:txBody>
-          <a:bodyPr wrap="square" rtlCol="0">
-            <a:spAutoFit/>
-          </a:bodyPr>
-          <a:lstStyle/>
-          <a:p>
-            <a:r>
-              <a:rPr lang="es-ES" dirty="0" err="1"/>
-              <a:t>Balanced</a:t>
-            </a:r>
-            <a:endParaRPr lang="es-ES" dirty="0"/>
-          </a:p>
-        </p:txBody>
-      </p:sp>
-    </p:spTree>
-    <p:extLst>
-      <p:ext uri="{BB962C8B-B14F-4D97-AF65-F5344CB8AC3E}">
-        <p14:creationId xmlns:p14="http://schemas.microsoft.com/office/powerpoint/2010/main" val="2019496702"/>
-      </p:ext>
-    </p:extLst>
-  </p:cSld>
-  <p:clrMapOvr>
-    <a:masterClrMapping/>
-  </p:clrMapOvr>
-</p:sld>
-</file>
-
-<file path=ppt/slides/slide23.xml><?xml version="1.0" encoding="utf-8"?>
-<p:sld xmlns:a="http://schemas.openxmlformats.org/drawingml/2006/main" xmlns:r="http://schemas.openxmlformats.org/officeDocument/2006/relationships" xmlns:p="http://schemas.openxmlformats.org/presentationml/2006/main">
-  <p:cSld>
-    <p:spTree>
-      <p:nvGrpSpPr>
-        <p:cNvPr id="1" name=""/>
-        <p:cNvGrpSpPr/>
-        <p:nvPr/>
-      </p:nvGrpSpPr>
-      <p:grpSpPr>
-        <a:xfrm>
-          <a:off x="0" y="0"/>
-          <a:ext cx="0" cy="0"/>
-          <a:chOff x="0" y="0"/>
-          <a:chExt cx="0" cy="0"/>
-        </a:xfrm>
-      </p:grpSpPr>
-      <p:sp>
-        <p:nvSpPr>
-          <p:cNvPr id="2" name="Título 1">
-            <a:extLst>
-              <a:ext uri="{FF2B5EF4-FFF2-40B4-BE49-F238E27FC236}">
-                <a16:creationId xmlns:a16="http://schemas.microsoft.com/office/drawing/2014/main" id="{CB19C4AF-152C-E324-FA93-775F22161D70}"/>
-              </a:ext>
-            </a:extLst>
-          </p:cNvPr>
-          <p:cNvSpPr>
-            <a:spLocks noGrp="1"/>
-          </p:cNvSpPr>
-          <p:nvPr>
-            <p:ph type="title"/>
-          </p:nvPr>
-        </p:nvSpPr>
-        <p:spPr/>
-        <p:txBody>
-          <a:bodyPr/>
-          <a:lstStyle/>
-          <a:p>
-            <a:r>
-              <a:rPr lang="es-ES" dirty="0" err="1"/>
-              <a:t>Comparison</a:t>
-            </a:r>
-            <a:r>
-              <a:rPr lang="es-ES" dirty="0"/>
-              <a:t> </a:t>
-            </a:r>
-            <a:r>
-              <a:rPr lang="es-ES" dirty="0" err="1"/>
-              <a:t>with</a:t>
-            </a:r>
-            <a:r>
-              <a:rPr lang="es-ES" dirty="0"/>
-              <a:t> </a:t>
-            </a:r>
-            <a:r>
-              <a:rPr lang="es-ES" dirty="0" err="1"/>
-              <a:t>previous</a:t>
-            </a:r>
-            <a:r>
-              <a:rPr lang="es-ES" dirty="0"/>
-              <a:t> data</a:t>
-            </a:r>
-          </a:p>
-        </p:txBody>
-      </p:sp>
-      <p:pic>
-        <p:nvPicPr>
-          <p:cNvPr id="5" name="Imagen 4">
-            <a:extLst>
-              <a:ext uri="{FF2B5EF4-FFF2-40B4-BE49-F238E27FC236}">
-                <a16:creationId xmlns:a16="http://schemas.microsoft.com/office/drawing/2014/main" id="{8C68EE68-FE74-155D-F181-A34970365FD7}"/>
-              </a:ext>
-            </a:extLst>
-          </p:cNvPr>
-          <p:cNvPicPr>
-            <a:picLocks noChangeAspect="1"/>
-          </p:cNvPicPr>
-          <p:nvPr/>
-        </p:nvPicPr>
-        <p:blipFill>
-          <a:blip r:embed="rId2"/>
-          <a:stretch>
-            <a:fillRect/>
-          </a:stretch>
-        </p:blipFill>
-        <p:spPr>
-          <a:xfrm>
-            <a:off x="182880" y="1333562"/>
-            <a:ext cx="10067544" cy="5159313"/>
-          </a:xfrm>
-          <a:prstGeom prst="rect">
-            <a:avLst/>
-          </a:prstGeom>
-        </p:spPr>
-      </p:pic>
-      <p:sp>
-        <p:nvSpPr>
-          <p:cNvPr id="6" name="CuadroTexto 5">
-            <a:extLst>
-              <a:ext uri="{FF2B5EF4-FFF2-40B4-BE49-F238E27FC236}">
-                <a16:creationId xmlns:a16="http://schemas.microsoft.com/office/drawing/2014/main" id="{D55E2213-9BEA-7974-7184-48D946B3C2DF}"/>
-              </a:ext>
-            </a:extLst>
-          </p:cNvPr>
-          <p:cNvSpPr txBox="1"/>
-          <p:nvPr/>
-        </p:nvSpPr>
-        <p:spPr>
-          <a:xfrm>
-            <a:off x="10250424" y="741412"/>
-            <a:ext cx="1572768" cy="5632311"/>
-          </a:xfrm>
-          <a:prstGeom prst="rect">
-            <a:avLst/>
-          </a:prstGeom>
-          <a:noFill/>
-        </p:spPr>
-        <p:txBody>
-          <a:bodyPr wrap="square" rtlCol="0">
-            <a:spAutoFit/>
-          </a:bodyPr>
-          <a:lstStyle/>
-          <a:p>
-            <a:r>
-              <a:rPr lang="es-ES" dirty="0" err="1"/>
-              <a:t>There</a:t>
-            </a:r>
-            <a:r>
-              <a:rPr lang="es-ES" dirty="0"/>
-              <a:t> </a:t>
-            </a:r>
-            <a:r>
-              <a:rPr lang="es-ES" dirty="0" err="1"/>
-              <a:t>is</a:t>
-            </a:r>
-            <a:r>
-              <a:rPr lang="es-ES" dirty="0"/>
-              <a:t> more </a:t>
-            </a:r>
-            <a:r>
-              <a:rPr lang="es-ES" dirty="0" err="1"/>
-              <a:t>mixed</a:t>
-            </a:r>
-            <a:r>
-              <a:rPr lang="es-ES" dirty="0"/>
-              <a:t> </a:t>
-            </a:r>
-            <a:r>
-              <a:rPr lang="es-ES" dirty="0" err="1"/>
-              <a:t>handedness</a:t>
-            </a:r>
-            <a:r>
-              <a:rPr lang="es-ES" dirty="0"/>
-              <a:t> </a:t>
-            </a:r>
-            <a:r>
-              <a:rPr lang="es-ES" dirty="0" err="1"/>
-              <a:t>among</a:t>
-            </a:r>
-            <a:r>
-              <a:rPr lang="es-ES" dirty="0"/>
-              <a:t> </a:t>
-            </a:r>
-            <a:r>
-              <a:rPr lang="es-ES" dirty="0" err="1"/>
-              <a:t>younger</a:t>
-            </a:r>
-            <a:r>
-              <a:rPr lang="es-ES" dirty="0"/>
-              <a:t> </a:t>
-            </a:r>
-            <a:r>
-              <a:rPr lang="es-ES" dirty="0" err="1"/>
-              <a:t>people</a:t>
-            </a:r>
-            <a:r>
-              <a:rPr lang="es-ES" dirty="0"/>
-              <a:t>.</a:t>
-            </a:r>
-          </a:p>
-          <a:p>
-            <a:endParaRPr lang="es-ES" dirty="0"/>
-          </a:p>
-          <a:p>
-            <a:r>
-              <a:rPr lang="es-ES" dirty="0"/>
-              <a:t>Proper </a:t>
-            </a:r>
-            <a:r>
-              <a:rPr lang="es-ES" dirty="0" err="1"/>
-              <a:t>effect</a:t>
-            </a:r>
-            <a:r>
-              <a:rPr lang="es-ES" dirty="0"/>
-              <a:t> </a:t>
-            </a:r>
-            <a:r>
-              <a:rPr lang="es-ES" dirty="0" err="1"/>
-              <a:t>should</a:t>
-            </a:r>
-            <a:r>
-              <a:rPr lang="es-ES" dirty="0"/>
-              <a:t> be </a:t>
-            </a:r>
-            <a:r>
-              <a:rPr lang="es-ES" dirty="0" err="1"/>
-              <a:t>calculated</a:t>
-            </a:r>
-            <a:r>
-              <a:rPr lang="es-ES" dirty="0"/>
-              <a:t> </a:t>
-            </a:r>
-            <a:r>
-              <a:rPr lang="es-ES" dirty="0" err="1"/>
-              <a:t>over</a:t>
-            </a:r>
-            <a:r>
-              <a:rPr lang="es-ES" dirty="0"/>
-              <a:t> </a:t>
-            </a:r>
-            <a:r>
-              <a:rPr lang="es-ES" dirty="0" err="1"/>
-              <a:t>oldies</a:t>
-            </a:r>
-            <a:r>
-              <a:rPr lang="es-ES" dirty="0"/>
-              <a:t> vs </a:t>
-            </a:r>
-            <a:r>
-              <a:rPr lang="es-ES" dirty="0" err="1"/>
-              <a:t>youngies</a:t>
-            </a:r>
-            <a:r>
-              <a:rPr lang="es-ES" dirty="0"/>
-              <a:t>. In </a:t>
-            </a:r>
-            <a:r>
-              <a:rPr lang="es-ES" dirty="0" err="1"/>
-              <a:t>this</a:t>
-            </a:r>
-            <a:r>
-              <a:rPr lang="es-ES" dirty="0"/>
-              <a:t> cases, </a:t>
-            </a:r>
-            <a:r>
-              <a:rPr lang="es-ES" dirty="0" err="1"/>
-              <a:t>the</a:t>
-            </a:r>
-            <a:r>
-              <a:rPr lang="es-ES" dirty="0"/>
-              <a:t> </a:t>
-            </a:r>
-            <a:r>
-              <a:rPr lang="es-ES" dirty="0" err="1"/>
-              <a:t>comparison</a:t>
-            </a:r>
-            <a:r>
-              <a:rPr lang="es-ES" dirty="0"/>
-              <a:t> </a:t>
-            </a:r>
-            <a:r>
-              <a:rPr lang="es-ES" dirty="0" err="1"/>
-              <a:t>is</a:t>
-            </a:r>
-            <a:r>
-              <a:rPr lang="es-ES" dirty="0"/>
-              <a:t> </a:t>
-            </a:r>
-            <a:r>
-              <a:rPr lang="es-ES" dirty="0" err="1"/>
-              <a:t>oldies</a:t>
-            </a:r>
-            <a:r>
-              <a:rPr lang="es-ES" dirty="0"/>
-              <a:t> vs </a:t>
-            </a:r>
-            <a:r>
-              <a:rPr lang="es-ES" dirty="0" err="1"/>
-              <a:t>all</a:t>
-            </a:r>
-            <a:r>
-              <a:rPr lang="es-ES" dirty="0"/>
-              <a:t> </a:t>
-            </a:r>
-            <a:r>
-              <a:rPr lang="es-ES" dirty="0" err="1"/>
-              <a:t>sample</a:t>
-            </a:r>
-            <a:r>
-              <a:rPr lang="es-ES" dirty="0"/>
-              <a:t>, </a:t>
-            </a:r>
-            <a:r>
-              <a:rPr lang="es-ES" dirty="0" err="1"/>
-              <a:t>which</a:t>
-            </a:r>
-            <a:r>
-              <a:rPr lang="es-ES" dirty="0"/>
-              <a:t> </a:t>
-            </a:r>
-            <a:r>
-              <a:rPr lang="es-ES" dirty="0" err="1"/>
-              <a:t>is</a:t>
-            </a:r>
-            <a:r>
-              <a:rPr lang="es-ES" dirty="0"/>
-              <a:t> </a:t>
-            </a:r>
-            <a:r>
-              <a:rPr lang="es-ES" dirty="0" err="1"/>
-              <a:t>not</a:t>
-            </a:r>
-            <a:r>
-              <a:rPr lang="es-ES" dirty="0"/>
-              <a:t> </a:t>
-            </a:r>
-            <a:r>
-              <a:rPr lang="es-ES" dirty="0" err="1"/>
-              <a:t>correct</a:t>
-            </a:r>
-            <a:r>
-              <a:rPr lang="es-ES" dirty="0"/>
-              <a:t> </a:t>
-            </a:r>
-            <a:r>
-              <a:rPr lang="es-ES" dirty="0" err="1"/>
-              <a:t>for</a:t>
-            </a:r>
-            <a:r>
-              <a:rPr lang="es-ES" dirty="0"/>
-              <a:t> </a:t>
-            </a:r>
-            <a:r>
-              <a:rPr lang="es-ES" dirty="0" err="1"/>
-              <a:t>sharing</a:t>
-            </a:r>
-            <a:endParaRPr lang="es-ES" dirty="0"/>
-          </a:p>
-        </p:txBody>
-      </p:sp>
-    </p:spTree>
-    <p:extLst>
-      <p:ext uri="{BB962C8B-B14F-4D97-AF65-F5344CB8AC3E}">
-        <p14:creationId xmlns:p14="http://schemas.microsoft.com/office/powerpoint/2010/main" val="3271870011"/>
-      </p:ext>
-    </p:extLst>
-  </p:cSld>
-  <p:clrMapOvr>
-    <a:masterClrMapping/>
-  </p:clrMapOvr>
-</p:sld>
-</file>
-
-<file path=ppt/slides/slide24.xml><?xml version="1.0" encoding="utf-8"?>
-<p:sld xmlns:a="http://schemas.openxmlformats.org/drawingml/2006/main" xmlns:r="http://schemas.openxmlformats.org/officeDocument/2006/relationships" xmlns:p="http://schemas.openxmlformats.org/presentationml/2006/main">
-  <p:cSld>
-    <p:spTree>
-      <p:nvGrpSpPr>
-        <p:cNvPr id="1" name=""/>
-        <p:cNvGrpSpPr/>
-        <p:nvPr/>
-      </p:nvGrpSpPr>
-      <p:grpSpPr>
-        <a:xfrm>
-          <a:off x="0" y="0"/>
-          <a:ext cx="0" cy="0"/>
-          <a:chOff x="0" y="0"/>
-          <a:chExt cx="0" cy="0"/>
-        </a:xfrm>
-      </p:grpSpPr>
-      <p:sp>
-        <p:nvSpPr>
-          <p:cNvPr id="2" name="Título 1">
-            <a:extLst>
-              <a:ext uri="{FF2B5EF4-FFF2-40B4-BE49-F238E27FC236}">
-                <a16:creationId xmlns:a16="http://schemas.microsoft.com/office/drawing/2014/main" id="{203C7790-A3B2-1E22-6428-4C9C535E5488}"/>
-              </a:ext>
-            </a:extLst>
-          </p:cNvPr>
-          <p:cNvSpPr>
-            <a:spLocks noGrp="1"/>
-          </p:cNvSpPr>
-          <p:nvPr>
-            <p:ph type="title"/>
-          </p:nvPr>
-        </p:nvSpPr>
-        <p:spPr/>
-        <p:txBody>
-          <a:bodyPr/>
-          <a:lstStyle/>
-          <a:p>
-            <a:r>
-              <a:rPr lang="es-ES" dirty="0" err="1"/>
-              <a:t>Stratification</a:t>
-            </a:r>
-            <a:r>
-              <a:rPr lang="es-ES" dirty="0"/>
-              <a:t> </a:t>
-            </a:r>
-            <a:r>
-              <a:rPr lang="es-ES" dirty="0" err="1"/>
-              <a:t>by</a:t>
-            </a:r>
-            <a:r>
-              <a:rPr lang="es-ES" dirty="0"/>
-              <a:t> sex</a:t>
-            </a:r>
-          </a:p>
-        </p:txBody>
-      </p:sp>
-      <p:pic>
-        <p:nvPicPr>
-          <p:cNvPr id="5" name="Marcador de contenido 4">
-            <a:extLst>
-              <a:ext uri="{FF2B5EF4-FFF2-40B4-BE49-F238E27FC236}">
-                <a16:creationId xmlns:a16="http://schemas.microsoft.com/office/drawing/2014/main" id="{EAA4F788-C4FF-3329-B76F-874AA9A4AB0E}"/>
-              </a:ext>
-            </a:extLst>
-          </p:cNvPr>
-          <p:cNvPicPr>
-            <a:picLocks noGrp="1" noChangeAspect="1"/>
-          </p:cNvPicPr>
-          <p:nvPr>
-            <p:ph idx="1"/>
-          </p:nvPr>
-        </p:nvPicPr>
-        <p:blipFill>
-          <a:blip r:embed="rId2">
-            <a:extLst>
-              <a:ext uri="{28A0092B-C50C-407E-A947-70E740481C1C}">
-                <a14:useLocalDpi xmlns:a14="http://schemas.microsoft.com/office/drawing/2010/main" val="0"/>
-              </a:ext>
-            </a:extLst>
-          </a:blip>
-          <a:stretch>
-            <a:fillRect/>
-          </a:stretch>
-        </p:blipFill>
-        <p:spPr>
-          <a:xfrm>
-            <a:off x="529065" y="1533016"/>
-            <a:ext cx="9535964" cy="5078095"/>
-          </a:xfrm>
-          <a:prstGeom prst="rect">
-            <a:avLst/>
-          </a:prstGeom>
-        </p:spPr>
-      </p:pic>
-      <p:sp>
-        <p:nvSpPr>
-          <p:cNvPr id="6" name="CuadroTexto 5">
-            <a:extLst>
-              <a:ext uri="{FF2B5EF4-FFF2-40B4-BE49-F238E27FC236}">
-                <a16:creationId xmlns:a16="http://schemas.microsoft.com/office/drawing/2014/main" id="{DAEB5D03-6182-D0DA-E2CD-6B69A34245A6}"/>
-              </a:ext>
-            </a:extLst>
-          </p:cNvPr>
-          <p:cNvSpPr txBox="1"/>
-          <p:nvPr/>
-        </p:nvSpPr>
-        <p:spPr>
-          <a:xfrm>
-            <a:off x="10213848" y="777240"/>
-            <a:ext cx="1609344" cy="5632311"/>
-          </a:xfrm>
-          <a:prstGeom prst="rect">
-            <a:avLst/>
-          </a:prstGeom>
-          <a:noFill/>
-        </p:spPr>
-        <p:txBody>
-          <a:bodyPr wrap="square" rtlCol="0">
-            <a:spAutoFit/>
-          </a:bodyPr>
-          <a:lstStyle/>
-          <a:p>
-            <a:r>
-              <a:rPr lang="es-ES" dirty="0"/>
-              <a:t>Similar </a:t>
-            </a:r>
-            <a:r>
-              <a:rPr lang="es-ES" dirty="0" err="1"/>
-              <a:t>patterns</a:t>
-            </a:r>
-            <a:r>
-              <a:rPr lang="es-ES" dirty="0"/>
-              <a:t> as </a:t>
-            </a:r>
-            <a:r>
-              <a:rPr lang="es-ES" dirty="0" err="1"/>
-              <a:t>with</a:t>
-            </a:r>
-            <a:r>
-              <a:rPr lang="es-ES" dirty="0"/>
-              <a:t> </a:t>
-            </a:r>
-            <a:r>
-              <a:rPr lang="es-ES" dirty="0" err="1"/>
-              <a:t>unbalanced</a:t>
-            </a:r>
-            <a:r>
-              <a:rPr lang="es-ES" dirty="0"/>
-              <a:t> data, </a:t>
-            </a:r>
-            <a:r>
-              <a:rPr lang="es-ES" dirty="0" err="1"/>
-              <a:t>but</a:t>
-            </a:r>
-            <a:r>
-              <a:rPr lang="es-ES" dirty="0"/>
-              <a:t> </a:t>
-            </a:r>
-            <a:r>
-              <a:rPr lang="es-ES" dirty="0" err="1"/>
-              <a:t>subtler</a:t>
-            </a:r>
-            <a:r>
-              <a:rPr lang="es-ES" dirty="0"/>
-              <a:t>.</a:t>
-            </a:r>
-          </a:p>
-          <a:p>
-            <a:endParaRPr lang="es-ES" dirty="0"/>
-          </a:p>
-          <a:p>
-            <a:r>
-              <a:rPr lang="es-ES" dirty="0" err="1"/>
-              <a:t>Interesting</a:t>
-            </a:r>
-            <a:r>
-              <a:rPr lang="es-ES" dirty="0"/>
-              <a:t> </a:t>
-            </a:r>
-            <a:r>
-              <a:rPr lang="es-ES" dirty="0" err="1"/>
-              <a:t>how</a:t>
-            </a:r>
-            <a:r>
-              <a:rPr lang="es-ES" dirty="0"/>
-              <a:t>, in </a:t>
-            </a:r>
-            <a:r>
-              <a:rPr lang="es-ES" dirty="0" err="1"/>
-              <a:t>left</a:t>
-            </a:r>
-            <a:r>
-              <a:rPr lang="es-ES" dirty="0"/>
-              <a:t> </a:t>
-            </a:r>
-            <a:r>
-              <a:rPr lang="es-ES" dirty="0" err="1"/>
-              <a:t>handers</a:t>
-            </a:r>
-            <a:r>
-              <a:rPr lang="es-ES" dirty="0"/>
-              <a:t> </a:t>
-            </a:r>
-            <a:r>
-              <a:rPr lang="es-ES" dirty="0" err="1"/>
-              <a:t>when</a:t>
-            </a:r>
-            <a:r>
-              <a:rPr lang="es-ES" dirty="0"/>
-              <a:t> </a:t>
-            </a:r>
-            <a:r>
-              <a:rPr lang="es-ES" dirty="0" err="1"/>
-              <a:t>thr</a:t>
-            </a:r>
-            <a:r>
-              <a:rPr lang="es-ES" dirty="0"/>
-              <a:t> = 0, % </a:t>
-            </a:r>
-            <a:r>
-              <a:rPr lang="es-ES" dirty="0" err="1"/>
-              <a:t>of</a:t>
-            </a:r>
-            <a:r>
-              <a:rPr lang="es-ES" dirty="0"/>
-              <a:t> </a:t>
-            </a:r>
-            <a:r>
-              <a:rPr lang="es-ES" dirty="0" err="1"/>
-              <a:t>females</a:t>
-            </a:r>
-            <a:r>
-              <a:rPr lang="es-ES" dirty="0"/>
-              <a:t> </a:t>
-            </a:r>
-            <a:r>
-              <a:rPr lang="es-ES" dirty="0" err="1"/>
-              <a:t>is</a:t>
-            </a:r>
-            <a:r>
-              <a:rPr lang="es-ES" dirty="0"/>
-              <a:t> 5.49% and males </a:t>
-            </a:r>
-            <a:r>
-              <a:rPr lang="es-ES" dirty="0" err="1"/>
-              <a:t>is</a:t>
-            </a:r>
-            <a:r>
-              <a:rPr lang="es-ES" dirty="0"/>
-              <a:t> 8.63%. </a:t>
-            </a:r>
-            <a:r>
-              <a:rPr lang="es-ES" dirty="0" err="1"/>
-              <a:t>When</a:t>
-            </a:r>
-            <a:r>
-              <a:rPr lang="es-ES" dirty="0"/>
-              <a:t> BD are removed, males </a:t>
-            </a:r>
-            <a:r>
-              <a:rPr lang="es-ES" dirty="0" err="1"/>
-              <a:t>reach</a:t>
-            </a:r>
-            <a:r>
-              <a:rPr lang="es-ES" dirty="0"/>
-              <a:t> 9.36% </a:t>
-            </a:r>
-            <a:r>
-              <a:rPr lang="es-ES" dirty="0" err="1"/>
-              <a:t>of</a:t>
-            </a:r>
-            <a:r>
-              <a:rPr lang="es-ES" dirty="0"/>
-              <a:t> </a:t>
-            </a:r>
-            <a:r>
-              <a:rPr lang="es-ES" dirty="0" err="1"/>
-              <a:t>left</a:t>
-            </a:r>
-            <a:r>
-              <a:rPr lang="es-ES" dirty="0"/>
-              <a:t> </a:t>
-            </a:r>
-            <a:r>
-              <a:rPr lang="es-ES" dirty="0" err="1"/>
-              <a:t>handedness</a:t>
-            </a:r>
-            <a:endParaRPr lang="es-ES" dirty="0"/>
-          </a:p>
-        </p:txBody>
-      </p:sp>
-    </p:spTree>
-    <p:extLst>
-      <p:ext uri="{BB962C8B-B14F-4D97-AF65-F5344CB8AC3E}">
-        <p14:creationId xmlns:p14="http://schemas.microsoft.com/office/powerpoint/2010/main" val="491650171"/>
-      </p:ext>
-    </p:extLst>
-  </p:cSld>
-  <p:clrMapOvr>
-    <a:masterClrMapping/>
-  </p:clrMapOvr>
-</p:sld>
-</file>
-
-<file path=ppt/slides/slide25.xml><?xml version="1.0" encoding="utf-8"?>
-<p:sld xmlns:a="http://schemas.openxmlformats.org/drawingml/2006/main" xmlns:r="http://schemas.openxmlformats.org/officeDocument/2006/relationships" xmlns:p="http://schemas.openxmlformats.org/presentationml/2006/main">
-  <p:cSld>
-    <p:spTree>
-      <p:nvGrpSpPr>
-        <p:cNvPr id="1" name=""/>
-        <p:cNvGrpSpPr/>
-        <p:nvPr/>
-      </p:nvGrpSpPr>
-      <p:grpSpPr>
-        <a:xfrm>
-          <a:off x="0" y="0"/>
-          <a:ext cx="0" cy="0"/>
-          <a:chOff x="0" y="0"/>
-          <a:chExt cx="0" cy="0"/>
-        </a:xfrm>
-      </p:grpSpPr>
-      <p:sp>
-        <p:nvSpPr>
-          <p:cNvPr id="2" name="Título 1">
-            <a:extLst>
-              <a:ext uri="{FF2B5EF4-FFF2-40B4-BE49-F238E27FC236}">
-                <a16:creationId xmlns:a16="http://schemas.microsoft.com/office/drawing/2014/main" id="{70AE218E-6817-3D67-B637-7C6AA7C33B72}"/>
-              </a:ext>
-            </a:extLst>
-          </p:cNvPr>
-          <p:cNvSpPr>
-            <a:spLocks noGrp="1"/>
-          </p:cNvSpPr>
-          <p:nvPr>
-            <p:ph type="title"/>
-          </p:nvPr>
-        </p:nvSpPr>
         <p:spPr>
           <a:xfrm>
             <a:off x="838200" y="136525"/>
@@ -8897,10 +6229,10 @@
         </p:nvGrpSpPr>
         <p:grpSpPr>
           <a:xfrm>
-            <a:off x="530707" y="2644170"/>
-            <a:ext cx="3494315" cy="1569660"/>
-            <a:chOff x="0" y="914400"/>
-            <a:chExt cx="3494315" cy="1569660"/>
+            <a:off x="566116" y="1261684"/>
+            <a:ext cx="3494314" cy="1569660"/>
+            <a:chOff x="108858" y="-718457"/>
+            <a:chExt cx="3494314" cy="1569660"/>
           </a:xfrm>
         </p:grpSpPr>
         <p:sp>
@@ -8917,7 +6249,7 @@
           </p:nvSpPr>
           <p:spPr>
             <a:xfrm>
-              <a:off x="1" y="914400"/>
+              <a:off x="108858" y="-718457"/>
               <a:ext cx="3494314" cy="1569660"/>
             </a:xfrm>
             <a:prstGeom prst="rect">
@@ -8972,7 +6304,7 @@
           </p:nvCxnSpPr>
           <p:spPr>
             <a:xfrm>
-              <a:off x="0" y="1436914"/>
+              <a:off x="108858" y="-174172"/>
               <a:ext cx="3396343" cy="0"/>
             </a:xfrm>
             <a:prstGeom prst="line">
@@ -9031,10 +6363,3071 @@
           </a:prstGeom>
         </p:spPr>
       </p:pic>
+      <p:cxnSp>
+        <p:nvCxnSpPr>
+          <p:cNvPr id="5" name="Conector recto de flecha 4">
+            <a:extLst>
+              <a:ext uri="{FF2B5EF4-FFF2-40B4-BE49-F238E27FC236}">
+                <a16:creationId xmlns:a16="http://schemas.microsoft.com/office/drawing/2014/main" id="{9ACEC48D-8C4F-0BE4-1C1A-FF531408EA27}"/>
+              </a:ext>
+            </a:extLst>
+          </p:cNvPr>
+          <p:cNvCxnSpPr/>
+          <p:nvPr/>
+        </p:nvCxnSpPr>
+        <p:spPr>
+          <a:xfrm>
+            <a:off x="3635829" y="2580973"/>
+            <a:ext cx="1012371" cy="183998"/>
+          </a:xfrm>
+          <a:prstGeom prst="straightConnector1">
+            <a:avLst/>
+          </a:prstGeom>
+          <a:ln w="57150">
+            <a:tailEnd type="triangle"/>
+          </a:ln>
+        </p:spPr>
+        <p:style>
+          <a:lnRef idx="2">
+            <a:schemeClr val="accent1"/>
+          </a:lnRef>
+          <a:fillRef idx="0">
+            <a:schemeClr val="accent1"/>
+          </a:fillRef>
+          <a:effectRef idx="1">
+            <a:schemeClr val="accent1"/>
+          </a:effectRef>
+          <a:fontRef idx="minor">
+            <a:schemeClr val="tx1"/>
+          </a:fontRef>
+        </p:style>
+      </p:cxnSp>
+      <p:sp>
+        <p:nvSpPr>
+          <p:cNvPr id="8" name="CuadroTexto 7">
+            <a:extLst>
+              <a:ext uri="{FF2B5EF4-FFF2-40B4-BE49-F238E27FC236}">
+                <a16:creationId xmlns:a16="http://schemas.microsoft.com/office/drawing/2014/main" id="{B53F787E-9B06-9196-3F10-A340AE67DC54}"/>
+              </a:ext>
+            </a:extLst>
+          </p:cNvPr>
+          <p:cNvSpPr txBox="1"/>
+          <p:nvPr/>
+        </p:nvSpPr>
+        <p:spPr>
+          <a:xfrm>
+            <a:off x="566116" y="4114800"/>
+            <a:ext cx="3069713" cy="1815882"/>
+          </a:xfrm>
+          <a:prstGeom prst="rect">
+            <a:avLst/>
+          </a:prstGeom>
+          <a:noFill/>
+          <a:ln>
+            <a:solidFill>
+              <a:srgbClr val="FFFF00"/>
+            </a:solidFill>
+          </a:ln>
+        </p:spPr>
+        <p:txBody>
+          <a:bodyPr wrap="square" rtlCol="0">
+            <a:spAutoFit/>
+          </a:bodyPr>
+          <a:lstStyle/>
+          <a:p>
+            <a:r>
+              <a:rPr lang="es-ES" sz="2800" dirty="0"/>
+              <a:t>15 People </a:t>
+            </a:r>
+            <a:r>
+              <a:rPr lang="es-ES" sz="2800" dirty="0" err="1"/>
+              <a:t>Of</a:t>
+            </a:r>
+            <a:r>
+              <a:rPr lang="es-ES" sz="2800" dirty="0"/>
+              <a:t> </a:t>
+            </a:r>
+            <a:r>
+              <a:rPr lang="es-ES" sz="2800" dirty="0" err="1"/>
+              <a:t>Interest</a:t>
+            </a:r>
+            <a:r>
+              <a:rPr lang="es-ES" sz="2800" dirty="0"/>
+              <a:t>: 50% </a:t>
+            </a:r>
+            <a:r>
+              <a:rPr lang="es-ES" sz="2800" dirty="0" err="1"/>
+              <a:t>or</a:t>
+            </a:r>
+            <a:r>
+              <a:rPr lang="es-ES" sz="2800" dirty="0"/>
+              <a:t> more </a:t>
+            </a:r>
+            <a:r>
+              <a:rPr lang="es-ES" sz="2800" dirty="0" err="1"/>
+              <a:t>of</a:t>
+            </a:r>
+            <a:r>
+              <a:rPr lang="es-ES" sz="2800" dirty="0"/>
+              <a:t> EHI ítems </a:t>
+            </a:r>
+            <a:r>
+              <a:rPr lang="es-ES" sz="2800" dirty="0" err="1"/>
+              <a:t>marked</a:t>
+            </a:r>
+            <a:r>
+              <a:rPr lang="es-ES" sz="2800" dirty="0"/>
+              <a:t> as “3”</a:t>
+            </a:r>
+          </a:p>
+        </p:txBody>
+      </p:sp>
     </p:spTree>
     <p:extLst>
       <p:ext uri="{BB962C8B-B14F-4D97-AF65-F5344CB8AC3E}">
         <p14:creationId xmlns:p14="http://schemas.microsoft.com/office/powerpoint/2010/main" val="691126807"/>
+      </p:ext>
+    </p:extLst>
+  </p:cSld>
+  <p:clrMapOvr>
+    <a:masterClrMapping/>
+  </p:clrMapOvr>
+</p:sld>
+</file>
+
+<file path=ppt/slides/slide17.xml><?xml version="1.0" encoding="utf-8"?>
+<p:sld xmlns:a="http://schemas.openxmlformats.org/drawingml/2006/main" xmlns:r="http://schemas.openxmlformats.org/officeDocument/2006/relationships" xmlns:p="http://schemas.openxmlformats.org/presentationml/2006/main">
+  <p:cSld>
+    <p:spTree>
+      <p:nvGrpSpPr>
+        <p:cNvPr id="1" name=""/>
+        <p:cNvGrpSpPr/>
+        <p:nvPr/>
+      </p:nvGrpSpPr>
+      <p:grpSpPr>
+        <a:xfrm>
+          <a:off x="0" y="0"/>
+          <a:ext cx="0" cy="0"/>
+          <a:chOff x="0" y="0"/>
+          <a:chExt cx="0" cy="0"/>
+        </a:xfrm>
+      </p:grpSpPr>
+      <p:sp>
+        <p:nvSpPr>
+          <p:cNvPr id="2" name="Título 1">
+            <a:extLst>
+              <a:ext uri="{FF2B5EF4-FFF2-40B4-BE49-F238E27FC236}">
+                <a16:creationId xmlns:a16="http://schemas.microsoft.com/office/drawing/2014/main" id="{9BC807E3-3C9D-F06B-418A-FB8EA4EB0E4D}"/>
+              </a:ext>
+            </a:extLst>
+          </p:cNvPr>
+          <p:cNvSpPr>
+            <a:spLocks noGrp="1"/>
+          </p:cNvSpPr>
+          <p:nvPr>
+            <p:ph type="title"/>
+          </p:nvPr>
+        </p:nvSpPr>
+        <p:spPr/>
+        <p:txBody>
+          <a:bodyPr>
+            <a:normAutofit/>
+          </a:bodyPr>
+          <a:lstStyle/>
+          <a:p>
+            <a:r>
+              <a:rPr lang="es-ES" sz="4000" dirty="0" err="1"/>
+              <a:t>Prevalence</a:t>
+            </a:r>
+            <a:r>
+              <a:rPr lang="es-ES" sz="4000" dirty="0"/>
+              <a:t> </a:t>
+            </a:r>
+            <a:r>
+              <a:rPr lang="es-ES" sz="4000" dirty="0" err="1"/>
+              <a:t>comparison</a:t>
+            </a:r>
+            <a:r>
+              <a:rPr lang="es-ES" sz="4000" dirty="0"/>
+              <a:t> (after 1st </a:t>
+            </a:r>
+            <a:r>
+              <a:rPr lang="es-ES" sz="4000" dirty="0" err="1"/>
+              <a:t>lab</a:t>
+            </a:r>
+            <a:r>
+              <a:rPr lang="es-ES" sz="4000" dirty="0"/>
+              <a:t> meeting )</a:t>
+            </a:r>
+          </a:p>
+        </p:txBody>
+      </p:sp>
+      <p:pic>
+        <p:nvPicPr>
+          <p:cNvPr id="5" name="Imagen 4">
+            <a:extLst>
+              <a:ext uri="{FF2B5EF4-FFF2-40B4-BE49-F238E27FC236}">
+                <a16:creationId xmlns:a16="http://schemas.microsoft.com/office/drawing/2014/main" id="{54F4A075-63DA-38B4-0E86-04CC0D3F5A9F}"/>
+              </a:ext>
+            </a:extLst>
+          </p:cNvPr>
+          <p:cNvPicPr>
+            <a:picLocks noChangeAspect="1"/>
+          </p:cNvPicPr>
+          <p:nvPr/>
+        </p:nvPicPr>
+        <p:blipFill>
+          <a:blip r:embed="rId2"/>
+          <a:stretch>
+            <a:fillRect/>
+          </a:stretch>
+        </p:blipFill>
+        <p:spPr>
+          <a:xfrm>
+            <a:off x="141732" y="1494558"/>
+            <a:ext cx="11908536" cy="3868883"/>
+          </a:xfrm>
+          <a:prstGeom prst="rect">
+            <a:avLst/>
+          </a:prstGeom>
+        </p:spPr>
+      </p:pic>
+      <p:sp>
+        <p:nvSpPr>
+          <p:cNvPr id="6" name="CuadroTexto 5">
+            <a:extLst>
+              <a:ext uri="{FF2B5EF4-FFF2-40B4-BE49-F238E27FC236}">
+                <a16:creationId xmlns:a16="http://schemas.microsoft.com/office/drawing/2014/main" id="{73736F13-E5BA-73BC-CB69-A355110DCB99}"/>
+              </a:ext>
+            </a:extLst>
+          </p:cNvPr>
+          <p:cNvSpPr txBox="1"/>
+          <p:nvPr/>
+        </p:nvSpPr>
+        <p:spPr>
+          <a:xfrm>
+            <a:off x="2471737" y="5661877"/>
+            <a:ext cx="7248525" cy="830997"/>
+          </a:xfrm>
+          <a:prstGeom prst="rect">
+            <a:avLst/>
+          </a:prstGeom>
+          <a:noFill/>
+        </p:spPr>
+        <p:txBody>
+          <a:bodyPr wrap="square" rtlCol="0">
+            <a:spAutoFit/>
+          </a:bodyPr>
+          <a:lstStyle/>
+          <a:p>
+            <a:r>
+              <a:rPr lang="es-ES" sz="2400" dirty="0"/>
+              <a:t>Data has </a:t>
+            </a:r>
+            <a:r>
+              <a:rPr lang="es-ES" sz="2400" dirty="0" err="1"/>
+              <a:t>been</a:t>
+            </a:r>
+            <a:r>
+              <a:rPr lang="es-ES" sz="2400" dirty="0"/>
+              <a:t> </a:t>
+            </a:r>
+            <a:r>
+              <a:rPr lang="es-ES" sz="2400" dirty="0" err="1"/>
+              <a:t>cleaned</a:t>
+            </a:r>
+            <a:r>
+              <a:rPr lang="es-ES" sz="2400" dirty="0"/>
+              <a:t> and light </a:t>
+            </a:r>
+            <a:r>
+              <a:rPr lang="es-ES" sz="2400" dirty="0" err="1"/>
+              <a:t>psychiatric</a:t>
+            </a:r>
+            <a:r>
+              <a:rPr lang="es-ES" sz="2400" dirty="0"/>
+              <a:t> </a:t>
+            </a:r>
+            <a:r>
+              <a:rPr lang="es-ES" sz="2400" dirty="0" err="1"/>
+              <a:t>diagnoses</a:t>
+            </a:r>
+            <a:r>
+              <a:rPr lang="es-ES" sz="2400" dirty="0"/>
+              <a:t> </a:t>
+            </a:r>
+            <a:r>
+              <a:rPr lang="es-ES" sz="2400" dirty="0" err="1"/>
+              <a:t>discarded</a:t>
+            </a:r>
+            <a:r>
+              <a:rPr lang="es-ES" sz="2400" dirty="0"/>
+              <a:t>. Very, </a:t>
+            </a:r>
+            <a:r>
+              <a:rPr lang="es-ES" sz="2400" dirty="0" err="1"/>
+              <a:t>very</a:t>
+            </a:r>
+            <a:r>
+              <a:rPr lang="es-ES" sz="2400" dirty="0"/>
+              <a:t> similar</a:t>
+            </a:r>
+          </a:p>
+        </p:txBody>
+      </p:sp>
+    </p:spTree>
+    <p:extLst>
+      <p:ext uri="{BB962C8B-B14F-4D97-AF65-F5344CB8AC3E}">
+        <p14:creationId xmlns:p14="http://schemas.microsoft.com/office/powerpoint/2010/main" val="63626245"/>
+      </p:ext>
+    </p:extLst>
+  </p:cSld>
+  <p:clrMapOvr>
+    <a:masterClrMapping/>
+  </p:clrMapOvr>
+</p:sld>
+</file>
+
+<file path=ppt/slides/slide18.xml><?xml version="1.0" encoding="utf-8"?>
+<p:sld xmlns:a="http://schemas.openxmlformats.org/drawingml/2006/main" xmlns:r="http://schemas.openxmlformats.org/officeDocument/2006/relationships" xmlns:p="http://schemas.openxmlformats.org/presentationml/2006/main">
+  <p:cSld>
+    <p:spTree>
+      <p:nvGrpSpPr>
+        <p:cNvPr id="1" name=""/>
+        <p:cNvGrpSpPr/>
+        <p:nvPr/>
+      </p:nvGrpSpPr>
+      <p:grpSpPr>
+        <a:xfrm>
+          <a:off x="0" y="0"/>
+          <a:ext cx="0" cy="0"/>
+          <a:chOff x="0" y="0"/>
+          <a:chExt cx="0" cy="0"/>
+        </a:xfrm>
+      </p:grpSpPr>
+      <p:sp>
+        <p:nvSpPr>
+          <p:cNvPr id="2" name="Título 1">
+            <a:extLst>
+              <a:ext uri="{FF2B5EF4-FFF2-40B4-BE49-F238E27FC236}">
+                <a16:creationId xmlns:a16="http://schemas.microsoft.com/office/drawing/2014/main" id="{012B7AEC-912E-E537-49CF-8AB9562C2865}"/>
+              </a:ext>
+            </a:extLst>
+          </p:cNvPr>
+          <p:cNvSpPr>
+            <a:spLocks noGrp="1"/>
+          </p:cNvSpPr>
+          <p:nvPr>
+            <p:ph type="title"/>
+          </p:nvPr>
+        </p:nvSpPr>
+        <p:spPr/>
+        <p:txBody>
+          <a:bodyPr/>
+          <a:lstStyle/>
+          <a:p>
+            <a:r>
+              <a:rPr lang="es-ES" dirty="0" err="1"/>
+              <a:t>Integrating</a:t>
+            </a:r>
+            <a:r>
+              <a:rPr lang="es-ES" dirty="0"/>
+              <a:t> </a:t>
+            </a:r>
+            <a:r>
+              <a:rPr lang="es-ES" dirty="0" err="1"/>
+              <a:t>age</a:t>
+            </a:r>
+            <a:endParaRPr lang="es-ES" dirty="0"/>
+          </a:p>
+        </p:txBody>
+      </p:sp>
+      <p:pic>
+        <p:nvPicPr>
+          <p:cNvPr id="5" name="Imagen 4">
+            <a:extLst>
+              <a:ext uri="{FF2B5EF4-FFF2-40B4-BE49-F238E27FC236}">
+                <a16:creationId xmlns:a16="http://schemas.microsoft.com/office/drawing/2014/main" id="{B5195715-B22A-C533-80D7-65A0F98881C9}"/>
+              </a:ext>
+            </a:extLst>
+          </p:cNvPr>
+          <p:cNvPicPr>
+            <a:picLocks noChangeAspect="1"/>
+          </p:cNvPicPr>
+          <p:nvPr/>
+        </p:nvPicPr>
+        <p:blipFill>
+          <a:blip r:embed="rId2">
+            <a:extLst>
+              <a:ext uri="{28A0092B-C50C-407E-A947-70E740481C1C}">
+                <a14:useLocalDpi xmlns:a14="http://schemas.microsoft.com/office/drawing/2010/main" val="0"/>
+              </a:ext>
+            </a:extLst>
+          </a:blip>
+          <a:stretch>
+            <a:fillRect/>
+          </a:stretch>
+        </p:blipFill>
+        <p:spPr>
+          <a:xfrm>
+            <a:off x="1164337" y="1408703"/>
+            <a:ext cx="4572000" cy="4572000"/>
+          </a:xfrm>
+          <a:prstGeom prst="rect">
+            <a:avLst/>
+          </a:prstGeom>
+        </p:spPr>
+      </p:pic>
+      <p:sp>
+        <p:nvSpPr>
+          <p:cNvPr id="6" name="CuadroTexto 5">
+            <a:extLst>
+              <a:ext uri="{FF2B5EF4-FFF2-40B4-BE49-F238E27FC236}">
+                <a16:creationId xmlns:a16="http://schemas.microsoft.com/office/drawing/2014/main" id="{DC4DEDBA-266C-01CA-C825-0FCF0A413E91}"/>
+              </a:ext>
+            </a:extLst>
+          </p:cNvPr>
+          <p:cNvSpPr txBox="1"/>
+          <p:nvPr/>
+        </p:nvSpPr>
+        <p:spPr>
+          <a:xfrm>
+            <a:off x="4600575" y="800675"/>
+            <a:ext cx="4419600" cy="646331"/>
+          </a:xfrm>
+          <a:prstGeom prst="rect">
+            <a:avLst/>
+          </a:prstGeom>
+          <a:noFill/>
+        </p:spPr>
+        <p:txBody>
+          <a:bodyPr wrap="square" rtlCol="0">
+            <a:spAutoFit/>
+          </a:bodyPr>
+          <a:lstStyle/>
+          <a:p>
+            <a:r>
+              <a:rPr lang="es-ES" dirty="0"/>
+              <a:t>Wild </a:t>
+            </a:r>
+            <a:r>
+              <a:rPr lang="es-ES" dirty="0" err="1"/>
+              <a:t>difference</a:t>
+            </a:r>
+            <a:r>
+              <a:rPr lang="es-ES" dirty="0"/>
+              <a:t> in </a:t>
+            </a:r>
+            <a:r>
+              <a:rPr lang="es-ES" dirty="0" err="1"/>
+              <a:t>age</a:t>
+            </a:r>
+            <a:r>
+              <a:rPr lang="es-ES" dirty="0"/>
+              <a:t> </a:t>
+            </a:r>
+            <a:r>
+              <a:rPr lang="es-ES" dirty="0" err="1"/>
+              <a:t>distribution</a:t>
+            </a:r>
+            <a:r>
+              <a:rPr lang="es-ES" dirty="0"/>
+              <a:t> </a:t>
+            </a:r>
+            <a:r>
+              <a:rPr lang="es-ES" dirty="0" err="1"/>
+              <a:t>between</a:t>
+            </a:r>
+            <a:r>
+              <a:rPr lang="es-ES" dirty="0"/>
+              <a:t> cases and </a:t>
+            </a:r>
+            <a:r>
+              <a:rPr lang="es-ES" dirty="0" err="1"/>
+              <a:t>controls</a:t>
+            </a:r>
+            <a:r>
+              <a:rPr lang="es-ES" dirty="0"/>
+              <a:t>.</a:t>
+            </a:r>
+          </a:p>
+        </p:txBody>
+      </p:sp>
+      <p:pic>
+        <p:nvPicPr>
+          <p:cNvPr id="8" name="Imagen 7">
+            <a:extLst>
+              <a:ext uri="{FF2B5EF4-FFF2-40B4-BE49-F238E27FC236}">
+                <a16:creationId xmlns:a16="http://schemas.microsoft.com/office/drawing/2014/main" id="{774BE5A2-54E1-008F-D2E2-E5167E1A8924}"/>
+              </a:ext>
+            </a:extLst>
+          </p:cNvPr>
+          <p:cNvPicPr>
+            <a:picLocks noChangeAspect="1"/>
+          </p:cNvPicPr>
+          <p:nvPr/>
+        </p:nvPicPr>
+        <p:blipFill>
+          <a:blip r:embed="rId3">
+            <a:extLst>
+              <a:ext uri="{28A0092B-C50C-407E-A947-70E740481C1C}">
+                <a14:useLocalDpi xmlns:a14="http://schemas.microsoft.com/office/drawing/2010/main" val="0"/>
+              </a:ext>
+            </a:extLst>
+          </a:blip>
+          <a:stretch>
+            <a:fillRect/>
+          </a:stretch>
+        </p:blipFill>
+        <p:spPr>
+          <a:xfrm>
+            <a:off x="6781800" y="1447006"/>
+            <a:ext cx="4572000" cy="4572000"/>
+          </a:xfrm>
+          <a:prstGeom prst="rect">
+            <a:avLst/>
+          </a:prstGeom>
+        </p:spPr>
+      </p:pic>
+      <p:sp>
+        <p:nvSpPr>
+          <p:cNvPr id="9" name="Flecha: a la derecha 8">
+            <a:extLst>
+              <a:ext uri="{FF2B5EF4-FFF2-40B4-BE49-F238E27FC236}">
+                <a16:creationId xmlns:a16="http://schemas.microsoft.com/office/drawing/2014/main" id="{658A29A5-CAC4-1790-15E0-F363957C8876}"/>
+              </a:ext>
+            </a:extLst>
+          </p:cNvPr>
+          <p:cNvSpPr/>
+          <p:nvPr/>
+        </p:nvSpPr>
+        <p:spPr>
+          <a:xfrm>
+            <a:off x="5067300" y="4381500"/>
+            <a:ext cx="1628775" cy="133350"/>
+          </a:xfrm>
+          <a:prstGeom prst="rightArrow">
+            <a:avLst/>
+          </a:prstGeom>
+        </p:spPr>
+        <p:style>
+          <a:lnRef idx="2">
+            <a:schemeClr val="accent1">
+              <a:shade val="15000"/>
+            </a:schemeClr>
+          </a:lnRef>
+          <a:fillRef idx="1">
+            <a:schemeClr val="accent1"/>
+          </a:fillRef>
+          <a:effectRef idx="0">
+            <a:schemeClr val="accent1"/>
+          </a:effectRef>
+          <a:fontRef idx="minor">
+            <a:schemeClr val="lt1"/>
+          </a:fontRef>
+        </p:style>
+        <p:txBody>
+          <a:bodyPr rtlCol="0" anchor="ctr"/>
+          <a:lstStyle/>
+          <a:p>
+            <a:pPr algn="ctr"/>
+            <a:endParaRPr lang="es-ES"/>
+          </a:p>
+        </p:txBody>
+      </p:sp>
+      <p:sp>
+        <p:nvSpPr>
+          <p:cNvPr id="10" name="CuadroTexto 9">
+            <a:extLst>
+              <a:ext uri="{FF2B5EF4-FFF2-40B4-BE49-F238E27FC236}">
+                <a16:creationId xmlns:a16="http://schemas.microsoft.com/office/drawing/2014/main" id="{E7BEC117-03FE-FEDE-2893-7D8BCD55977F}"/>
+              </a:ext>
+            </a:extLst>
+          </p:cNvPr>
+          <p:cNvSpPr txBox="1"/>
+          <p:nvPr/>
+        </p:nvSpPr>
+        <p:spPr>
+          <a:xfrm>
+            <a:off x="114300" y="5808479"/>
+            <a:ext cx="3495675" cy="369332"/>
+          </a:xfrm>
+          <a:prstGeom prst="rect">
+            <a:avLst/>
+          </a:prstGeom>
+          <a:noFill/>
+        </p:spPr>
+        <p:txBody>
+          <a:bodyPr wrap="square" rtlCol="0">
+            <a:spAutoFit/>
+          </a:bodyPr>
+          <a:lstStyle/>
+          <a:p>
+            <a:r>
+              <a:rPr lang="es-ES" dirty="0"/>
+              <a:t>436 BD, 1,493 </a:t>
+            </a:r>
+            <a:r>
+              <a:rPr lang="es-ES" dirty="0" err="1"/>
+              <a:t>controls</a:t>
+            </a:r>
+            <a:endParaRPr lang="es-ES" dirty="0"/>
+          </a:p>
+        </p:txBody>
+      </p:sp>
+      <p:sp>
+        <p:nvSpPr>
+          <p:cNvPr id="11" name="CuadroTexto 10">
+            <a:extLst>
+              <a:ext uri="{FF2B5EF4-FFF2-40B4-BE49-F238E27FC236}">
+                <a16:creationId xmlns:a16="http://schemas.microsoft.com/office/drawing/2014/main" id="{78550E95-A3C5-0E2F-406C-F3B826B19225}"/>
+              </a:ext>
+            </a:extLst>
+          </p:cNvPr>
+          <p:cNvSpPr txBox="1"/>
+          <p:nvPr/>
+        </p:nvSpPr>
+        <p:spPr>
+          <a:xfrm>
+            <a:off x="6848285" y="6094202"/>
+            <a:ext cx="3495675" cy="369332"/>
+          </a:xfrm>
+          <a:prstGeom prst="rect">
+            <a:avLst/>
+          </a:prstGeom>
+          <a:noFill/>
+        </p:spPr>
+        <p:txBody>
+          <a:bodyPr wrap="square" rtlCol="0">
+            <a:spAutoFit/>
+          </a:bodyPr>
+          <a:lstStyle/>
+          <a:p>
+            <a:r>
+              <a:rPr lang="es-ES" dirty="0"/>
+              <a:t>433 BD, 433 </a:t>
+            </a:r>
+            <a:r>
+              <a:rPr lang="es-ES" dirty="0" err="1"/>
+              <a:t>controls</a:t>
+            </a:r>
+            <a:endParaRPr lang="es-ES" dirty="0"/>
+          </a:p>
+        </p:txBody>
+      </p:sp>
+      <p:pic>
+        <p:nvPicPr>
+          <p:cNvPr id="13" name="Imagen 12">
+            <a:extLst>
+              <a:ext uri="{FF2B5EF4-FFF2-40B4-BE49-F238E27FC236}">
+                <a16:creationId xmlns:a16="http://schemas.microsoft.com/office/drawing/2014/main" id="{2F465F3F-A552-3C79-0A04-D6BCD2636E33}"/>
+              </a:ext>
+            </a:extLst>
+          </p:cNvPr>
+          <p:cNvPicPr>
+            <a:picLocks noChangeAspect="1"/>
+          </p:cNvPicPr>
+          <p:nvPr/>
+        </p:nvPicPr>
+        <p:blipFill>
+          <a:blip r:embed="rId4"/>
+          <a:stretch>
+            <a:fillRect/>
+          </a:stretch>
+        </p:blipFill>
+        <p:spPr>
+          <a:xfrm>
+            <a:off x="9262873" y="5850520"/>
+            <a:ext cx="2715004" cy="800212"/>
+          </a:xfrm>
+          <a:prstGeom prst="rect">
+            <a:avLst/>
+          </a:prstGeom>
+        </p:spPr>
+      </p:pic>
+      <p:pic>
+        <p:nvPicPr>
+          <p:cNvPr id="15" name="Imagen 14">
+            <a:extLst>
+              <a:ext uri="{FF2B5EF4-FFF2-40B4-BE49-F238E27FC236}">
+                <a16:creationId xmlns:a16="http://schemas.microsoft.com/office/drawing/2014/main" id="{8C1A78F7-817A-9690-396C-1EE16677B88D}"/>
+              </a:ext>
+            </a:extLst>
+          </p:cNvPr>
+          <p:cNvPicPr>
+            <a:picLocks noChangeAspect="1"/>
+          </p:cNvPicPr>
+          <p:nvPr/>
+        </p:nvPicPr>
+        <p:blipFill>
+          <a:blip r:embed="rId5"/>
+          <a:stretch>
+            <a:fillRect/>
+          </a:stretch>
+        </p:blipFill>
+        <p:spPr>
+          <a:xfrm>
+            <a:off x="2175793" y="6152927"/>
+            <a:ext cx="2743583" cy="647790"/>
+          </a:xfrm>
+          <a:prstGeom prst="rect">
+            <a:avLst/>
+          </a:prstGeom>
+        </p:spPr>
+      </p:pic>
+    </p:spTree>
+    <p:extLst>
+      <p:ext uri="{BB962C8B-B14F-4D97-AF65-F5344CB8AC3E}">
+        <p14:creationId xmlns:p14="http://schemas.microsoft.com/office/powerpoint/2010/main" val="4285407713"/>
+      </p:ext>
+    </p:extLst>
+  </p:cSld>
+  <p:clrMapOvr>
+    <a:masterClrMapping/>
+  </p:clrMapOvr>
+</p:sld>
+</file>
+
+<file path=ppt/slides/slide19.xml><?xml version="1.0" encoding="utf-8"?>
+<p:sld xmlns:a="http://schemas.openxmlformats.org/drawingml/2006/main" xmlns:r="http://schemas.openxmlformats.org/officeDocument/2006/relationships" xmlns:p="http://schemas.openxmlformats.org/presentationml/2006/main">
+  <p:cSld>
+    <p:spTree>
+      <p:nvGrpSpPr>
+        <p:cNvPr id="1" name=""/>
+        <p:cNvGrpSpPr/>
+        <p:nvPr/>
+      </p:nvGrpSpPr>
+      <p:grpSpPr>
+        <a:xfrm>
+          <a:off x="0" y="0"/>
+          <a:ext cx="0" cy="0"/>
+          <a:chOff x="0" y="0"/>
+          <a:chExt cx="0" cy="0"/>
+        </a:xfrm>
+      </p:grpSpPr>
+      <p:sp>
+        <p:nvSpPr>
+          <p:cNvPr id="2" name="Título 1">
+            <a:extLst>
+              <a:ext uri="{FF2B5EF4-FFF2-40B4-BE49-F238E27FC236}">
+                <a16:creationId xmlns:a16="http://schemas.microsoft.com/office/drawing/2014/main" id="{38F04E80-F3F9-B73D-F4D7-21B314FC803C}"/>
+              </a:ext>
+            </a:extLst>
+          </p:cNvPr>
+          <p:cNvSpPr>
+            <a:spLocks noGrp="1"/>
+          </p:cNvSpPr>
+          <p:nvPr>
+            <p:ph type="title"/>
+          </p:nvPr>
+        </p:nvSpPr>
+        <p:spPr/>
+        <p:txBody>
+          <a:bodyPr/>
+          <a:lstStyle/>
+          <a:p>
+            <a:r>
+              <a:rPr lang="es-ES" dirty="0"/>
+              <a:t>LQ </a:t>
+            </a:r>
+            <a:r>
+              <a:rPr lang="es-ES" dirty="0" err="1"/>
+              <a:t>dist</a:t>
+            </a:r>
+            <a:r>
+              <a:rPr lang="es-ES" dirty="0"/>
+              <a:t> in </a:t>
+            </a:r>
+            <a:r>
+              <a:rPr lang="es-ES" dirty="0" err="1"/>
+              <a:t>all</a:t>
+            </a:r>
+            <a:endParaRPr lang="es-ES" dirty="0"/>
+          </a:p>
+        </p:txBody>
+      </p:sp>
+      <p:pic>
+        <p:nvPicPr>
+          <p:cNvPr id="5" name="Imagen 4">
+            <a:extLst>
+              <a:ext uri="{FF2B5EF4-FFF2-40B4-BE49-F238E27FC236}">
+                <a16:creationId xmlns:a16="http://schemas.microsoft.com/office/drawing/2014/main" id="{49A1E4D9-82F2-67CA-E789-8EF1CBE0B93F}"/>
+              </a:ext>
+            </a:extLst>
+          </p:cNvPr>
+          <p:cNvPicPr>
+            <a:picLocks noChangeAspect="1"/>
+          </p:cNvPicPr>
+          <p:nvPr/>
+        </p:nvPicPr>
+        <p:blipFill>
+          <a:blip r:embed="rId2">
+            <a:extLst>
+              <a:ext uri="{28A0092B-C50C-407E-A947-70E740481C1C}">
+                <a14:useLocalDpi xmlns:a14="http://schemas.microsoft.com/office/drawing/2010/main" val="0"/>
+              </a:ext>
+            </a:extLst>
+          </a:blip>
+          <a:stretch>
+            <a:fillRect/>
+          </a:stretch>
+        </p:blipFill>
+        <p:spPr>
+          <a:xfrm>
+            <a:off x="671816" y="1926554"/>
+            <a:ext cx="5719360" cy="4239465"/>
+          </a:xfrm>
+          <a:prstGeom prst="rect">
+            <a:avLst/>
+          </a:prstGeom>
+        </p:spPr>
+      </p:pic>
+      <p:pic>
+        <p:nvPicPr>
+          <p:cNvPr id="7" name="Imagen 6">
+            <a:extLst>
+              <a:ext uri="{FF2B5EF4-FFF2-40B4-BE49-F238E27FC236}">
+                <a16:creationId xmlns:a16="http://schemas.microsoft.com/office/drawing/2014/main" id="{1E0556F5-2FE0-7200-2248-ED34C79BF9E1}"/>
+              </a:ext>
+            </a:extLst>
+          </p:cNvPr>
+          <p:cNvPicPr>
+            <a:picLocks noChangeAspect="1"/>
+          </p:cNvPicPr>
+          <p:nvPr/>
+        </p:nvPicPr>
+        <p:blipFill>
+          <a:blip r:embed="rId3">
+            <a:extLst>
+              <a:ext uri="{28A0092B-C50C-407E-A947-70E740481C1C}">
+                <a14:useLocalDpi xmlns:a14="http://schemas.microsoft.com/office/drawing/2010/main" val="0"/>
+              </a:ext>
+            </a:extLst>
+          </a:blip>
+          <a:stretch>
+            <a:fillRect/>
+          </a:stretch>
+        </p:blipFill>
+        <p:spPr>
+          <a:xfrm>
+            <a:off x="6649453" y="1836019"/>
+            <a:ext cx="4572000" cy="4572000"/>
+          </a:xfrm>
+          <a:prstGeom prst="rect">
+            <a:avLst/>
+          </a:prstGeom>
+        </p:spPr>
+      </p:pic>
+      <p:sp>
+        <p:nvSpPr>
+          <p:cNvPr id="8" name="CuadroTexto 7">
+            <a:extLst>
+              <a:ext uri="{FF2B5EF4-FFF2-40B4-BE49-F238E27FC236}">
+                <a16:creationId xmlns:a16="http://schemas.microsoft.com/office/drawing/2014/main" id="{0D781989-FD45-6309-49DC-7AF3E6560E2C}"/>
+              </a:ext>
+            </a:extLst>
+          </p:cNvPr>
+          <p:cNvSpPr txBox="1"/>
+          <p:nvPr/>
+        </p:nvSpPr>
+        <p:spPr>
+          <a:xfrm>
+            <a:off x="1886552" y="6362299"/>
+            <a:ext cx="3397717" cy="369332"/>
+          </a:xfrm>
+          <a:prstGeom prst="rect">
+            <a:avLst/>
+          </a:prstGeom>
+          <a:noFill/>
+        </p:spPr>
+        <p:txBody>
+          <a:bodyPr wrap="square" rtlCol="0">
+            <a:spAutoFit/>
+          </a:bodyPr>
+          <a:lstStyle/>
+          <a:p>
+            <a:r>
+              <a:rPr lang="es-ES" dirty="0"/>
+              <a:t>Unbalanced</a:t>
+            </a:r>
+          </a:p>
+        </p:txBody>
+      </p:sp>
+      <p:sp>
+        <p:nvSpPr>
+          <p:cNvPr id="9" name="CuadroTexto 8">
+            <a:extLst>
+              <a:ext uri="{FF2B5EF4-FFF2-40B4-BE49-F238E27FC236}">
+                <a16:creationId xmlns:a16="http://schemas.microsoft.com/office/drawing/2014/main" id="{A03924BC-8173-6F02-DEAB-71264667233F}"/>
+              </a:ext>
+            </a:extLst>
+          </p:cNvPr>
+          <p:cNvSpPr txBox="1"/>
+          <p:nvPr/>
+        </p:nvSpPr>
+        <p:spPr>
+          <a:xfrm>
+            <a:off x="7823736" y="6376737"/>
+            <a:ext cx="3397717" cy="369332"/>
+          </a:xfrm>
+          <a:prstGeom prst="rect">
+            <a:avLst/>
+          </a:prstGeom>
+          <a:noFill/>
+        </p:spPr>
+        <p:txBody>
+          <a:bodyPr wrap="square" rtlCol="0">
+            <a:spAutoFit/>
+          </a:bodyPr>
+          <a:lstStyle/>
+          <a:p>
+            <a:r>
+              <a:rPr lang="es-ES" dirty="0" err="1"/>
+              <a:t>Balanced</a:t>
+            </a:r>
+            <a:endParaRPr lang="es-ES" dirty="0"/>
+          </a:p>
+        </p:txBody>
+      </p:sp>
+    </p:spTree>
+    <p:extLst>
+      <p:ext uri="{BB962C8B-B14F-4D97-AF65-F5344CB8AC3E}">
+        <p14:creationId xmlns:p14="http://schemas.microsoft.com/office/powerpoint/2010/main" val="3758407585"/>
+      </p:ext>
+    </p:extLst>
+  </p:cSld>
+  <p:clrMapOvr>
+    <a:masterClrMapping/>
+  </p:clrMapOvr>
+</p:sld>
+</file>
+
+<file path=ppt/slides/slide2.xml><?xml version="1.0" encoding="utf-8"?>
+<p:sld xmlns:a="http://schemas.openxmlformats.org/drawingml/2006/main" xmlns:r="http://schemas.openxmlformats.org/officeDocument/2006/relationships" xmlns:p="http://schemas.openxmlformats.org/presentationml/2006/main">
+  <p:cSld>
+    <p:spTree>
+      <p:nvGrpSpPr>
+        <p:cNvPr id="1" name="">
+          <a:extLst>
+            <a:ext uri="{FF2B5EF4-FFF2-40B4-BE49-F238E27FC236}">
+              <a16:creationId xmlns:a16="http://schemas.microsoft.com/office/drawing/2014/main" id="{14A6D52E-C582-5610-5F55-C680D3402604}"/>
+            </a:ext>
+          </a:extLst>
+        </p:cNvPr>
+        <p:cNvGrpSpPr/>
+        <p:nvPr/>
+      </p:nvGrpSpPr>
+      <p:grpSpPr>
+        <a:xfrm>
+          <a:off x="0" y="0"/>
+          <a:ext cx="0" cy="0"/>
+          <a:chOff x="0" y="0"/>
+          <a:chExt cx="0" cy="0"/>
+        </a:xfrm>
+      </p:grpSpPr>
+      <p:sp>
+        <p:nvSpPr>
+          <p:cNvPr id="2" name="Título 1">
+            <a:extLst>
+              <a:ext uri="{FF2B5EF4-FFF2-40B4-BE49-F238E27FC236}">
+                <a16:creationId xmlns:a16="http://schemas.microsoft.com/office/drawing/2014/main" id="{89142DFA-7875-B2A4-50D3-03BECAA82518}"/>
+              </a:ext>
+            </a:extLst>
+          </p:cNvPr>
+          <p:cNvSpPr>
+            <a:spLocks noGrp="1"/>
+          </p:cNvSpPr>
+          <p:nvPr>
+            <p:ph type="title"/>
+          </p:nvPr>
+        </p:nvSpPr>
+        <p:spPr/>
+        <p:txBody>
+          <a:bodyPr/>
+          <a:lstStyle/>
+          <a:p>
+            <a:r>
+              <a:rPr lang="es-ES" dirty="0" err="1"/>
+              <a:t>Where</a:t>
+            </a:r>
+            <a:r>
+              <a:rPr lang="es-ES" dirty="0"/>
+              <a:t> </a:t>
+            </a:r>
+            <a:r>
+              <a:rPr lang="es-ES" dirty="0" err="1"/>
+              <a:t>to</a:t>
+            </a:r>
+            <a:r>
+              <a:rPr lang="es-ES" dirty="0"/>
+              <a:t> set </a:t>
+            </a:r>
+            <a:r>
+              <a:rPr lang="es-ES" dirty="0" err="1"/>
+              <a:t>the</a:t>
+            </a:r>
+            <a:r>
+              <a:rPr lang="es-ES" dirty="0"/>
+              <a:t> </a:t>
+            </a:r>
+            <a:r>
+              <a:rPr lang="es-ES" dirty="0" err="1"/>
+              <a:t>threshold</a:t>
+            </a:r>
+            <a:r>
+              <a:rPr lang="es-ES" dirty="0"/>
+              <a:t>?</a:t>
+            </a:r>
+          </a:p>
+        </p:txBody>
+      </p:sp>
+      <p:sp>
+        <p:nvSpPr>
+          <p:cNvPr id="3" name="Marcador de contenido 2">
+            <a:extLst>
+              <a:ext uri="{FF2B5EF4-FFF2-40B4-BE49-F238E27FC236}">
+                <a16:creationId xmlns:a16="http://schemas.microsoft.com/office/drawing/2014/main" id="{1658E8DA-0730-FD86-1581-B5D3A962A2E0}"/>
+              </a:ext>
+            </a:extLst>
+          </p:cNvPr>
+          <p:cNvSpPr>
+            <a:spLocks noGrp="1"/>
+          </p:cNvSpPr>
+          <p:nvPr>
+            <p:ph idx="1"/>
+          </p:nvPr>
+        </p:nvSpPr>
+        <p:spPr>
+          <a:xfrm>
+            <a:off x="838200" y="1825625"/>
+            <a:ext cx="7208520" cy="222631"/>
+          </a:xfrm>
+        </p:spPr>
+        <p:txBody>
+          <a:bodyPr>
+            <a:normAutofit fontScale="40000" lnSpcReduction="20000"/>
+          </a:bodyPr>
+          <a:lstStyle/>
+          <a:p>
+            <a:pPr marL="0" indent="0">
+              <a:buNone/>
+            </a:pPr>
+            <a:r>
+              <a:rPr lang="es-ES" dirty="0">
+                <a:hlinkClick r:id="rId2"/>
+              </a:rPr>
+              <a:t>https://doi.org/10.1016/j.bandc.2015.01.003</a:t>
+            </a:r>
+            <a:endParaRPr lang="es-ES" dirty="0"/>
+          </a:p>
+          <a:p>
+            <a:pPr marL="0" indent="0">
+              <a:buNone/>
+            </a:pPr>
+            <a:endParaRPr lang="es-ES" dirty="0"/>
+          </a:p>
+        </p:txBody>
+      </p:sp>
+      <p:pic>
+        <p:nvPicPr>
+          <p:cNvPr id="4" name="Imagen 3">
+            <a:extLst>
+              <a:ext uri="{FF2B5EF4-FFF2-40B4-BE49-F238E27FC236}">
+                <a16:creationId xmlns:a16="http://schemas.microsoft.com/office/drawing/2014/main" id="{B01CAE9D-2DB0-0C57-74F6-A5F765C9F1E9}"/>
+              </a:ext>
+            </a:extLst>
+          </p:cNvPr>
+          <p:cNvPicPr>
+            <a:picLocks noChangeAspect="1" noChangeArrowheads="1"/>
+          </p:cNvPicPr>
+          <p:nvPr/>
+        </p:nvPicPr>
+        <p:blipFill>
+          <a:blip r:embed="rId3">
+            <a:extLst>
+              <a:ext uri="{28A0092B-C50C-407E-A947-70E740481C1C}">
+                <a14:useLocalDpi xmlns:a14="http://schemas.microsoft.com/office/drawing/2010/main" val="0"/>
+              </a:ext>
+            </a:extLst>
+          </a:blip>
+          <a:srcRect/>
+          <a:stretch>
+            <a:fillRect/>
+          </a:stretch>
+        </p:blipFill>
+        <p:spPr bwMode="auto">
+          <a:xfrm>
+            <a:off x="939615" y="3163824"/>
+            <a:ext cx="6266960" cy="3503750"/>
+          </a:xfrm>
+          <a:prstGeom prst="rect">
+            <a:avLst/>
+          </a:prstGeom>
+          <a:noFill/>
+          <a:extLst>
+            <a:ext uri="{909E8E84-426E-40DD-AFC4-6F175D3DCCD1}">
+              <a14:hiddenFill xmlns:a14="http://schemas.microsoft.com/office/drawing/2010/main">
+                <a:solidFill>
+                  <a:srgbClr val="FFFFFF"/>
+                </a:solidFill>
+              </a14:hiddenFill>
+            </a:ext>
+          </a:extLst>
+        </p:spPr>
+      </p:pic>
+      <p:pic>
+        <p:nvPicPr>
+          <p:cNvPr id="6" name="Imagen 5">
+            <a:extLst>
+              <a:ext uri="{FF2B5EF4-FFF2-40B4-BE49-F238E27FC236}">
+                <a16:creationId xmlns:a16="http://schemas.microsoft.com/office/drawing/2014/main" id="{FC4F1DF5-ED4F-C9F2-B3CC-34DE46D23EC3}"/>
+              </a:ext>
+            </a:extLst>
+          </p:cNvPr>
+          <p:cNvPicPr>
+            <a:picLocks noChangeAspect="1"/>
+          </p:cNvPicPr>
+          <p:nvPr/>
+        </p:nvPicPr>
+        <p:blipFill>
+          <a:blip r:embed="rId4"/>
+          <a:stretch>
+            <a:fillRect/>
+          </a:stretch>
+        </p:blipFill>
+        <p:spPr>
+          <a:xfrm>
+            <a:off x="5053759" y="1205686"/>
+            <a:ext cx="6597455" cy="2526388"/>
+          </a:xfrm>
+          <a:prstGeom prst="rect">
+            <a:avLst/>
+          </a:prstGeom>
+        </p:spPr>
+      </p:pic>
+    </p:spTree>
+    <p:extLst>
+      <p:ext uri="{BB962C8B-B14F-4D97-AF65-F5344CB8AC3E}">
+        <p14:creationId xmlns:p14="http://schemas.microsoft.com/office/powerpoint/2010/main" val="209783011"/>
+      </p:ext>
+    </p:extLst>
+  </p:cSld>
+  <p:clrMapOvr>
+    <a:masterClrMapping/>
+  </p:clrMapOvr>
+</p:sld>
+</file>
+
+<file path=ppt/slides/slide20.xml><?xml version="1.0" encoding="utf-8"?>
+<p:sld xmlns:a="http://schemas.openxmlformats.org/drawingml/2006/main" xmlns:r="http://schemas.openxmlformats.org/officeDocument/2006/relationships" xmlns:p="http://schemas.openxmlformats.org/presentationml/2006/main">
+  <p:cSld>
+    <p:spTree>
+      <p:nvGrpSpPr>
+        <p:cNvPr id="1" name=""/>
+        <p:cNvGrpSpPr/>
+        <p:nvPr/>
+      </p:nvGrpSpPr>
+      <p:grpSpPr>
+        <a:xfrm>
+          <a:off x="0" y="0"/>
+          <a:ext cx="0" cy="0"/>
+          <a:chOff x="0" y="0"/>
+          <a:chExt cx="0" cy="0"/>
+        </a:xfrm>
+      </p:grpSpPr>
+      <p:sp>
+        <p:nvSpPr>
+          <p:cNvPr id="2" name="Título 1">
+            <a:extLst>
+              <a:ext uri="{FF2B5EF4-FFF2-40B4-BE49-F238E27FC236}">
+                <a16:creationId xmlns:a16="http://schemas.microsoft.com/office/drawing/2014/main" id="{F3CD659E-4D6D-4319-DE56-24895C13FF15}"/>
+              </a:ext>
+            </a:extLst>
+          </p:cNvPr>
+          <p:cNvSpPr>
+            <a:spLocks noGrp="1"/>
+          </p:cNvSpPr>
+          <p:nvPr>
+            <p:ph type="title"/>
+          </p:nvPr>
+        </p:nvSpPr>
+        <p:spPr>
+          <a:xfrm>
+            <a:off x="510941" y="98976"/>
+            <a:ext cx="10515600" cy="1325563"/>
+          </a:xfrm>
+        </p:spPr>
+        <p:txBody>
+          <a:bodyPr/>
+          <a:lstStyle/>
+          <a:p>
+            <a:r>
+              <a:rPr lang="es-ES" dirty="0"/>
+              <a:t>LQ </a:t>
+            </a:r>
+            <a:r>
+              <a:rPr lang="es-ES" dirty="0" err="1"/>
+              <a:t>dist</a:t>
+            </a:r>
+            <a:r>
+              <a:rPr lang="es-ES" dirty="0"/>
+              <a:t> </a:t>
+            </a:r>
+            <a:r>
+              <a:rPr lang="es-ES" dirty="0" err="1"/>
+              <a:t>by</a:t>
+            </a:r>
+            <a:r>
+              <a:rPr lang="es-ES" dirty="0"/>
+              <a:t> BD</a:t>
+            </a:r>
+          </a:p>
+        </p:txBody>
+      </p:sp>
+      <p:pic>
+        <p:nvPicPr>
+          <p:cNvPr id="5" name="Imagen 4">
+            <a:extLst>
+              <a:ext uri="{FF2B5EF4-FFF2-40B4-BE49-F238E27FC236}">
+                <a16:creationId xmlns:a16="http://schemas.microsoft.com/office/drawing/2014/main" id="{A5BE3DDE-1516-F1DC-A3B3-013F65623606}"/>
+              </a:ext>
+            </a:extLst>
+          </p:cNvPr>
+          <p:cNvPicPr>
+            <a:picLocks noChangeAspect="1"/>
+          </p:cNvPicPr>
+          <p:nvPr/>
+        </p:nvPicPr>
+        <p:blipFill>
+          <a:blip r:embed="rId2">
+            <a:extLst>
+              <a:ext uri="{28A0092B-C50C-407E-A947-70E740481C1C}">
+                <a14:useLocalDpi xmlns:a14="http://schemas.microsoft.com/office/drawing/2010/main" val="0"/>
+              </a:ext>
+            </a:extLst>
+          </a:blip>
+          <a:stretch>
+            <a:fillRect/>
+          </a:stretch>
+        </p:blipFill>
+        <p:spPr>
+          <a:xfrm>
+            <a:off x="6161605" y="842845"/>
+            <a:ext cx="5519454" cy="5519454"/>
+          </a:xfrm>
+          <a:prstGeom prst="rect">
+            <a:avLst/>
+          </a:prstGeom>
+        </p:spPr>
+      </p:pic>
+      <p:pic>
+        <p:nvPicPr>
+          <p:cNvPr id="9" name="Imagen 8">
+            <a:extLst>
+              <a:ext uri="{FF2B5EF4-FFF2-40B4-BE49-F238E27FC236}">
+                <a16:creationId xmlns:a16="http://schemas.microsoft.com/office/drawing/2014/main" id="{E22F7A77-99D9-E860-9CE6-F671DC6FBD29}"/>
+              </a:ext>
+            </a:extLst>
+          </p:cNvPr>
+          <p:cNvPicPr>
+            <a:picLocks noChangeAspect="1"/>
+          </p:cNvPicPr>
+          <p:nvPr/>
+        </p:nvPicPr>
+        <p:blipFill>
+          <a:blip r:embed="rId3">
+            <a:extLst>
+              <a:ext uri="{28A0092B-C50C-407E-A947-70E740481C1C}">
+                <a14:useLocalDpi xmlns:a14="http://schemas.microsoft.com/office/drawing/2010/main" val="0"/>
+              </a:ext>
+            </a:extLst>
+          </a:blip>
+          <a:stretch>
+            <a:fillRect/>
+          </a:stretch>
+        </p:blipFill>
+        <p:spPr>
+          <a:xfrm>
+            <a:off x="802740" y="1086211"/>
+            <a:ext cx="5358865" cy="5358865"/>
+          </a:xfrm>
+          <a:prstGeom prst="rect">
+            <a:avLst/>
+          </a:prstGeom>
+        </p:spPr>
+      </p:pic>
+      <p:sp>
+        <p:nvSpPr>
+          <p:cNvPr id="10" name="CuadroTexto 9">
+            <a:extLst>
+              <a:ext uri="{FF2B5EF4-FFF2-40B4-BE49-F238E27FC236}">
+                <a16:creationId xmlns:a16="http://schemas.microsoft.com/office/drawing/2014/main" id="{8E8C694F-E9D5-BD4B-87DA-95624DCA1E31}"/>
+              </a:ext>
+            </a:extLst>
+          </p:cNvPr>
+          <p:cNvSpPr txBox="1"/>
+          <p:nvPr/>
+        </p:nvSpPr>
+        <p:spPr>
+          <a:xfrm>
+            <a:off x="1886552" y="6362299"/>
+            <a:ext cx="3397717" cy="369332"/>
+          </a:xfrm>
+          <a:prstGeom prst="rect">
+            <a:avLst/>
+          </a:prstGeom>
+          <a:noFill/>
+        </p:spPr>
+        <p:txBody>
+          <a:bodyPr wrap="square" rtlCol="0">
+            <a:spAutoFit/>
+          </a:bodyPr>
+          <a:lstStyle/>
+          <a:p>
+            <a:r>
+              <a:rPr lang="es-ES" dirty="0"/>
+              <a:t>Original </a:t>
+            </a:r>
+            <a:r>
+              <a:rPr lang="es-ES" dirty="0" err="1"/>
+              <a:t>Whole</a:t>
+            </a:r>
+            <a:r>
+              <a:rPr lang="es-ES" dirty="0"/>
+              <a:t> </a:t>
+            </a:r>
+            <a:r>
+              <a:rPr lang="es-ES" dirty="0" err="1"/>
+              <a:t>dataset</a:t>
+            </a:r>
+            <a:endParaRPr lang="es-ES" dirty="0"/>
+          </a:p>
+        </p:txBody>
+      </p:sp>
+      <p:sp>
+        <p:nvSpPr>
+          <p:cNvPr id="11" name="CuadroTexto 10">
+            <a:extLst>
+              <a:ext uri="{FF2B5EF4-FFF2-40B4-BE49-F238E27FC236}">
+                <a16:creationId xmlns:a16="http://schemas.microsoft.com/office/drawing/2014/main" id="{3B5EC3C7-77FD-989B-6C20-47600771EABE}"/>
+              </a:ext>
+            </a:extLst>
+          </p:cNvPr>
+          <p:cNvSpPr txBox="1"/>
+          <p:nvPr/>
+        </p:nvSpPr>
+        <p:spPr>
+          <a:xfrm>
+            <a:off x="7823736" y="6376737"/>
+            <a:ext cx="3397717" cy="369332"/>
+          </a:xfrm>
+          <a:prstGeom prst="rect">
+            <a:avLst/>
+          </a:prstGeom>
+          <a:noFill/>
+        </p:spPr>
+        <p:txBody>
+          <a:bodyPr wrap="square" rtlCol="0">
+            <a:spAutoFit/>
+          </a:bodyPr>
+          <a:lstStyle/>
+          <a:p>
+            <a:r>
+              <a:rPr lang="es-ES" dirty="0"/>
+              <a:t>Age-</a:t>
+            </a:r>
+            <a:r>
+              <a:rPr lang="es-ES" dirty="0" err="1"/>
+              <a:t>matched</a:t>
+            </a:r>
+            <a:r>
+              <a:rPr lang="es-ES" dirty="0"/>
+              <a:t> </a:t>
+            </a:r>
+            <a:r>
+              <a:rPr lang="es-ES" dirty="0" err="1"/>
+              <a:t>dataset</a:t>
+            </a:r>
+            <a:endParaRPr lang="es-ES" dirty="0"/>
+          </a:p>
+        </p:txBody>
+      </p:sp>
+    </p:spTree>
+    <p:extLst>
+      <p:ext uri="{BB962C8B-B14F-4D97-AF65-F5344CB8AC3E}">
+        <p14:creationId xmlns:p14="http://schemas.microsoft.com/office/powerpoint/2010/main" val="2019496702"/>
+      </p:ext>
+    </p:extLst>
+  </p:cSld>
+  <p:clrMapOvr>
+    <a:masterClrMapping/>
+  </p:clrMapOvr>
+</p:sld>
+</file>
+
+<file path=ppt/slides/slide21.xml><?xml version="1.0" encoding="utf-8"?>
+<p:sld xmlns:a="http://schemas.openxmlformats.org/drawingml/2006/main" xmlns:r="http://schemas.openxmlformats.org/officeDocument/2006/relationships" xmlns:p="http://schemas.openxmlformats.org/presentationml/2006/main">
+  <p:cSld>
+    <p:spTree>
+      <p:nvGrpSpPr>
+        <p:cNvPr id="1" name=""/>
+        <p:cNvGrpSpPr/>
+        <p:nvPr/>
+      </p:nvGrpSpPr>
+      <p:grpSpPr>
+        <a:xfrm>
+          <a:off x="0" y="0"/>
+          <a:ext cx="0" cy="0"/>
+          <a:chOff x="0" y="0"/>
+          <a:chExt cx="0" cy="0"/>
+        </a:xfrm>
+      </p:grpSpPr>
+      <p:sp>
+        <p:nvSpPr>
+          <p:cNvPr id="2" name="Título 1">
+            <a:extLst>
+              <a:ext uri="{FF2B5EF4-FFF2-40B4-BE49-F238E27FC236}">
+                <a16:creationId xmlns:a16="http://schemas.microsoft.com/office/drawing/2014/main" id="{CB19C4AF-152C-E324-FA93-775F22161D70}"/>
+              </a:ext>
+            </a:extLst>
+          </p:cNvPr>
+          <p:cNvSpPr>
+            <a:spLocks noGrp="1"/>
+          </p:cNvSpPr>
+          <p:nvPr>
+            <p:ph type="title"/>
+          </p:nvPr>
+        </p:nvSpPr>
+        <p:spPr/>
+        <p:txBody>
+          <a:bodyPr/>
+          <a:lstStyle/>
+          <a:p>
+            <a:r>
+              <a:rPr lang="es-ES" dirty="0" err="1"/>
+              <a:t>Comparison</a:t>
+            </a:r>
+            <a:r>
+              <a:rPr lang="es-ES" dirty="0"/>
+              <a:t> </a:t>
+            </a:r>
+            <a:r>
+              <a:rPr lang="es-ES" dirty="0" err="1"/>
+              <a:t>with</a:t>
+            </a:r>
+            <a:r>
+              <a:rPr lang="es-ES" dirty="0"/>
+              <a:t> </a:t>
+            </a:r>
+            <a:r>
+              <a:rPr lang="es-ES" dirty="0" err="1"/>
+              <a:t>previous</a:t>
+            </a:r>
+            <a:r>
+              <a:rPr lang="es-ES" dirty="0"/>
+              <a:t> data</a:t>
+            </a:r>
+          </a:p>
+        </p:txBody>
+      </p:sp>
+      <p:pic>
+        <p:nvPicPr>
+          <p:cNvPr id="5" name="Imagen 4">
+            <a:extLst>
+              <a:ext uri="{FF2B5EF4-FFF2-40B4-BE49-F238E27FC236}">
+                <a16:creationId xmlns:a16="http://schemas.microsoft.com/office/drawing/2014/main" id="{8C68EE68-FE74-155D-F181-A34970365FD7}"/>
+              </a:ext>
+            </a:extLst>
+          </p:cNvPr>
+          <p:cNvPicPr>
+            <a:picLocks noChangeAspect="1"/>
+          </p:cNvPicPr>
+          <p:nvPr/>
+        </p:nvPicPr>
+        <p:blipFill>
+          <a:blip r:embed="rId2"/>
+          <a:stretch>
+            <a:fillRect/>
+          </a:stretch>
+        </p:blipFill>
+        <p:spPr>
+          <a:xfrm>
+            <a:off x="182880" y="1333562"/>
+            <a:ext cx="10067544" cy="5159313"/>
+          </a:xfrm>
+          <a:prstGeom prst="rect">
+            <a:avLst/>
+          </a:prstGeom>
+        </p:spPr>
+      </p:pic>
+      <p:sp>
+        <p:nvSpPr>
+          <p:cNvPr id="6" name="CuadroTexto 5">
+            <a:extLst>
+              <a:ext uri="{FF2B5EF4-FFF2-40B4-BE49-F238E27FC236}">
+                <a16:creationId xmlns:a16="http://schemas.microsoft.com/office/drawing/2014/main" id="{D55E2213-9BEA-7974-7184-48D946B3C2DF}"/>
+              </a:ext>
+            </a:extLst>
+          </p:cNvPr>
+          <p:cNvSpPr txBox="1"/>
+          <p:nvPr/>
+        </p:nvSpPr>
+        <p:spPr>
+          <a:xfrm>
+            <a:off x="10250424" y="741412"/>
+            <a:ext cx="1572768" cy="5632311"/>
+          </a:xfrm>
+          <a:prstGeom prst="rect">
+            <a:avLst/>
+          </a:prstGeom>
+          <a:noFill/>
+        </p:spPr>
+        <p:txBody>
+          <a:bodyPr wrap="square" rtlCol="0">
+            <a:spAutoFit/>
+          </a:bodyPr>
+          <a:lstStyle/>
+          <a:p>
+            <a:r>
+              <a:rPr lang="es-ES" dirty="0" err="1"/>
+              <a:t>There</a:t>
+            </a:r>
+            <a:r>
+              <a:rPr lang="es-ES" dirty="0"/>
+              <a:t> </a:t>
+            </a:r>
+            <a:r>
+              <a:rPr lang="es-ES" dirty="0" err="1"/>
+              <a:t>is</a:t>
+            </a:r>
+            <a:r>
+              <a:rPr lang="es-ES" dirty="0"/>
+              <a:t> more </a:t>
+            </a:r>
+            <a:r>
+              <a:rPr lang="es-ES" dirty="0" err="1"/>
+              <a:t>mixed</a:t>
+            </a:r>
+            <a:r>
+              <a:rPr lang="es-ES" dirty="0"/>
+              <a:t> </a:t>
+            </a:r>
+            <a:r>
+              <a:rPr lang="es-ES" dirty="0" err="1"/>
+              <a:t>handedness</a:t>
+            </a:r>
+            <a:r>
+              <a:rPr lang="es-ES" dirty="0"/>
+              <a:t> </a:t>
+            </a:r>
+            <a:r>
+              <a:rPr lang="es-ES" dirty="0" err="1"/>
+              <a:t>among</a:t>
+            </a:r>
+            <a:r>
+              <a:rPr lang="es-ES" dirty="0"/>
+              <a:t> </a:t>
+            </a:r>
+            <a:r>
+              <a:rPr lang="es-ES" dirty="0" err="1"/>
+              <a:t>younger</a:t>
+            </a:r>
+            <a:r>
+              <a:rPr lang="es-ES" dirty="0"/>
+              <a:t> </a:t>
+            </a:r>
+            <a:r>
+              <a:rPr lang="es-ES" dirty="0" err="1"/>
+              <a:t>people</a:t>
+            </a:r>
+            <a:r>
+              <a:rPr lang="es-ES" dirty="0"/>
+              <a:t>.</a:t>
+            </a:r>
+          </a:p>
+          <a:p>
+            <a:endParaRPr lang="es-ES" dirty="0"/>
+          </a:p>
+          <a:p>
+            <a:r>
+              <a:rPr lang="es-ES" dirty="0"/>
+              <a:t>Proper </a:t>
+            </a:r>
+            <a:r>
+              <a:rPr lang="es-ES" dirty="0" err="1"/>
+              <a:t>effect</a:t>
+            </a:r>
+            <a:r>
+              <a:rPr lang="es-ES" dirty="0"/>
+              <a:t> </a:t>
+            </a:r>
+            <a:r>
+              <a:rPr lang="es-ES" dirty="0" err="1"/>
+              <a:t>should</a:t>
+            </a:r>
+            <a:r>
+              <a:rPr lang="es-ES" dirty="0"/>
+              <a:t> be </a:t>
+            </a:r>
+            <a:r>
+              <a:rPr lang="es-ES" dirty="0" err="1"/>
+              <a:t>calculated</a:t>
+            </a:r>
+            <a:r>
+              <a:rPr lang="es-ES" dirty="0"/>
+              <a:t> </a:t>
+            </a:r>
+            <a:r>
+              <a:rPr lang="es-ES" dirty="0" err="1"/>
+              <a:t>over</a:t>
+            </a:r>
+            <a:r>
+              <a:rPr lang="es-ES" dirty="0"/>
+              <a:t> </a:t>
+            </a:r>
+            <a:r>
+              <a:rPr lang="es-ES" dirty="0" err="1"/>
+              <a:t>oldies</a:t>
+            </a:r>
+            <a:r>
+              <a:rPr lang="es-ES" dirty="0"/>
+              <a:t> vs </a:t>
+            </a:r>
+            <a:r>
+              <a:rPr lang="es-ES" dirty="0" err="1"/>
+              <a:t>youngies</a:t>
+            </a:r>
+            <a:r>
+              <a:rPr lang="es-ES" dirty="0"/>
+              <a:t>. In </a:t>
+            </a:r>
+            <a:r>
+              <a:rPr lang="es-ES" dirty="0" err="1"/>
+              <a:t>this</a:t>
+            </a:r>
+            <a:r>
+              <a:rPr lang="es-ES" dirty="0"/>
+              <a:t> cases, </a:t>
+            </a:r>
+            <a:r>
+              <a:rPr lang="es-ES" dirty="0" err="1"/>
+              <a:t>the</a:t>
+            </a:r>
+            <a:r>
+              <a:rPr lang="es-ES" dirty="0"/>
+              <a:t> </a:t>
+            </a:r>
+            <a:r>
+              <a:rPr lang="es-ES" dirty="0" err="1"/>
+              <a:t>comparison</a:t>
+            </a:r>
+            <a:r>
+              <a:rPr lang="es-ES" dirty="0"/>
+              <a:t> </a:t>
+            </a:r>
+            <a:r>
+              <a:rPr lang="es-ES" dirty="0" err="1"/>
+              <a:t>is</a:t>
+            </a:r>
+            <a:r>
+              <a:rPr lang="es-ES" dirty="0"/>
+              <a:t> </a:t>
+            </a:r>
+            <a:r>
+              <a:rPr lang="es-ES" dirty="0" err="1"/>
+              <a:t>oldies</a:t>
+            </a:r>
+            <a:r>
+              <a:rPr lang="es-ES" dirty="0"/>
+              <a:t> vs </a:t>
+            </a:r>
+            <a:r>
+              <a:rPr lang="es-ES" dirty="0" err="1"/>
+              <a:t>all</a:t>
+            </a:r>
+            <a:r>
+              <a:rPr lang="es-ES" dirty="0"/>
+              <a:t> </a:t>
+            </a:r>
+            <a:r>
+              <a:rPr lang="es-ES" dirty="0" err="1"/>
+              <a:t>sample</a:t>
+            </a:r>
+            <a:r>
+              <a:rPr lang="es-ES" dirty="0"/>
+              <a:t>, </a:t>
+            </a:r>
+            <a:r>
+              <a:rPr lang="es-ES" dirty="0" err="1"/>
+              <a:t>which</a:t>
+            </a:r>
+            <a:r>
+              <a:rPr lang="es-ES" dirty="0"/>
+              <a:t> </a:t>
+            </a:r>
+            <a:r>
+              <a:rPr lang="es-ES" dirty="0" err="1"/>
+              <a:t>is</a:t>
+            </a:r>
+            <a:r>
+              <a:rPr lang="es-ES" dirty="0"/>
+              <a:t> </a:t>
+            </a:r>
+            <a:r>
+              <a:rPr lang="es-ES" dirty="0" err="1"/>
+              <a:t>not</a:t>
+            </a:r>
+            <a:r>
+              <a:rPr lang="es-ES" dirty="0"/>
+              <a:t> </a:t>
+            </a:r>
+            <a:r>
+              <a:rPr lang="es-ES" dirty="0" err="1"/>
+              <a:t>correct</a:t>
+            </a:r>
+            <a:r>
+              <a:rPr lang="es-ES" dirty="0"/>
+              <a:t> </a:t>
+            </a:r>
+            <a:r>
+              <a:rPr lang="es-ES" dirty="0" err="1"/>
+              <a:t>for</a:t>
+            </a:r>
+            <a:r>
+              <a:rPr lang="es-ES" dirty="0"/>
+              <a:t> </a:t>
+            </a:r>
+            <a:r>
+              <a:rPr lang="es-ES" dirty="0" err="1"/>
+              <a:t>sharing</a:t>
+            </a:r>
+            <a:endParaRPr lang="es-ES" dirty="0"/>
+          </a:p>
+        </p:txBody>
+      </p:sp>
+    </p:spTree>
+    <p:extLst>
+      <p:ext uri="{BB962C8B-B14F-4D97-AF65-F5344CB8AC3E}">
+        <p14:creationId xmlns:p14="http://schemas.microsoft.com/office/powerpoint/2010/main" val="3271870011"/>
+      </p:ext>
+    </p:extLst>
+  </p:cSld>
+  <p:clrMapOvr>
+    <a:masterClrMapping/>
+  </p:clrMapOvr>
+</p:sld>
+</file>
+
+<file path=ppt/slides/slide22.xml><?xml version="1.0" encoding="utf-8"?>
+<p:sld xmlns:a="http://schemas.openxmlformats.org/drawingml/2006/main" xmlns:r="http://schemas.openxmlformats.org/officeDocument/2006/relationships" xmlns:p="http://schemas.openxmlformats.org/presentationml/2006/main">
+  <p:cSld>
+    <p:spTree>
+      <p:nvGrpSpPr>
+        <p:cNvPr id="1" name="">
+          <a:extLst>
+            <a:ext uri="{FF2B5EF4-FFF2-40B4-BE49-F238E27FC236}">
+              <a16:creationId xmlns:a16="http://schemas.microsoft.com/office/drawing/2014/main" id="{04A4E669-1478-CEED-6AEE-DBEB7F2F42D1}"/>
+            </a:ext>
+          </a:extLst>
+        </p:cNvPr>
+        <p:cNvGrpSpPr/>
+        <p:nvPr/>
+      </p:nvGrpSpPr>
+      <p:grpSpPr>
+        <a:xfrm>
+          <a:off x="0" y="0"/>
+          <a:ext cx="0" cy="0"/>
+          <a:chOff x="0" y="0"/>
+          <a:chExt cx="0" cy="0"/>
+        </a:xfrm>
+      </p:grpSpPr>
+      <p:sp>
+        <p:nvSpPr>
+          <p:cNvPr id="2" name="Título 1">
+            <a:extLst>
+              <a:ext uri="{FF2B5EF4-FFF2-40B4-BE49-F238E27FC236}">
+                <a16:creationId xmlns:a16="http://schemas.microsoft.com/office/drawing/2014/main" id="{97EDEE69-126B-9402-890C-24E333C9D886}"/>
+              </a:ext>
+            </a:extLst>
+          </p:cNvPr>
+          <p:cNvSpPr>
+            <a:spLocks noGrp="1"/>
+          </p:cNvSpPr>
+          <p:nvPr>
+            <p:ph type="title"/>
+          </p:nvPr>
+        </p:nvSpPr>
+        <p:spPr>
+          <a:xfrm>
+            <a:off x="1038225" y="1"/>
+            <a:ext cx="10515600" cy="819150"/>
+          </a:xfrm>
+        </p:spPr>
+        <p:txBody>
+          <a:bodyPr/>
+          <a:lstStyle/>
+          <a:p>
+            <a:r>
+              <a:rPr lang="es-ES" dirty="0" err="1"/>
+              <a:t>What</a:t>
+            </a:r>
+            <a:r>
+              <a:rPr lang="es-ES" dirty="0"/>
+              <a:t> </a:t>
+            </a:r>
+            <a:r>
+              <a:rPr lang="es-ES" dirty="0" err="1"/>
+              <a:t>happens</a:t>
+            </a:r>
+            <a:r>
+              <a:rPr lang="es-ES" dirty="0"/>
+              <a:t> </a:t>
+            </a:r>
+            <a:r>
+              <a:rPr lang="es-ES" dirty="0" err="1"/>
+              <a:t>with</a:t>
+            </a:r>
+            <a:r>
+              <a:rPr lang="es-ES" dirty="0"/>
+              <a:t> sex</a:t>
+            </a:r>
+          </a:p>
+        </p:txBody>
+      </p:sp>
+      <p:pic>
+        <p:nvPicPr>
+          <p:cNvPr id="5" name="Imagen 4">
+            <a:extLst>
+              <a:ext uri="{FF2B5EF4-FFF2-40B4-BE49-F238E27FC236}">
+                <a16:creationId xmlns:a16="http://schemas.microsoft.com/office/drawing/2014/main" id="{7E43E153-5310-56BB-0D03-6C7D0C5D6165}"/>
+              </a:ext>
+            </a:extLst>
+          </p:cNvPr>
+          <p:cNvPicPr>
+            <a:picLocks noChangeAspect="1"/>
+          </p:cNvPicPr>
+          <p:nvPr/>
+        </p:nvPicPr>
+        <p:blipFill>
+          <a:blip r:embed="rId2"/>
+          <a:stretch>
+            <a:fillRect/>
+          </a:stretch>
+        </p:blipFill>
+        <p:spPr>
+          <a:xfrm>
+            <a:off x="1038225" y="1051899"/>
+            <a:ext cx="9659165" cy="5168362"/>
+          </a:xfrm>
+          <a:prstGeom prst="rect">
+            <a:avLst/>
+          </a:prstGeom>
+        </p:spPr>
+      </p:pic>
+      <p:sp>
+        <p:nvSpPr>
+          <p:cNvPr id="6" name="Elipse 5">
+            <a:extLst>
+              <a:ext uri="{FF2B5EF4-FFF2-40B4-BE49-F238E27FC236}">
+                <a16:creationId xmlns:a16="http://schemas.microsoft.com/office/drawing/2014/main" id="{51614AD5-587E-789C-B36B-48F1348BB2B3}"/>
+              </a:ext>
+            </a:extLst>
+          </p:cNvPr>
+          <p:cNvSpPr/>
+          <p:nvPr/>
+        </p:nvSpPr>
+        <p:spPr>
+          <a:xfrm>
+            <a:off x="800100" y="4762500"/>
+            <a:ext cx="2428875" cy="1690509"/>
+          </a:xfrm>
+          <a:prstGeom prst="ellipse">
+            <a:avLst/>
+          </a:prstGeom>
+          <a:noFill/>
+          <a:ln w="38100">
+            <a:solidFill>
+              <a:srgbClr val="FF0000"/>
+            </a:solidFill>
+          </a:ln>
+        </p:spPr>
+        <p:style>
+          <a:lnRef idx="2">
+            <a:schemeClr val="accent1">
+              <a:shade val="15000"/>
+            </a:schemeClr>
+          </a:lnRef>
+          <a:fillRef idx="1">
+            <a:schemeClr val="accent1"/>
+          </a:fillRef>
+          <a:effectRef idx="0">
+            <a:schemeClr val="accent1"/>
+          </a:effectRef>
+          <a:fontRef idx="minor">
+            <a:schemeClr val="lt1"/>
+          </a:fontRef>
+        </p:style>
+        <p:txBody>
+          <a:bodyPr rtlCol="0" anchor="ctr"/>
+          <a:lstStyle/>
+          <a:p>
+            <a:pPr algn="ctr"/>
+            <a:endParaRPr lang="es-ES"/>
+          </a:p>
+        </p:txBody>
+      </p:sp>
+      <p:sp>
+        <p:nvSpPr>
+          <p:cNvPr id="7" name="CuadroTexto 6">
+            <a:extLst>
+              <a:ext uri="{FF2B5EF4-FFF2-40B4-BE49-F238E27FC236}">
+                <a16:creationId xmlns:a16="http://schemas.microsoft.com/office/drawing/2014/main" id="{88DBB865-E19C-1471-A2FB-9BA3B5DB0F46}"/>
+              </a:ext>
+            </a:extLst>
+          </p:cNvPr>
+          <p:cNvSpPr txBox="1"/>
+          <p:nvPr/>
+        </p:nvSpPr>
+        <p:spPr>
+          <a:xfrm>
+            <a:off x="3210331" y="6211668"/>
+            <a:ext cx="6838543" cy="646331"/>
+          </a:xfrm>
+          <a:prstGeom prst="rect">
+            <a:avLst/>
+          </a:prstGeom>
+          <a:noFill/>
+        </p:spPr>
+        <p:txBody>
+          <a:bodyPr wrap="square" rtlCol="0">
+            <a:spAutoFit/>
+          </a:bodyPr>
+          <a:lstStyle/>
+          <a:p>
+            <a:r>
+              <a:rPr lang="es-ES" dirty="0" err="1"/>
+              <a:t>Expected</a:t>
+            </a:r>
+            <a:r>
+              <a:rPr lang="es-ES" dirty="0"/>
+              <a:t> </a:t>
+            </a:r>
+            <a:r>
+              <a:rPr lang="es-ES" dirty="0" err="1"/>
+              <a:t>diff</a:t>
+            </a:r>
+            <a:r>
+              <a:rPr lang="es-ES" dirty="0"/>
+              <a:t> </a:t>
+            </a:r>
+            <a:r>
+              <a:rPr lang="es-ES" dirty="0" err="1"/>
+              <a:t>between</a:t>
+            </a:r>
+            <a:r>
+              <a:rPr lang="es-ES" dirty="0"/>
+              <a:t> males and </a:t>
+            </a:r>
+            <a:r>
+              <a:rPr lang="es-ES" dirty="0" err="1"/>
+              <a:t>females</a:t>
+            </a:r>
+            <a:r>
+              <a:rPr lang="es-ES" dirty="0"/>
+              <a:t>. </a:t>
+            </a:r>
+            <a:r>
+              <a:rPr lang="es-ES" dirty="0" err="1"/>
+              <a:t>If</a:t>
+            </a:r>
+            <a:r>
+              <a:rPr lang="es-ES" dirty="0"/>
+              <a:t> </a:t>
+            </a:r>
+            <a:r>
+              <a:rPr lang="es-ES" dirty="0" err="1"/>
+              <a:t>considering</a:t>
+            </a:r>
+            <a:r>
+              <a:rPr lang="es-ES" dirty="0"/>
+              <a:t> non-</a:t>
+            </a:r>
+            <a:r>
+              <a:rPr lang="es-ES" dirty="0" err="1"/>
+              <a:t>right</a:t>
+            </a:r>
+            <a:r>
+              <a:rPr lang="es-ES" dirty="0"/>
+              <a:t>-</a:t>
+            </a:r>
+            <a:r>
+              <a:rPr lang="es-ES" dirty="0" err="1"/>
+              <a:t>handedness</a:t>
+            </a:r>
+            <a:r>
+              <a:rPr lang="es-ES" dirty="0"/>
+              <a:t> (</a:t>
+            </a:r>
+            <a:r>
+              <a:rPr lang="es-ES" dirty="0" err="1"/>
+              <a:t>left+mixed</a:t>
+            </a:r>
+            <a:r>
+              <a:rPr lang="es-ES" dirty="0"/>
+              <a:t>) </a:t>
+            </a:r>
+            <a:r>
+              <a:rPr lang="es-ES" dirty="0" err="1"/>
+              <a:t>would</a:t>
+            </a:r>
+            <a:r>
+              <a:rPr lang="es-ES" dirty="0"/>
+              <a:t> </a:t>
+            </a:r>
+            <a:r>
+              <a:rPr lang="es-ES" dirty="0" err="1"/>
+              <a:t>still</a:t>
+            </a:r>
+            <a:r>
+              <a:rPr lang="es-ES" dirty="0"/>
+              <a:t> be </a:t>
+            </a:r>
+            <a:r>
+              <a:rPr lang="es-ES" dirty="0" err="1"/>
+              <a:t>there</a:t>
+            </a:r>
+            <a:endParaRPr lang="es-ES" dirty="0"/>
+          </a:p>
+        </p:txBody>
+      </p:sp>
+      <p:sp>
+        <p:nvSpPr>
+          <p:cNvPr id="3" name="Rectángulo 2">
+            <a:extLst>
+              <a:ext uri="{FF2B5EF4-FFF2-40B4-BE49-F238E27FC236}">
+                <a16:creationId xmlns:a16="http://schemas.microsoft.com/office/drawing/2014/main" id="{FE5059CF-27BC-6941-2F67-1DF8716AA62F}"/>
+              </a:ext>
+            </a:extLst>
+          </p:cNvPr>
+          <p:cNvSpPr/>
+          <p:nvPr/>
+        </p:nvSpPr>
+        <p:spPr>
+          <a:xfrm>
+            <a:off x="9122229" y="0"/>
+            <a:ext cx="2852057" cy="819150"/>
+          </a:xfrm>
+          <a:prstGeom prst="rect">
+            <a:avLst/>
+          </a:prstGeom>
+        </p:spPr>
+        <p:style>
+          <a:lnRef idx="2">
+            <a:schemeClr val="accent1">
+              <a:shade val="15000"/>
+            </a:schemeClr>
+          </a:lnRef>
+          <a:fillRef idx="1">
+            <a:schemeClr val="accent1"/>
+          </a:fillRef>
+          <a:effectRef idx="0">
+            <a:schemeClr val="accent1"/>
+          </a:effectRef>
+          <a:fontRef idx="minor">
+            <a:schemeClr val="lt1"/>
+          </a:fontRef>
+        </p:style>
+        <p:txBody>
+          <a:bodyPr rtlCol="0" anchor="ctr"/>
+          <a:lstStyle/>
+          <a:p>
+            <a:pPr algn="ctr"/>
+            <a:r>
+              <a:rPr lang="es-ES" dirty="0"/>
+              <a:t>WHOLE DATASET (NOT AGE MATCH)</a:t>
+            </a:r>
+          </a:p>
+        </p:txBody>
+      </p:sp>
+    </p:spTree>
+    <p:extLst>
+      <p:ext uri="{BB962C8B-B14F-4D97-AF65-F5344CB8AC3E}">
+        <p14:creationId xmlns:p14="http://schemas.microsoft.com/office/powerpoint/2010/main" val="3445623569"/>
+      </p:ext>
+    </p:extLst>
+  </p:cSld>
+  <p:clrMapOvr>
+    <a:masterClrMapping/>
+  </p:clrMapOvr>
+</p:sld>
+</file>
+
+<file path=ppt/slides/slide23.xml><?xml version="1.0" encoding="utf-8"?>
+<p:sld xmlns:a="http://schemas.openxmlformats.org/drawingml/2006/main" xmlns:r="http://schemas.openxmlformats.org/officeDocument/2006/relationships" xmlns:p="http://schemas.openxmlformats.org/presentationml/2006/main">
+  <p:cSld>
+    <p:spTree>
+      <p:nvGrpSpPr>
+        <p:cNvPr id="1" name="">
+          <a:extLst>
+            <a:ext uri="{FF2B5EF4-FFF2-40B4-BE49-F238E27FC236}">
+              <a16:creationId xmlns:a16="http://schemas.microsoft.com/office/drawing/2014/main" id="{93C73D13-F5E6-74EF-78D8-8804418279CF}"/>
+            </a:ext>
+          </a:extLst>
+        </p:cNvPr>
+        <p:cNvGrpSpPr/>
+        <p:nvPr/>
+      </p:nvGrpSpPr>
+      <p:grpSpPr>
+        <a:xfrm>
+          <a:off x="0" y="0"/>
+          <a:ext cx="0" cy="0"/>
+          <a:chOff x="0" y="0"/>
+          <a:chExt cx="0" cy="0"/>
+        </a:xfrm>
+      </p:grpSpPr>
+      <p:sp>
+        <p:nvSpPr>
+          <p:cNvPr id="2" name="Título 1">
+            <a:extLst>
+              <a:ext uri="{FF2B5EF4-FFF2-40B4-BE49-F238E27FC236}">
+                <a16:creationId xmlns:a16="http://schemas.microsoft.com/office/drawing/2014/main" id="{205CE274-A2A1-8C50-FEF7-FCB965094DE8}"/>
+              </a:ext>
+            </a:extLst>
+          </p:cNvPr>
+          <p:cNvSpPr>
+            <a:spLocks noGrp="1"/>
+          </p:cNvSpPr>
+          <p:nvPr>
+            <p:ph type="title"/>
+          </p:nvPr>
+        </p:nvSpPr>
+        <p:spPr>
+          <a:xfrm>
+            <a:off x="1038225" y="1"/>
+            <a:ext cx="10515600" cy="819150"/>
+          </a:xfrm>
+        </p:spPr>
+        <p:txBody>
+          <a:bodyPr/>
+          <a:lstStyle/>
+          <a:p>
+            <a:r>
+              <a:rPr lang="es-ES" dirty="0" err="1"/>
+              <a:t>What</a:t>
+            </a:r>
+            <a:r>
+              <a:rPr lang="es-ES" dirty="0"/>
+              <a:t> </a:t>
+            </a:r>
+            <a:r>
+              <a:rPr lang="es-ES" dirty="0" err="1"/>
+              <a:t>happens</a:t>
+            </a:r>
+            <a:r>
+              <a:rPr lang="es-ES" dirty="0"/>
+              <a:t> </a:t>
+            </a:r>
+            <a:r>
+              <a:rPr lang="es-ES" dirty="0" err="1"/>
+              <a:t>with</a:t>
+            </a:r>
+            <a:r>
+              <a:rPr lang="es-ES" dirty="0"/>
+              <a:t> sex</a:t>
+            </a:r>
+          </a:p>
+        </p:txBody>
+      </p:sp>
+      <p:pic>
+        <p:nvPicPr>
+          <p:cNvPr id="5" name="Imagen 4">
+            <a:extLst>
+              <a:ext uri="{FF2B5EF4-FFF2-40B4-BE49-F238E27FC236}">
+                <a16:creationId xmlns:a16="http://schemas.microsoft.com/office/drawing/2014/main" id="{7ED23ADE-97CC-1A1C-8FA7-1E05655E0AE8}"/>
+              </a:ext>
+            </a:extLst>
+          </p:cNvPr>
+          <p:cNvPicPr>
+            <a:picLocks noChangeAspect="1"/>
+          </p:cNvPicPr>
+          <p:nvPr/>
+        </p:nvPicPr>
+        <p:blipFill>
+          <a:blip r:embed="rId2"/>
+          <a:stretch>
+            <a:fillRect/>
+          </a:stretch>
+        </p:blipFill>
+        <p:spPr>
+          <a:xfrm>
+            <a:off x="1038225" y="1051899"/>
+            <a:ext cx="9659165" cy="5168362"/>
+          </a:xfrm>
+          <a:prstGeom prst="rect">
+            <a:avLst/>
+          </a:prstGeom>
+        </p:spPr>
+      </p:pic>
+      <p:sp>
+        <p:nvSpPr>
+          <p:cNvPr id="6" name="Elipse 5">
+            <a:extLst>
+              <a:ext uri="{FF2B5EF4-FFF2-40B4-BE49-F238E27FC236}">
+                <a16:creationId xmlns:a16="http://schemas.microsoft.com/office/drawing/2014/main" id="{49F2C07E-B830-ED41-C7A8-24A44A918C1F}"/>
+              </a:ext>
+            </a:extLst>
+          </p:cNvPr>
+          <p:cNvSpPr/>
+          <p:nvPr/>
+        </p:nvSpPr>
+        <p:spPr>
+          <a:xfrm>
+            <a:off x="3590925" y="4657725"/>
+            <a:ext cx="2428875" cy="1690509"/>
+          </a:xfrm>
+          <a:prstGeom prst="ellipse">
+            <a:avLst/>
+          </a:prstGeom>
+          <a:noFill/>
+          <a:ln w="38100">
+            <a:solidFill>
+              <a:srgbClr val="FF0000"/>
+            </a:solidFill>
+          </a:ln>
+        </p:spPr>
+        <p:style>
+          <a:lnRef idx="2">
+            <a:schemeClr val="accent1">
+              <a:shade val="15000"/>
+            </a:schemeClr>
+          </a:lnRef>
+          <a:fillRef idx="1">
+            <a:schemeClr val="accent1"/>
+          </a:fillRef>
+          <a:effectRef idx="0">
+            <a:schemeClr val="accent1"/>
+          </a:effectRef>
+          <a:fontRef idx="minor">
+            <a:schemeClr val="lt1"/>
+          </a:fontRef>
+        </p:style>
+        <p:txBody>
+          <a:bodyPr rtlCol="0" anchor="ctr"/>
+          <a:lstStyle/>
+          <a:p>
+            <a:pPr algn="ctr"/>
+            <a:endParaRPr lang="es-ES"/>
+          </a:p>
+        </p:txBody>
+      </p:sp>
+      <p:sp>
+        <p:nvSpPr>
+          <p:cNvPr id="7" name="CuadroTexto 6">
+            <a:extLst>
+              <a:ext uri="{FF2B5EF4-FFF2-40B4-BE49-F238E27FC236}">
+                <a16:creationId xmlns:a16="http://schemas.microsoft.com/office/drawing/2014/main" id="{C750EB17-D696-A8D5-7D80-11BDB85EA69E}"/>
+              </a:ext>
+            </a:extLst>
+          </p:cNvPr>
+          <p:cNvSpPr txBox="1"/>
+          <p:nvPr/>
+        </p:nvSpPr>
+        <p:spPr>
+          <a:xfrm>
+            <a:off x="5058181" y="6348234"/>
+            <a:ext cx="6838543" cy="369332"/>
+          </a:xfrm>
+          <a:prstGeom prst="rect">
+            <a:avLst/>
+          </a:prstGeom>
+          <a:noFill/>
+        </p:spPr>
+        <p:txBody>
+          <a:bodyPr wrap="square" rtlCol="0">
+            <a:spAutoFit/>
+          </a:bodyPr>
+          <a:lstStyle/>
+          <a:p>
+            <a:r>
+              <a:rPr lang="es-ES" dirty="0"/>
+              <a:t>No </a:t>
+            </a:r>
+            <a:r>
+              <a:rPr lang="es-ES" dirty="0" err="1"/>
+              <a:t>differences</a:t>
+            </a:r>
+            <a:r>
+              <a:rPr lang="es-ES" dirty="0"/>
+              <a:t> </a:t>
+            </a:r>
+            <a:r>
+              <a:rPr lang="es-ES" dirty="0" err="1"/>
+              <a:t>between</a:t>
+            </a:r>
+            <a:r>
+              <a:rPr lang="es-ES" dirty="0"/>
+              <a:t> males and </a:t>
+            </a:r>
+            <a:r>
+              <a:rPr lang="es-ES" dirty="0" err="1"/>
+              <a:t>females</a:t>
+            </a:r>
+            <a:r>
+              <a:rPr lang="es-ES" dirty="0"/>
+              <a:t> in BD</a:t>
+            </a:r>
+          </a:p>
+        </p:txBody>
+      </p:sp>
+      <p:sp>
+        <p:nvSpPr>
+          <p:cNvPr id="3" name="Rectángulo 2">
+            <a:extLst>
+              <a:ext uri="{FF2B5EF4-FFF2-40B4-BE49-F238E27FC236}">
+                <a16:creationId xmlns:a16="http://schemas.microsoft.com/office/drawing/2014/main" id="{95C79BF0-CA48-B844-C511-ECC73531C8F0}"/>
+              </a:ext>
+            </a:extLst>
+          </p:cNvPr>
+          <p:cNvSpPr/>
+          <p:nvPr/>
+        </p:nvSpPr>
+        <p:spPr>
+          <a:xfrm>
+            <a:off x="9122229" y="0"/>
+            <a:ext cx="2852057" cy="819150"/>
+          </a:xfrm>
+          <a:prstGeom prst="rect">
+            <a:avLst/>
+          </a:prstGeom>
+        </p:spPr>
+        <p:style>
+          <a:lnRef idx="2">
+            <a:schemeClr val="accent1">
+              <a:shade val="15000"/>
+            </a:schemeClr>
+          </a:lnRef>
+          <a:fillRef idx="1">
+            <a:schemeClr val="accent1"/>
+          </a:fillRef>
+          <a:effectRef idx="0">
+            <a:schemeClr val="accent1"/>
+          </a:effectRef>
+          <a:fontRef idx="minor">
+            <a:schemeClr val="lt1"/>
+          </a:fontRef>
+        </p:style>
+        <p:txBody>
+          <a:bodyPr rtlCol="0" anchor="ctr"/>
+          <a:lstStyle/>
+          <a:p>
+            <a:pPr algn="ctr"/>
+            <a:r>
+              <a:rPr lang="es-ES" dirty="0"/>
+              <a:t>WHOLE DATASET (NOT AGE MATCH)</a:t>
+            </a:r>
+          </a:p>
+        </p:txBody>
+      </p:sp>
+    </p:spTree>
+    <p:extLst>
+      <p:ext uri="{BB962C8B-B14F-4D97-AF65-F5344CB8AC3E}">
+        <p14:creationId xmlns:p14="http://schemas.microsoft.com/office/powerpoint/2010/main" val="2416488832"/>
+      </p:ext>
+    </p:extLst>
+  </p:cSld>
+  <p:clrMapOvr>
+    <a:masterClrMapping/>
+  </p:clrMapOvr>
+</p:sld>
+</file>
+
+<file path=ppt/slides/slide24.xml><?xml version="1.0" encoding="utf-8"?>
+<p:sld xmlns:a="http://schemas.openxmlformats.org/drawingml/2006/main" xmlns:r="http://schemas.openxmlformats.org/officeDocument/2006/relationships" xmlns:p="http://schemas.openxmlformats.org/presentationml/2006/main">
+  <p:cSld>
+    <p:spTree>
+      <p:nvGrpSpPr>
+        <p:cNvPr id="1" name="">
+          <a:extLst>
+            <a:ext uri="{FF2B5EF4-FFF2-40B4-BE49-F238E27FC236}">
+              <a16:creationId xmlns:a16="http://schemas.microsoft.com/office/drawing/2014/main" id="{2C45E69E-D6D1-4AD3-06B5-5B6A8EB08D61}"/>
+            </a:ext>
+          </a:extLst>
+        </p:cNvPr>
+        <p:cNvGrpSpPr/>
+        <p:nvPr/>
+      </p:nvGrpSpPr>
+      <p:grpSpPr>
+        <a:xfrm>
+          <a:off x="0" y="0"/>
+          <a:ext cx="0" cy="0"/>
+          <a:chOff x="0" y="0"/>
+          <a:chExt cx="0" cy="0"/>
+        </a:xfrm>
+      </p:grpSpPr>
+      <p:sp>
+        <p:nvSpPr>
+          <p:cNvPr id="2" name="Título 1">
+            <a:extLst>
+              <a:ext uri="{FF2B5EF4-FFF2-40B4-BE49-F238E27FC236}">
+                <a16:creationId xmlns:a16="http://schemas.microsoft.com/office/drawing/2014/main" id="{BD33C474-2D67-9B56-502E-CB96091AC8F6}"/>
+              </a:ext>
+            </a:extLst>
+          </p:cNvPr>
+          <p:cNvSpPr>
+            <a:spLocks noGrp="1"/>
+          </p:cNvSpPr>
+          <p:nvPr>
+            <p:ph type="title"/>
+          </p:nvPr>
+        </p:nvSpPr>
+        <p:spPr>
+          <a:xfrm>
+            <a:off x="1038225" y="1"/>
+            <a:ext cx="10515600" cy="819150"/>
+          </a:xfrm>
+        </p:spPr>
+        <p:txBody>
+          <a:bodyPr/>
+          <a:lstStyle/>
+          <a:p>
+            <a:r>
+              <a:rPr lang="es-ES" dirty="0" err="1"/>
+              <a:t>What</a:t>
+            </a:r>
+            <a:r>
+              <a:rPr lang="es-ES" dirty="0"/>
+              <a:t> </a:t>
+            </a:r>
+            <a:r>
+              <a:rPr lang="es-ES" dirty="0" err="1"/>
+              <a:t>happens</a:t>
+            </a:r>
+            <a:r>
+              <a:rPr lang="es-ES" dirty="0"/>
+              <a:t> </a:t>
+            </a:r>
+            <a:r>
+              <a:rPr lang="es-ES" dirty="0" err="1"/>
+              <a:t>with</a:t>
+            </a:r>
+            <a:r>
+              <a:rPr lang="es-ES" dirty="0"/>
+              <a:t> sex</a:t>
+            </a:r>
+          </a:p>
+        </p:txBody>
+      </p:sp>
+      <p:pic>
+        <p:nvPicPr>
+          <p:cNvPr id="5" name="Imagen 4">
+            <a:extLst>
+              <a:ext uri="{FF2B5EF4-FFF2-40B4-BE49-F238E27FC236}">
+                <a16:creationId xmlns:a16="http://schemas.microsoft.com/office/drawing/2014/main" id="{6B11D5FD-2E80-9ACA-B59D-3C7320B87C04}"/>
+              </a:ext>
+            </a:extLst>
+          </p:cNvPr>
+          <p:cNvPicPr>
+            <a:picLocks noChangeAspect="1"/>
+          </p:cNvPicPr>
+          <p:nvPr/>
+        </p:nvPicPr>
+        <p:blipFill>
+          <a:blip r:embed="rId2"/>
+          <a:stretch>
+            <a:fillRect/>
+          </a:stretch>
+        </p:blipFill>
+        <p:spPr>
+          <a:xfrm>
+            <a:off x="1038225" y="1051899"/>
+            <a:ext cx="9659165" cy="5168362"/>
+          </a:xfrm>
+          <a:prstGeom prst="rect">
+            <a:avLst/>
+          </a:prstGeom>
+        </p:spPr>
+      </p:pic>
+      <p:sp>
+        <p:nvSpPr>
+          <p:cNvPr id="6" name="Elipse 5">
+            <a:extLst>
+              <a:ext uri="{FF2B5EF4-FFF2-40B4-BE49-F238E27FC236}">
+                <a16:creationId xmlns:a16="http://schemas.microsoft.com/office/drawing/2014/main" id="{165A52C4-A52F-14F9-439C-0AF41AC8DAFB}"/>
+              </a:ext>
+            </a:extLst>
+          </p:cNvPr>
+          <p:cNvSpPr/>
+          <p:nvPr/>
+        </p:nvSpPr>
+        <p:spPr>
+          <a:xfrm>
+            <a:off x="8867775" y="1047929"/>
+            <a:ext cx="2428875" cy="3990796"/>
+          </a:xfrm>
+          <a:prstGeom prst="ellipse">
+            <a:avLst/>
+          </a:prstGeom>
+          <a:noFill/>
+          <a:ln w="38100">
+            <a:solidFill>
+              <a:srgbClr val="FF0000"/>
+            </a:solidFill>
+          </a:ln>
+        </p:spPr>
+        <p:style>
+          <a:lnRef idx="2">
+            <a:schemeClr val="accent1">
+              <a:shade val="15000"/>
+            </a:schemeClr>
+          </a:lnRef>
+          <a:fillRef idx="1">
+            <a:schemeClr val="accent1"/>
+          </a:fillRef>
+          <a:effectRef idx="0">
+            <a:schemeClr val="accent1"/>
+          </a:effectRef>
+          <a:fontRef idx="minor">
+            <a:schemeClr val="lt1"/>
+          </a:fontRef>
+        </p:style>
+        <p:txBody>
+          <a:bodyPr rtlCol="0" anchor="ctr"/>
+          <a:lstStyle/>
+          <a:p>
+            <a:pPr algn="ctr"/>
+            <a:endParaRPr lang="es-ES"/>
+          </a:p>
+        </p:txBody>
+      </p:sp>
+      <p:sp>
+        <p:nvSpPr>
+          <p:cNvPr id="7" name="CuadroTexto 6">
+            <a:extLst>
+              <a:ext uri="{FF2B5EF4-FFF2-40B4-BE49-F238E27FC236}">
+                <a16:creationId xmlns:a16="http://schemas.microsoft.com/office/drawing/2014/main" id="{A89E7F36-A2C7-9150-B682-F0852D91DB55}"/>
+              </a:ext>
+            </a:extLst>
+          </p:cNvPr>
+          <p:cNvSpPr txBox="1"/>
+          <p:nvPr/>
+        </p:nvSpPr>
+        <p:spPr>
+          <a:xfrm>
+            <a:off x="8496301" y="5267503"/>
+            <a:ext cx="3648074" cy="1200329"/>
+          </a:xfrm>
+          <a:prstGeom prst="rect">
+            <a:avLst/>
+          </a:prstGeom>
+          <a:noFill/>
+        </p:spPr>
+        <p:txBody>
+          <a:bodyPr wrap="square" rtlCol="0">
+            <a:spAutoFit/>
+          </a:bodyPr>
+          <a:lstStyle/>
+          <a:p>
+            <a:r>
+              <a:rPr lang="es-ES" dirty="0"/>
+              <a:t>More </a:t>
+            </a:r>
+            <a:r>
+              <a:rPr lang="es-ES" dirty="0" err="1"/>
+              <a:t>differences</a:t>
+            </a:r>
+            <a:r>
+              <a:rPr lang="es-ES" dirty="0"/>
+              <a:t> in </a:t>
+            </a:r>
+            <a:r>
+              <a:rPr lang="es-ES" dirty="0" err="1"/>
+              <a:t>mixed</a:t>
+            </a:r>
+            <a:r>
+              <a:rPr lang="es-ES" dirty="0"/>
+              <a:t> </a:t>
+            </a:r>
+            <a:r>
+              <a:rPr lang="es-ES" dirty="0" err="1"/>
+              <a:t>handedness</a:t>
+            </a:r>
+            <a:r>
+              <a:rPr lang="es-ES" dirty="0"/>
+              <a:t> in males </a:t>
+            </a:r>
+            <a:r>
+              <a:rPr lang="es-ES" dirty="0" err="1"/>
+              <a:t>when</a:t>
+            </a:r>
+            <a:r>
+              <a:rPr lang="es-ES" dirty="0"/>
+              <a:t> </a:t>
+            </a:r>
+            <a:r>
+              <a:rPr lang="es-ES" dirty="0" err="1"/>
+              <a:t>comparing</a:t>
+            </a:r>
+            <a:r>
+              <a:rPr lang="es-ES" dirty="0"/>
+              <a:t> BD and </a:t>
+            </a:r>
+            <a:r>
+              <a:rPr lang="es-ES" dirty="0" err="1"/>
+              <a:t>controls</a:t>
+            </a:r>
+            <a:r>
+              <a:rPr lang="es-ES" dirty="0"/>
+              <a:t>, </a:t>
+            </a:r>
+            <a:r>
+              <a:rPr lang="es-ES" dirty="0" err="1"/>
+              <a:t>but</a:t>
+            </a:r>
+            <a:r>
+              <a:rPr lang="es-ES" dirty="0"/>
+              <a:t> </a:t>
+            </a:r>
+            <a:r>
+              <a:rPr lang="es-ES" dirty="0" err="1"/>
+              <a:t>still</a:t>
+            </a:r>
+            <a:r>
+              <a:rPr lang="es-ES" dirty="0"/>
+              <a:t> </a:t>
+            </a:r>
+            <a:r>
+              <a:rPr lang="es-ES" dirty="0" err="1"/>
+              <a:t>some</a:t>
+            </a:r>
+            <a:r>
+              <a:rPr lang="es-ES" dirty="0"/>
+              <a:t> in </a:t>
+            </a:r>
+            <a:r>
+              <a:rPr lang="es-ES" dirty="0" err="1"/>
+              <a:t>females</a:t>
+            </a:r>
+            <a:endParaRPr lang="es-ES" dirty="0"/>
+          </a:p>
+        </p:txBody>
+      </p:sp>
+      <p:sp>
+        <p:nvSpPr>
+          <p:cNvPr id="3" name="Rectángulo 2">
+            <a:extLst>
+              <a:ext uri="{FF2B5EF4-FFF2-40B4-BE49-F238E27FC236}">
+                <a16:creationId xmlns:a16="http://schemas.microsoft.com/office/drawing/2014/main" id="{84F124EA-4D83-3965-3C1F-EE114393E74D}"/>
+              </a:ext>
+            </a:extLst>
+          </p:cNvPr>
+          <p:cNvSpPr/>
+          <p:nvPr/>
+        </p:nvSpPr>
+        <p:spPr>
+          <a:xfrm>
+            <a:off x="9122229" y="0"/>
+            <a:ext cx="2852057" cy="819150"/>
+          </a:xfrm>
+          <a:prstGeom prst="rect">
+            <a:avLst/>
+          </a:prstGeom>
+        </p:spPr>
+        <p:style>
+          <a:lnRef idx="2">
+            <a:schemeClr val="accent1">
+              <a:shade val="15000"/>
+            </a:schemeClr>
+          </a:lnRef>
+          <a:fillRef idx="1">
+            <a:schemeClr val="accent1"/>
+          </a:fillRef>
+          <a:effectRef idx="0">
+            <a:schemeClr val="accent1"/>
+          </a:effectRef>
+          <a:fontRef idx="minor">
+            <a:schemeClr val="lt1"/>
+          </a:fontRef>
+        </p:style>
+        <p:txBody>
+          <a:bodyPr rtlCol="0" anchor="ctr"/>
+          <a:lstStyle/>
+          <a:p>
+            <a:pPr algn="ctr"/>
+            <a:r>
+              <a:rPr lang="es-ES" dirty="0"/>
+              <a:t>WHOLE DATASET (NOT AGE MATCH)</a:t>
+            </a:r>
+          </a:p>
+        </p:txBody>
+      </p:sp>
+    </p:spTree>
+    <p:extLst>
+      <p:ext uri="{BB962C8B-B14F-4D97-AF65-F5344CB8AC3E}">
+        <p14:creationId xmlns:p14="http://schemas.microsoft.com/office/powerpoint/2010/main" val="2911881243"/>
+      </p:ext>
+    </p:extLst>
+  </p:cSld>
+  <p:clrMapOvr>
+    <a:masterClrMapping/>
+  </p:clrMapOvr>
+</p:sld>
+</file>
+
+<file path=ppt/slides/slide25.xml><?xml version="1.0" encoding="utf-8"?>
+<p:sld xmlns:a="http://schemas.openxmlformats.org/drawingml/2006/main" xmlns:r="http://schemas.openxmlformats.org/officeDocument/2006/relationships" xmlns:p="http://schemas.openxmlformats.org/presentationml/2006/main">
+  <p:cSld>
+    <p:spTree>
+      <p:nvGrpSpPr>
+        <p:cNvPr id="1" name=""/>
+        <p:cNvGrpSpPr/>
+        <p:nvPr/>
+      </p:nvGrpSpPr>
+      <p:grpSpPr>
+        <a:xfrm>
+          <a:off x="0" y="0"/>
+          <a:ext cx="0" cy="0"/>
+          <a:chOff x="0" y="0"/>
+          <a:chExt cx="0" cy="0"/>
+        </a:xfrm>
+      </p:grpSpPr>
+      <p:sp>
+        <p:nvSpPr>
+          <p:cNvPr id="2" name="Título 1">
+            <a:extLst>
+              <a:ext uri="{FF2B5EF4-FFF2-40B4-BE49-F238E27FC236}">
+                <a16:creationId xmlns:a16="http://schemas.microsoft.com/office/drawing/2014/main" id="{203C7790-A3B2-1E22-6428-4C9C535E5488}"/>
+              </a:ext>
+            </a:extLst>
+          </p:cNvPr>
+          <p:cNvSpPr>
+            <a:spLocks noGrp="1"/>
+          </p:cNvSpPr>
+          <p:nvPr>
+            <p:ph type="title"/>
+          </p:nvPr>
+        </p:nvSpPr>
+        <p:spPr/>
+        <p:txBody>
+          <a:bodyPr/>
+          <a:lstStyle/>
+          <a:p>
+            <a:r>
+              <a:rPr lang="es-ES" dirty="0" err="1"/>
+              <a:t>Stratification</a:t>
+            </a:r>
+            <a:r>
+              <a:rPr lang="es-ES" dirty="0"/>
+              <a:t> </a:t>
+            </a:r>
+            <a:r>
+              <a:rPr lang="es-ES" dirty="0" err="1"/>
+              <a:t>by</a:t>
+            </a:r>
+            <a:r>
+              <a:rPr lang="es-ES" dirty="0"/>
+              <a:t> sex</a:t>
+            </a:r>
+          </a:p>
+        </p:txBody>
+      </p:sp>
+      <p:pic>
+        <p:nvPicPr>
+          <p:cNvPr id="5" name="Marcador de contenido 4">
+            <a:extLst>
+              <a:ext uri="{FF2B5EF4-FFF2-40B4-BE49-F238E27FC236}">
+                <a16:creationId xmlns:a16="http://schemas.microsoft.com/office/drawing/2014/main" id="{EAA4F788-C4FF-3329-B76F-874AA9A4AB0E}"/>
+              </a:ext>
+            </a:extLst>
+          </p:cNvPr>
+          <p:cNvPicPr>
+            <a:picLocks noGrp="1" noChangeAspect="1"/>
+          </p:cNvPicPr>
+          <p:nvPr>
+            <p:ph idx="1"/>
+          </p:nvPr>
+        </p:nvPicPr>
+        <p:blipFill>
+          <a:blip r:embed="rId2">
+            <a:extLst>
+              <a:ext uri="{28A0092B-C50C-407E-A947-70E740481C1C}">
+                <a14:useLocalDpi xmlns:a14="http://schemas.microsoft.com/office/drawing/2010/main" val="0"/>
+              </a:ext>
+            </a:extLst>
+          </a:blip>
+          <a:stretch>
+            <a:fillRect/>
+          </a:stretch>
+        </p:blipFill>
+        <p:spPr>
+          <a:xfrm>
+            <a:off x="529065" y="1533016"/>
+            <a:ext cx="9535964" cy="5078095"/>
+          </a:xfrm>
+          <a:prstGeom prst="rect">
+            <a:avLst/>
+          </a:prstGeom>
+        </p:spPr>
+      </p:pic>
+      <p:sp>
+        <p:nvSpPr>
+          <p:cNvPr id="6" name="CuadroTexto 5">
+            <a:extLst>
+              <a:ext uri="{FF2B5EF4-FFF2-40B4-BE49-F238E27FC236}">
+                <a16:creationId xmlns:a16="http://schemas.microsoft.com/office/drawing/2014/main" id="{DAEB5D03-6182-D0DA-E2CD-6B69A34245A6}"/>
+              </a:ext>
+            </a:extLst>
+          </p:cNvPr>
+          <p:cNvSpPr txBox="1"/>
+          <p:nvPr/>
+        </p:nvSpPr>
+        <p:spPr>
+          <a:xfrm>
+            <a:off x="10213848" y="777240"/>
+            <a:ext cx="1609344" cy="5632311"/>
+          </a:xfrm>
+          <a:prstGeom prst="rect">
+            <a:avLst/>
+          </a:prstGeom>
+          <a:noFill/>
+        </p:spPr>
+        <p:txBody>
+          <a:bodyPr wrap="square" rtlCol="0">
+            <a:spAutoFit/>
+          </a:bodyPr>
+          <a:lstStyle/>
+          <a:p>
+            <a:r>
+              <a:rPr lang="es-ES" dirty="0"/>
+              <a:t>Similar </a:t>
+            </a:r>
+            <a:r>
+              <a:rPr lang="es-ES" dirty="0" err="1"/>
+              <a:t>patterns</a:t>
+            </a:r>
+            <a:r>
+              <a:rPr lang="es-ES" dirty="0"/>
+              <a:t> as </a:t>
+            </a:r>
+            <a:r>
+              <a:rPr lang="es-ES" dirty="0" err="1"/>
+              <a:t>with</a:t>
+            </a:r>
+            <a:r>
+              <a:rPr lang="es-ES" dirty="0"/>
+              <a:t> </a:t>
+            </a:r>
+            <a:r>
+              <a:rPr lang="es-ES" dirty="0" err="1"/>
+              <a:t>unbalanced</a:t>
+            </a:r>
+            <a:r>
+              <a:rPr lang="es-ES" dirty="0"/>
+              <a:t> data, </a:t>
+            </a:r>
+            <a:r>
+              <a:rPr lang="es-ES" dirty="0" err="1"/>
+              <a:t>but</a:t>
+            </a:r>
+            <a:r>
+              <a:rPr lang="es-ES" dirty="0"/>
+              <a:t> </a:t>
+            </a:r>
+            <a:r>
+              <a:rPr lang="es-ES" dirty="0" err="1"/>
+              <a:t>subtler</a:t>
+            </a:r>
+            <a:r>
+              <a:rPr lang="es-ES" dirty="0"/>
+              <a:t>.</a:t>
+            </a:r>
+          </a:p>
+          <a:p>
+            <a:endParaRPr lang="es-ES" dirty="0"/>
+          </a:p>
+          <a:p>
+            <a:r>
+              <a:rPr lang="es-ES" dirty="0" err="1"/>
+              <a:t>Interesting</a:t>
+            </a:r>
+            <a:r>
+              <a:rPr lang="es-ES" dirty="0"/>
+              <a:t> </a:t>
+            </a:r>
+            <a:r>
+              <a:rPr lang="es-ES" dirty="0" err="1"/>
+              <a:t>how</a:t>
+            </a:r>
+            <a:r>
+              <a:rPr lang="es-ES" dirty="0"/>
+              <a:t>, in </a:t>
+            </a:r>
+            <a:r>
+              <a:rPr lang="es-ES" dirty="0" err="1"/>
+              <a:t>left</a:t>
+            </a:r>
+            <a:r>
+              <a:rPr lang="es-ES" dirty="0"/>
+              <a:t> </a:t>
+            </a:r>
+            <a:r>
+              <a:rPr lang="es-ES" dirty="0" err="1"/>
+              <a:t>handers</a:t>
+            </a:r>
+            <a:r>
+              <a:rPr lang="es-ES" dirty="0"/>
+              <a:t> </a:t>
+            </a:r>
+            <a:r>
+              <a:rPr lang="es-ES" dirty="0" err="1"/>
+              <a:t>when</a:t>
+            </a:r>
+            <a:r>
+              <a:rPr lang="es-ES" dirty="0"/>
+              <a:t> </a:t>
+            </a:r>
+            <a:r>
+              <a:rPr lang="es-ES" dirty="0" err="1"/>
+              <a:t>thr</a:t>
+            </a:r>
+            <a:r>
+              <a:rPr lang="es-ES" dirty="0"/>
+              <a:t> = 0, % </a:t>
+            </a:r>
+            <a:r>
+              <a:rPr lang="es-ES" dirty="0" err="1"/>
+              <a:t>of</a:t>
+            </a:r>
+            <a:r>
+              <a:rPr lang="es-ES" dirty="0"/>
+              <a:t> </a:t>
+            </a:r>
+            <a:r>
+              <a:rPr lang="es-ES" dirty="0" err="1"/>
+              <a:t>females</a:t>
+            </a:r>
+            <a:r>
+              <a:rPr lang="es-ES" dirty="0"/>
+              <a:t> </a:t>
+            </a:r>
+            <a:r>
+              <a:rPr lang="es-ES" dirty="0" err="1"/>
+              <a:t>is</a:t>
+            </a:r>
+            <a:r>
+              <a:rPr lang="es-ES" dirty="0"/>
+              <a:t> 5.49% and males </a:t>
+            </a:r>
+            <a:r>
+              <a:rPr lang="es-ES" dirty="0" err="1"/>
+              <a:t>is</a:t>
+            </a:r>
+            <a:r>
+              <a:rPr lang="es-ES" dirty="0"/>
+              <a:t> 8.63%. </a:t>
+            </a:r>
+            <a:r>
+              <a:rPr lang="es-ES" dirty="0" err="1"/>
+              <a:t>When</a:t>
+            </a:r>
+            <a:r>
+              <a:rPr lang="es-ES" dirty="0"/>
+              <a:t> BD are removed, males </a:t>
+            </a:r>
+            <a:r>
+              <a:rPr lang="es-ES" dirty="0" err="1"/>
+              <a:t>reach</a:t>
+            </a:r>
+            <a:r>
+              <a:rPr lang="es-ES" dirty="0"/>
+              <a:t> 9.36% </a:t>
+            </a:r>
+            <a:r>
+              <a:rPr lang="es-ES" dirty="0" err="1"/>
+              <a:t>of</a:t>
+            </a:r>
+            <a:r>
+              <a:rPr lang="es-ES" dirty="0"/>
+              <a:t> </a:t>
+            </a:r>
+            <a:r>
+              <a:rPr lang="es-ES" dirty="0" err="1"/>
+              <a:t>left</a:t>
+            </a:r>
+            <a:r>
+              <a:rPr lang="es-ES" dirty="0"/>
+              <a:t> </a:t>
+            </a:r>
+            <a:r>
+              <a:rPr lang="es-ES" dirty="0" err="1"/>
+              <a:t>handedness</a:t>
+            </a:r>
+            <a:endParaRPr lang="es-ES" dirty="0"/>
+          </a:p>
+        </p:txBody>
+      </p:sp>
+      <p:sp>
+        <p:nvSpPr>
+          <p:cNvPr id="3" name="Rectángulo 2">
+            <a:extLst>
+              <a:ext uri="{FF2B5EF4-FFF2-40B4-BE49-F238E27FC236}">
+                <a16:creationId xmlns:a16="http://schemas.microsoft.com/office/drawing/2014/main" id="{27F9F8E7-5111-A43D-0D14-14C6D3DEECA1}"/>
+              </a:ext>
+            </a:extLst>
+          </p:cNvPr>
+          <p:cNvSpPr/>
+          <p:nvPr/>
+        </p:nvSpPr>
+        <p:spPr>
+          <a:xfrm>
+            <a:off x="9122229" y="0"/>
+            <a:ext cx="2852057" cy="819150"/>
+          </a:xfrm>
+          <a:prstGeom prst="rect">
+            <a:avLst/>
+          </a:prstGeom>
+          <a:solidFill>
+            <a:srgbClr val="FFC000"/>
+          </a:solidFill>
+          <a:ln>
+            <a:noFill/>
+          </a:ln>
+        </p:spPr>
+        <p:style>
+          <a:lnRef idx="2">
+            <a:schemeClr val="accent1">
+              <a:shade val="15000"/>
+            </a:schemeClr>
+          </a:lnRef>
+          <a:fillRef idx="1">
+            <a:schemeClr val="accent1"/>
+          </a:fillRef>
+          <a:effectRef idx="0">
+            <a:schemeClr val="accent1"/>
+          </a:effectRef>
+          <a:fontRef idx="minor">
+            <a:schemeClr val="lt1"/>
+          </a:fontRef>
+        </p:style>
+        <p:txBody>
+          <a:bodyPr rtlCol="0" anchor="ctr"/>
+          <a:lstStyle/>
+          <a:p>
+            <a:pPr algn="ctr"/>
+            <a:r>
+              <a:rPr lang="es-ES" dirty="0">
+                <a:solidFill>
+                  <a:schemeClr val="tx1"/>
+                </a:solidFill>
+              </a:rPr>
+              <a:t>AGE MATCH</a:t>
+            </a:r>
+          </a:p>
+        </p:txBody>
+      </p:sp>
+    </p:spTree>
+    <p:extLst>
+      <p:ext uri="{BB962C8B-B14F-4D97-AF65-F5344CB8AC3E}">
+        <p14:creationId xmlns:p14="http://schemas.microsoft.com/office/powerpoint/2010/main" val="491650171"/>
       </p:ext>
     </p:extLst>
   </p:cSld>
@@ -9083,37 +9476,193 @@
             <p:ph type="title"/>
           </p:nvPr>
         </p:nvSpPr>
-        <p:spPr/>
+        <p:spPr>
+          <a:xfrm>
+            <a:off x="319108" y="63026"/>
+            <a:ext cx="10515600" cy="1325563"/>
+          </a:xfrm>
+        </p:spPr>
         <p:txBody>
           <a:bodyPr/>
           <a:lstStyle/>
           <a:p>
-            <a:endParaRPr lang="es-ES"/>
-          </a:p>
-        </p:txBody>
-      </p:sp>
-      <p:sp>
-        <p:nvSpPr>
-          <p:cNvPr id="3" name="Marcador de contenido 2">
-            <a:extLst>
-              <a:ext uri="{FF2B5EF4-FFF2-40B4-BE49-F238E27FC236}">
-                <a16:creationId xmlns:a16="http://schemas.microsoft.com/office/drawing/2014/main" id="{40BAF840-9665-4322-EE98-88A09BC6E4D2}"/>
-              </a:ext>
-            </a:extLst>
-          </p:cNvPr>
-          <p:cNvSpPr>
-            <a:spLocks noGrp="1"/>
-          </p:cNvSpPr>
-          <p:nvPr>
-            <p:ph idx="1"/>
-          </p:nvPr>
-        </p:nvSpPr>
-        <p:spPr/>
-        <p:txBody>
-          <a:bodyPr/>
+            <a:r>
+              <a:rPr lang="es-ES" dirty="0"/>
+              <a:t>Overall</a:t>
+            </a:r>
+          </a:p>
+        </p:txBody>
+      </p:sp>
+      <p:pic>
+        <p:nvPicPr>
+          <p:cNvPr id="5" name="Imagen 4">
+            <a:extLst>
+              <a:ext uri="{FF2B5EF4-FFF2-40B4-BE49-F238E27FC236}">
+                <a16:creationId xmlns:a16="http://schemas.microsoft.com/office/drawing/2014/main" id="{D23296C2-2E8C-E210-7763-ACDD7A5739F6}"/>
+              </a:ext>
+            </a:extLst>
+          </p:cNvPr>
+          <p:cNvPicPr>
+            <a:picLocks noChangeAspect="1"/>
+          </p:cNvPicPr>
+          <p:nvPr/>
+        </p:nvPicPr>
+        <p:blipFill>
+          <a:blip r:embed="rId2"/>
+          <a:stretch>
+            <a:fillRect/>
+          </a:stretch>
+        </p:blipFill>
+        <p:spPr>
+          <a:xfrm>
+            <a:off x="1357291" y="1388589"/>
+            <a:ext cx="9477417" cy="5104286"/>
+          </a:xfrm>
+          <a:prstGeom prst="rect">
+            <a:avLst/>
+          </a:prstGeom>
+        </p:spPr>
+      </p:pic>
+      <p:sp>
+        <p:nvSpPr>
+          <p:cNvPr id="6" name="CuadroTexto 5">
+            <a:extLst>
+              <a:ext uri="{FF2B5EF4-FFF2-40B4-BE49-F238E27FC236}">
+                <a16:creationId xmlns:a16="http://schemas.microsoft.com/office/drawing/2014/main" id="{194D7856-4EE7-91ED-76A1-45F217934722}"/>
+              </a:ext>
+            </a:extLst>
+          </p:cNvPr>
+          <p:cNvSpPr txBox="1"/>
+          <p:nvPr/>
+        </p:nvSpPr>
+        <p:spPr>
+          <a:xfrm>
+            <a:off x="3167743" y="657667"/>
+            <a:ext cx="8273143" cy="646331"/>
+          </a:xfrm>
+          <a:prstGeom prst="rect">
+            <a:avLst/>
+          </a:prstGeom>
+          <a:noFill/>
+        </p:spPr>
+        <p:txBody>
+          <a:bodyPr wrap="square" rtlCol="0">
+            <a:spAutoFit/>
+          </a:bodyPr>
           <a:lstStyle/>
           <a:p>
-            <a:endParaRPr lang="es-ES"/>
+            <a:r>
+              <a:rPr lang="es-ES" dirty="0" err="1"/>
+              <a:t>Different</a:t>
+            </a:r>
+            <a:r>
+              <a:rPr lang="es-ES" dirty="0"/>
+              <a:t> </a:t>
+            </a:r>
+            <a:r>
+              <a:rPr lang="es-ES" dirty="0" err="1"/>
+              <a:t>distribution</a:t>
+            </a:r>
+            <a:r>
+              <a:rPr lang="es-ES" dirty="0"/>
+              <a:t> </a:t>
+            </a:r>
+            <a:r>
+              <a:rPr lang="es-ES" dirty="0" err="1"/>
+              <a:t>of</a:t>
+            </a:r>
+            <a:r>
+              <a:rPr lang="es-ES" dirty="0"/>
+              <a:t> LQ, </a:t>
+            </a:r>
+            <a:r>
+              <a:rPr lang="es-ES" dirty="0" err="1"/>
+              <a:t>prefered</a:t>
+            </a:r>
+            <a:r>
+              <a:rPr lang="es-ES" dirty="0"/>
+              <a:t> </a:t>
+            </a:r>
+            <a:r>
+              <a:rPr lang="es-ES" dirty="0" err="1"/>
+              <a:t>eye</a:t>
+            </a:r>
+            <a:r>
+              <a:rPr lang="es-ES" dirty="0"/>
+              <a:t>, </a:t>
+            </a:r>
+            <a:r>
+              <a:rPr lang="es-ES" dirty="0" err="1"/>
+              <a:t>prefered</a:t>
+            </a:r>
+            <a:r>
+              <a:rPr lang="es-ES" dirty="0"/>
+              <a:t> </a:t>
+            </a:r>
+            <a:r>
+              <a:rPr lang="es-ES" dirty="0" err="1"/>
+              <a:t>foot</a:t>
+            </a:r>
+            <a:r>
+              <a:rPr lang="es-ES" dirty="0"/>
+              <a:t>, </a:t>
+            </a:r>
+            <a:r>
+              <a:rPr lang="es-ES" dirty="0" err="1"/>
+              <a:t>but</a:t>
+            </a:r>
+            <a:r>
+              <a:rPr lang="es-ES" dirty="0"/>
+              <a:t> </a:t>
+            </a:r>
+            <a:r>
+              <a:rPr lang="es-ES" dirty="0" err="1"/>
+              <a:t>age</a:t>
+            </a:r>
+            <a:r>
+              <a:rPr lang="es-ES" dirty="0"/>
+              <a:t> </a:t>
+            </a:r>
+            <a:r>
+              <a:rPr lang="es-ES" dirty="0" err="1"/>
+              <a:t>still</a:t>
+            </a:r>
+            <a:r>
+              <a:rPr lang="es-ES" dirty="0"/>
+              <a:t> </a:t>
+            </a:r>
+            <a:r>
+              <a:rPr lang="es-ES" dirty="0" err="1"/>
+              <a:t>very</a:t>
+            </a:r>
+            <a:r>
+              <a:rPr lang="es-ES" dirty="0"/>
+              <a:t> </a:t>
+            </a:r>
+            <a:r>
+              <a:rPr lang="es-ES" dirty="0" err="1"/>
+              <a:t>different</a:t>
+            </a:r>
+            <a:r>
+              <a:rPr lang="es-ES" dirty="0"/>
+              <a:t> </a:t>
+            </a:r>
+            <a:r>
+              <a:rPr lang="es-ES" dirty="0" err="1"/>
+              <a:t>even</a:t>
+            </a:r>
+            <a:r>
+              <a:rPr lang="es-ES" dirty="0"/>
+              <a:t> after </a:t>
+            </a:r>
+            <a:r>
+              <a:rPr lang="es-ES" dirty="0" err="1"/>
+              <a:t>matching</a:t>
+            </a:r>
+            <a:r>
+              <a:rPr lang="es-ES" dirty="0"/>
+              <a:t>.</a:t>
+            </a:r>
           </a:p>
         </p:txBody>
       </p:sp>
@@ -9169,21 +9718,136 @@
             <p:ph type="title"/>
           </p:nvPr>
         </p:nvSpPr>
-        <p:spPr/>
+        <p:spPr>
+          <a:xfrm>
+            <a:off x="9640587" y="229849"/>
+            <a:ext cx="2464328" cy="1325563"/>
+          </a:xfrm>
+        </p:spPr>
         <p:txBody>
           <a:bodyPr/>
           <a:lstStyle/>
           <a:p>
-            <a:endParaRPr lang="es-ES"/>
-          </a:p>
-        </p:txBody>
-      </p:sp>
-      <p:sp>
-        <p:nvSpPr>
-          <p:cNvPr id="3" name="Marcador de contenido 2">
-            <a:extLst>
-              <a:ext uri="{FF2B5EF4-FFF2-40B4-BE49-F238E27FC236}">
-                <a16:creationId xmlns:a16="http://schemas.microsoft.com/office/drawing/2014/main" id="{97F21859-D994-A015-79F7-1102E9BE9E81}"/>
+            <a:r>
+              <a:rPr lang="es-ES" dirty="0" err="1"/>
+              <a:t>By</a:t>
+            </a:r>
+            <a:r>
+              <a:rPr lang="es-ES" dirty="0"/>
+              <a:t> </a:t>
+            </a:r>
+            <a:r>
+              <a:rPr lang="es-ES" dirty="0" err="1"/>
+              <a:t>subtype</a:t>
+            </a:r>
+            <a:endParaRPr lang="es-ES" dirty="0"/>
+          </a:p>
+        </p:txBody>
+      </p:sp>
+      <p:pic>
+        <p:nvPicPr>
+          <p:cNvPr id="5" name="Imagen 4">
+            <a:extLst>
+              <a:ext uri="{FF2B5EF4-FFF2-40B4-BE49-F238E27FC236}">
+                <a16:creationId xmlns:a16="http://schemas.microsoft.com/office/drawing/2014/main" id="{249E97BE-A196-1744-95AC-763717D984AB}"/>
+              </a:ext>
+            </a:extLst>
+          </p:cNvPr>
+          <p:cNvPicPr>
+            <a:picLocks noChangeAspect="1"/>
+          </p:cNvPicPr>
+          <p:nvPr/>
+        </p:nvPicPr>
+        <p:blipFill>
+          <a:blip r:embed="rId2"/>
+          <a:srcRect b="25396"/>
+          <a:stretch>
+            <a:fillRect/>
+          </a:stretch>
+        </p:blipFill>
+        <p:spPr>
+          <a:xfrm>
+            <a:off x="134785" y="1555412"/>
+            <a:ext cx="10329265" cy="5041499"/>
+          </a:xfrm>
+          <a:prstGeom prst="rect">
+            <a:avLst/>
+          </a:prstGeom>
+        </p:spPr>
+      </p:pic>
+      <p:pic>
+        <p:nvPicPr>
+          <p:cNvPr id="6" name="Imagen 5">
+            <a:extLst>
+              <a:ext uri="{FF2B5EF4-FFF2-40B4-BE49-F238E27FC236}">
+                <a16:creationId xmlns:a16="http://schemas.microsoft.com/office/drawing/2014/main" id="{C41BEED6-42E4-E192-86DC-5B84CA254397}"/>
+              </a:ext>
+            </a:extLst>
+          </p:cNvPr>
+          <p:cNvPicPr>
+            <a:picLocks noChangeAspect="1"/>
+          </p:cNvPicPr>
+          <p:nvPr/>
+        </p:nvPicPr>
+        <p:blipFill>
+          <a:blip r:embed="rId2"/>
+          <a:srcRect t="73837" r="83616"/>
+          <a:stretch>
+            <a:fillRect/>
+          </a:stretch>
+        </p:blipFill>
+        <p:spPr>
+          <a:xfrm>
+            <a:off x="10573547" y="4550227"/>
+            <a:ext cx="1421871" cy="1485447"/>
+          </a:xfrm>
+          <a:prstGeom prst="rect">
+            <a:avLst/>
+          </a:prstGeom>
+        </p:spPr>
+      </p:pic>
+    </p:spTree>
+    <p:extLst>
+      <p:ext uri="{BB962C8B-B14F-4D97-AF65-F5344CB8AC3E}">
+        <p14:creationId xmlns:p14="http://schemas.microsoft.com/office/powerpoint/2010/main" val="1829978397"/>
+      </p:ext>
+    </p:extLst>
+  </p:cSld>
+  <p:clrMapOvr>
+    <a:masterClrMapping/>
+  </p:clrMapOvr>
+</p:sld>
+</file>
+
+<file path=ppt/slides/slide28.xml><?xml version="1.0" encoding="utf-8"?>
+<p:sld xmlns:a="http://schemas.openxmlformats.org/drawingml/2006/main" xmlns:r="http://schemas.openxmlformats.org/officeDocument/2006/relationships" xmlns:p="http://schemas.openxmlformats.org/presentationml/2006/main">
+  <p:cSld>
+    <p:spTree>
+      <p:nvGrpSpPr>
+        <p:cNvPr id="1" name="">
+          <a:extLst>
+            <a:ext uri="{FF2B5EF4-FFF2-40B4-BE49-F238E27FC236}">
+              <a16:creationId xmlns:a16="http://schemas.microsoft.com/office/drawing/2014/main" id="{FCCAF36D-9144-9A0E-3828-B912184A9D65}"/>
+            </a:ext>
+          </a:extLst>
+        </p:cNvPr>
+        <p:cNvGrpSpPr/>
+        <p:nvPr/>
+      </p:nvGrpSpPr>
+      <p:grpSpPr>
+        <a:xfrm>
+          <a:off x="0" y="0"/>
+          <a:ext cx="0" cy="0"/>
+          <a:chOff x="0" y="0"/>
+          <a:chExt cx="0" cy="0"/>
+        </a:xfrm>
+      </p:grpSpPr>
+      <p:sp>
+        <p:nvSpPr>
+          <p:cNvPr id="2" name="Título 1">
+            <a:extLst>
+              <a:ext uri="{FF2B5EF4-FFF2-40B4-BE49-F238E27FC236}">
+                <a16:creationId xmlns:a16="http://schemas.microsoft.com/office/drawing/2014/main" id="{2CF0673B-E917-6FC7-0F2E-37F7107DFD5C}"/>
               </a:ext>
             </a:extLst>
           </p:cNvPr>
@@ -9191,22 +9855,228 @@
             <a:spLocks noGrp="1"/>
           </p:cNvSpPr>
           <p:nvPr>
-            <p:ph idx="1"/>
+            <p:ph type="title"/>
           </p:nvPr>
         </p:nvSpPr>
-        <p:spPr/>
+        <p:spPr>
+          <a:xfrm>
+            <a:off x="9640587" y="229849"/>
+            <a:ext cx="2464328" cy="1325563"/>
+          </a:xfrm>
+        </p:spPr>
         <p:txBody>
           <a:bodyPr/>
           <a:lstStyle/>
           <a:p>
-            <a:endParaRPr lang="es-ES"/>
-          </a:p>
-        </p:txBody>
-      </p:sp>
+            <a:r>
+              <a:rPr lang="es-ES" dirty="0" err="1"/>
+              <a:t>By</a:t>
+            </a:r>
+            <a:r>
+              <a:rPr lang="es-ES" dirty="0"/>
+              <a:t> </a:t>
+            </a:r>
+            <a:r>
+              <a:rPr lang="es-ES" dirty="0" err="1"/>
+              <a:t>subtype</a:t>
+            </a:r>
+            <a:endParaRPr lang="es-ES" dirty="0"/>
+          </a:p>
+        </p:txBody>
+      </p:sp>
+      <p:pic>
+        <p:nvPicPr>
+          <p:cNvPr id="5" name="Imagen 4">
+            <a:extLst>
+              <a:ext uri="{FF2B5EF4-FFF2-40B4-BE49-F238E27FC236}">
+                <a16:creationId xmlns:a16="http://schemas.microsoft.com/office/drawing/2014/main" id="{D71850C5-4302-ABC8-1B29-F44D1D4647EE}"/>
+              </a:ext>
+            </a:extLst>
+          </p:cNvPr>
+          <p:cNvPicPr>
+            <a:picLocks noChangeAspect="1"/>
+          </p:cNvPicPr>
+          <p:nvPr/>
+        </p:nvPicPr>
+        <p:blipFill>
+          <a:blip r:embed="rId2"/>
+          <a:srcRect b="25396"/>
+          <a:stretch>
+            <a:fillRect/>
+          </a:stretch>
+        </p:blipFill>
+        <p:spPr>
+          <a:xfrm>
+            <a:off x="134785" y="1555412"/>
+            <a:ext cx="10329265" cy="5041499"/>
+          </a:xfrm>
+          <a:prstGeom prst="rect">
+            <a:avLst/>
+          </a:prstGeom>
+        </p:spPr>
+      </p:pic>
+      <p:pic>
+        <p:nvPicPr>
+          <p:cNvPr id="8" name="Imagen 7">
+            <a:extLst>
+              <a:ext uri="{FF2B5EF4-FFF2-40B4-BE49-F238E27FC236}">
+                <a16:creationId xmlns:a16="http://schemas.microsoft.com/office/drawing/2014/main" id="{5B71E6B5-AC1A-B0DC-B6CB-801BF31A67C3}"/>
+              </a:ext>
+            </a:extLst>
+          </p:cNvPr>
+          <p:cNvPicPr>
+            <a:picLocks noChangeAspect="1"/>
+          </p:cNvPicPr>
+          <p:nvPr/>
+        </p:nvPicPr>
+        <p:blipFill>
+          <a:blip r:embed="rId3"/>
+          <a:stretch>
+            <a:fillRect/>
+          </a:stretch>
+        </p:blipFill>
+        <p:spPr>
+          <a:xfrm>
+            <a:off x="1507719" y="1029790"/>
+            <a:ext cx="4001058" cy="5210902"/>
+          </a:xfrm>
+          <a:prstGeom prst="rect">
+            <a:avLst/>
+          </a:prstGeom>
+          <a:ln w="76200">
+            <a:solidFill>
+              <a:schemeClr val="tx1"/>
+            </a:solidFill>
+          </a:ln>
+        </p:spPr>
+      </p:pic>
     </p:spTree>
     <p:extLst>
       <p:ext uri="{BB962C8B-B14F-4D97-AF65-F5344CB8AC3E}">
-        <p14:creationId xmlns:p14="http://schemas.microsoft.com/office/powerpoint/2010/main" val="1829978397"/>
+        <p14:creationId xmlns:p14="http://schemas.microsoft.com/office/powerpoint/2010/main" val="548567613"/>
+      </p:ext>
+    </p:extLst>
+  </p:cSld>
+  <p:clrMapOvr>
+    <a:masterClrMapping/>
+  </p:clrMapOvr>
+</p:sld>
+</file>
+
+<file path=ppt/slides/slide29.xml><?xml version="1.0" encoding="utf-8"?>
+<p:sld xmlns:a="http://schemas.openxmlformats.org/drawingml/2006/main" xmlns:r="http://schemas.openxmlformats.org/officeDocument/2006/relationships" xmlns:p="http://schemas.openxmlformats.org/presentationml/2006/main">
+  <p:cSld>
+    <p:spTree>
+      <p:nvGrpSpPr>
+        <p:cNvPr id="1" name=""/>
+        <p:cNvGrpSpPr/>
+        <p:nvPr/>
+      </p:nvGrpSpPr>
+      <p:grpSpPr>
+        <a:xfrm>
+          <a:off x="0" y="0"/>
+          <a:ext cx="0" cy="0"/>
+          <a:chOff x="0" y="0"/>
+          <a:chExt cx="0" cy="0"/>
+        </a:xfrm>
+      </p:grpSpPr>
+      <p:sp>
+        <p:nvSpPr>
+          <p:cNvPr id="2" name="Título 1">
+            <a:extLst>
+              <a:ext uri="{FF2B5EF4-FFF2-40B4-BE49-F238E27FC236}">
+                <a16:creationId xmlns:a16="http://schemas.microsoft.com/office/drawing/2014/main" id="{D88D7967-8281-327C-4976-7F80F57700A3}"/>
+              </a:ext>
+            </a:extLst>
+          </p:cNvPr>
+          <p:cNvSpPr>
+            <a:spLocks noGrp="1"/>
+          </p:cNvSpPr>
+          <p:nvPr>
+            <p:ph type="title"/>
+          </p:nvPr>
+        </p:nvSpPr>
+        <p:spPr/>
+        <p:txBody>
+          <a:bodyPr/>
+          <a:lstStyle/>
+          <a:p>
+            <a:r>
+              <a:rPr lang="es-ES" dirty="0"/>
+              <a:t>Age </a:t>
+            </a:r>
+            <a:r>
+              <a:rPr lang="es-ES" dirty="0" err="1"/>
+              <a:t>distribution</a:t>
+            </a:r>
+            <a:r>
+              <a:rPr lang="es-ES" dirty="0"/>
+              <a:t> </a:t>
+            </a:r>
+            <a:r>
+              <a:rPr lang="es-ES" dirty="0" err="1"/>
+              <a:t>differs</a:t>
+            </a:r>
+            <a:r>
+              <a:rPr lang="es-ES" dirty="0"/>
+              <a:t> </a:t>
+            </a:r>
+            <a:r>
+              <a:rPr lang="es-ES" dirty="0" err="1"/>
+              <a:t>by</a:t>
+            </a:r>
+            <a:r>
+              <a:rPr lang="es-ES" dirty="0"/>
+              <a:t> </a:t>
+            </a:r>
+            <a:r>
+              <a:rPr lang="es-ES" dirty="0" err="1"/>
+              <a:t>subtype</a:t>
+            </a:r>
+            <a:endParaRPr lang="es-ES" dirty="0"/>
+          </a:p>
+        </p:txBody>
+      </p:sp>
+      <p:pic>
+        <p:nvPicPr>
+          <p:cNvPr id="5" name="Imagen 4">
+            <a:extLst>
+              <a:ext uri="{FF2B5EF4-FFF2-40B4-BE49-F238E27FC236}">
+                <a16:creationId xmlns:a16="http://schemas.microsoft.com/office/drawing/2014/main" id="{3876ACC4-1D58-0935-A6F5-1B7AF07095B7}"/>
+              </a:ext>
+            </a:extLst>
+          </p:cNvPr>
+          <p:cNvPicPr>
+            <a:picLocks noChangeAspect="1"/>
+          </p:cNvPicPr>
+          <p:nvPr/>
+        </p:nvPicPr>
+        <p:blipFill>
+          <a:blip r:embed="rId2">
+            <a:extLst>
+              <a:ext uri="{28A0092B-C50C-407E-A947-70E740481C1C}">
+                <a14:useLocalDpi xmlns:a14="http://schemas.microsoft.com/office/drawing/2010/main" val="0"/>
+              </a:ext>
+            </a:extLst>
+          </a:blip>
+          <a:stretch>
+            <a:fillRect/>
+          </a:stretch>
+        </p:blipFill>
+        <p:spPr>
+          <a:xfrm>
+            <a:off x="2011655" y="1804409"/>
+            <a:ext cx="7667947" cy="4860266"/>
+          </a:xfrm>
+          <a:prstGeom prst="rect">
+            <a:avLst/>
+          </a:prstGeom>
+        </p:spPr>
+      </p:pic>
+    </p:spTree>
+    <p:extLst>
+      <p:ext uri="{BB962C8B-B14F-4D97-AF65-F5344CB8AC3E}">
+        <p14:creationId xmlns:p14="http://schemas.microsoft.com/office/powerpoint/2010/main" val="292398614"/>
       </p:ext>
     </p:extLst>
   </p:cSld>
@@ -9637,6 +10507,309 @@
     <p:extLst>
       <p:ext uri="{BB962C8B-B14F-4D97-AF65-F5344CB8AC3E}">
         <p14:creationId xmlns:p14="http://schemas.microsoft.com/office/powerpoint/2010/main" val="3159142284"/>
+      </p:ext>
+    </p:extLst>
+  </p:cSld>
+  <p:clrMapOvr>
+    <a:masterClrMapping/>
+  </p:clrMapOvr>
+</p:sld>
+</file>
+
+<file path=ppt/slides/slide30.xml><?xml version="1.0" encoding="utf-8"?>
+<p:sld xmlns:a="http://schemas.openxmlformats.org/drawingml/2006/main" xmlns:r="http://schemas.openxmlformats.org/officeDocument/2006/relationships" xmlns:p="http://schemas.openxmlformats.org/presentationml/2006/main">
+  <p:cSld>
+    <p:spTree>
+      <p:nvGrpSpPr>
+        <p:cNvPr id="1" name=""/>
+        <p:cNvGrpSpPr/>
+        <p:nvPr/>
+      </p:nvGrpSpPr>
+      <p:grpSpPr>
+        <a:xfrm>
+          <a:off x="0" y="0"/>
+          <a:ext cx="0" cy="0"/>
+          <a:chOff x="0" y="0"/>
+          <a:chExt cx="0" cy="0"/>
+        </a:xfrm>
+      </p:grpSpPr>
+      <p:sp>
+        <p:nvSpPr>
+          <p:cNvPr id="2" name="Título 1">
+            <a:extLst>
+              <a:ext uri="{FF2B5EF4-FFF2-40B4-BE49-F238E27FC236}">
+                <a16:creationId xmlns:a16="http://schemas.microsoft.com/office/drawing/2014/main" id="{FDAFA371-8265-A91F-7453-5F5F9EB84565}"/>
+              </a:ext>
+            </a:extLst>
+          </p:cNvPr>
+          <p:cNvSpPr>
+            <a:spLocks noGrp="1"/>
+          </p:cNvSpPr>
+          <p:nvPr>
+            <p:ph type="title"/>
+          </p:nvPr>
+        </p:nvSpPr>
+        <p:spPr/>
+        <p:txBody>
+          <a:bodyPr/>
+          <a:lstStyle/>
+          <a:p>
+            <a:r>
+              <a:rPr lang="es-ES" dirty="0" err="1"/>
+              <a:t>Residualizing</a:t>
+            </a:r>
+            <a:r>
+              <a:rPr lang="es-ES" dirty="0"/>
+              <a:t> LQ</a:t>
+            </a:r>
+          </a:p>
+        </p:txBody>
+      </p:sp>
+      <p:pic>
+        <p:nvPicPr>
+          <p:cNvPr id="5" name="Marcador de contenido 4">
+            <a:extLst>
+              <a:ext uri="{FF2B5EF4-FFF2-40B4-BE49-F238E27FC236}">
+                <a16:creationId xmlns:a16="http://schemas.microsoft.com/office/drawing/2014/main" id="{D72053D1-6778-C964-222A-3EDCA2EB74F3}"/>
+              </a:ext>
+            </a:extLst>
+          </p:cNvPr>
+          <p:cNvPicPr>
+            <a:picLocks noGrp="1" noChangeAspect="1"/>
+          </p:cNvPicPr>
+          <p:nvPr>
+            <p:ph idx="1"/>
+          </p:nvPr>
+        </p:nvPicPr>
+        <p:blipFill>
+          <a:blip r:embed="rId2">
+            <a:extLst>
+              <a:ext uri="{28A0092B-C50C-407E-A947-70E740481C1C}">
+                <a14:useLocalDpi xmlns:a14="http://schemas.microsoft.com/office/drawing/2010/main" val="0"/>
+              </a:ext>
+            </a:extLst>
+          </a:blip>
+          <a:stretch>
+            <a:fillRect/>
+          </a:stretch>
+        </p:blipFill>
+        <p:spPr>
+          <a:xfrm>
+            <a:off x="0" y="2202574"/>
+            <a:ext cx="10516245" cy="4111139"/>
+          </a:xfrm>
+          <a:prstGeom prst="rect">
+            <a:avLst/>
+          </a:prstGeom>
+        </p:spPr>
+      </p:pic>
+      <p:sp>
+        <p:nvSpPr>
+          <p:cNvPr id="6" name="CuadroTexto 5">
+            <a:extLst>
+              <a:ext uri="{FF2B5EF4-FFF2-40B4-BE49-F238E27FC236}">
+                <a16:creationId xmlns:a16="http://schemas.microsoft.com/office/drawing/2014/main" id="{BACEDCE3-7B31-C4A7-17FF-A7E225D142A0}"/>
+              </a:ext>
+            </a:extLst>
+          </p:cNvPr>
+          <p:cNvSpPr txBox="1"/>
+          <p:nvPr/>
+        </p:nvSpPr>
+        <p:spPr>
+          <a:xfrm>
+            <a:off x="5856514" y="805543"/>
+            <a:ext cx="6193972" cy="1200329"/>
+          </a:xfrm>
+          <a:prstGeom prst="rect">
+            <a:avLst/>
+          </a:prstGeom>
+          <a:noFill/>
+        </p:spPr>
+        <p:txBody>
+          <a:bodyPr wrap="square" rtlCol="0">
+            <a:spAutoFit/>
+          </a:bodyPr>
+          <a:lstStyle/>
+          <a:p>
+            <a:r>
+              <a:rPr lang="es-ES" dirty="0"/>
+              <a:t>LQ can be </a:t>
+            </a:r>
+            <a:r>
+              <a:rPr lang="es-ES" dirty="0" err="1"/>
+              <a:t>residualized</a:t>
+            </a:r>
+            <a:r>
+              <a:rPr lang="es-ES" dirty="0"/>
+              <a:t> </a:t>
+            </a:r>
+            <a:r>
+              <a:rPr lang="es-ES" dirty="0" err="1"/>
+              <a:t>to</a:t>
+            </a:r>
+            <a:r>
+              <a:rPr lang="es-ES" dirty="0"/>
+              <a:t> </a:t>
+            </a:r>
+            <a:r>
+              <a:rPr lang="es-ES" dirty="0" err="1"/>
+              <a:t>take</a:t>
+            </a:r>
+            <a:r>
+              <a:rPr lang="es-ES" dirty="0"/>
+              <a:t> </a:t>
+            </a:r>
+            <a:r>
+              <a:rPr lang="es-ES" dirty="0" err="1"/>
+              <a:t>away</a:t>
+            </a:r>
+            <a:r>
+              <a:rPr lang="es-ES" dirty="0"/>
+              <a:t> Age </a:t>
+            </a:r>
+            <a:r>
+              <a:rPr lang="es-ES" dirty="0" err="1"/>
+              <a:t>effect</a:t>
+            </a:r>
+            <a:r>
+              <a:rPr lang="es-ES" dirty="0"/>
+              <a:t>, </a:t>
+            </a:r>
+            <a:r>
+              <a:rPr lang="es-ES" dirty="0" err="1"/>
+              <a:t>though</a:t>
+            </a:r>
+            <a:r>
+              <a:rPr lang="es-ES" dirty="0"/>
+              <a:t> </a:t>
+            </a:r>
+            <a:r>
+              <a:rPr lang="es-ES" dirty="0" err="1"/>
+              <a:t>the</a:t>
+            </a:r>
+            <a:r>
+              <a:rPr lang="es-ES" dirty="0"/>
+              <a:t> </a:t>
+            </a:r>
+            <a:r>
+              <a:rPr lang="es-ES" dirty="0" err="1"/>
+              <a:t>residuals</a:t>
+            </a:r>
+            <a:r>
+              <a:rPr lang="es-ES" dirty="0"/>
+              <a:t> </a:t>
+            </a:r>
+            <a:r>
+              <a:rPr lang="es-ES" dirty="0" err="1"/>
+              <a:t>scale</a:t>
+            </a:r>
+            <a:r>
+              <a:rPr lang="es-ES" dirty="0"/>
+              <a:t> </a:t>
+            </a:r>
+            <a:r>
+              <a:rPr lang="es-ES" dirty="0" err="1"/>
+              <a:t>changes</a:t>
+            </a:r>
+            <a:r>
+              <a:rPr lang="es-ES" dirty="0"/>
+              <a:t>. A new </a:t>
+            </a:r>
+            <a:r>
+              <a:rPr lang="es-ES" dirty="0" err="1"/>
+              <a:t>definition</a:t>
+            </a:r>
+            <a:r>
+              <a:rPr lang="es-ES" dirty="0"/>
+              <a:t> </a:t>
+            </a:r>
+            <a:r>
+              <a:rPr lang="es-ES" dirty="0" err="1"/>
+              <a:t>of</a:t>
+            </a:r>
+            <a:r>
+              <a:rPr lang="es-ES" dirty="0"/>
+              <a:t> </a:t>
+            </a:r>
+            <a:r>
+              <a:rPr lang="es-ES" dirty="0" err="1"/>
+              <a:t>thresholds</a:t>
+            </a:r>
+            <a:r>
+              <a:rPr lang="es-ES" dirty="0"/>
+              <a:t> </a:t>
+            </a:r>
+            <a:r>
+              <a:rPr lang="es-ES" dirty="0" err="1"/>
+              <a:t>should</a:t>
+            </a:r>
+            <a:r>
+              <a:rPr lang="es-ES" dirty="0"/>
+              <a:t> be set in </a:t>
+            </a:r>
+            <a:r>
+              <a:rPr lang="es-ES" dirty="0" err="1"/>
+              <a:t>order</a:t>
+            </a:r>
+            <a:r>
+              <a:rPr lang="es-ES" dirty="0"/>
+              <a:t> </a:t>
+            </a:r>
+            <a:r>
+              <a:rPr lang="es-ES" dirty="0" err="1"/>
+              <a:t>to</a:t>
+            </a:r>
+            <a:r>
+              <a:rPr lang="es-ES" dirty="0"/>
+              <a:t> define </a:t>
+            </a:r>
+            <a:r>
+              <a:rPr lang="es-ES" dirty="0" err="1"/>
+              <a:t>what</a:t>
+            </a:r>
+            <a:r>
+              <a:rPr lang="es-ES" dirty="0"/>
+              <a:t> </a:t>
+            </a:r>
+            <a:r>
+              <a:rPr lang="es-ES" dirty="0" err="1"/>
+              <a:t>is</a:t>
+            </a:r>
+            <a:r>
+              <a:rPr lang="es-ES" dirty="0"/>
+              <a:t> </a:t>
+            </a:r>
+            <a:r>
+              <a:rPr lang="es-ES" dirty="0" err="1"/>
+              <a:t>lef-handed</a:t>
+            </a:r>
+            <a:r>
+              <a:rPr lang="es-ES" dirty="0"/>
+              <a:t> and </a:t>
+            </a:r>
+            <a:r>
+              <a:rPr lang="es-ES" dirty="0" err="1"/>
+              <a:t>mixed-handed</a:t>
+            </a:r>
+            <a:r>
+              <a:rPr lang="es-ES" dirty="0"/>
+              <a:t> in </a:t>
+            </a:r>
+            <a:r>
+              <a:rPr lang="es-ES" dirty="0" err="1"/>
+              <a:t>this</a:t>
+            </a:r>
+            <a:r>
+              <a:rPr lang="es-ES" dirty="0"/>
+              <a:t> case.</a:t>
+            </a:r>
+          </a:p>
+        </p:txBody>
+      </p:sp>
+    </p:spTree>
+    <p:extLst>
+      <p:ext uri="{BB962C8B-B14F-4D97-AF65-F5344CB8AC3E}">
+        <p14:creationId xmlns:p14="http://schemas.microsoft.com/office/powerpoint/2010/main" val="2199298591"/>
       </p:ext>
     </p:extLst>
   </p:cSld>
@@ -11231,12 +12404,36 @@
                         <a:buNone/>
                       </a:pPr>
                       <a:r>
-                        <a:rPr lang="es-ES" sz="1100" u="none" strike="noStrike">
+                        <a:rPr lang="es-ES" sz="1100" u="none" strike="noStrike" dirty="0" err="1">
                           <a:effectLst/>
                         </a:rPr>
-                        <a:t>handedness writes with</a:t>
+                        <a:t>handedness</a:t>
                       </a:r>
-                      <a:endParaRPr lang="es-ES" sz="1100" b="0" i="0" u="none" strike="noStrike">
+                      <a:r>
+                        <a:rPr lang="es-ES" sz="1100" u="none" strike="noStrike" dirty="0">
+                          <a:effectLst/>
+                        </a:rPr>
+                        <a:t> </a:t>
+                      </a:r>
+                      <a:r>
+                        <a:rPr lang="es-ES" sz="1100" u="none" strike="noStrike" dirty="0" err="1">
+                          <a:effectLst/>
+                        </a:rPr>
+                        <a:t>writes</a:t>
+                      </a:r>
+                      <a:r>
+                        <a:rPr lang="es-ES" sz="1100" u="none" strike="noStrike" dirty="0">
+                          <a:effectLst/>
+                        </a:rPr>
+                        <a:t> </a:t>
+                      </a:r>
+                      <a:r>
+                        <a:rPr lang="es-ES" sz="1100" u="none" strike="noStrike" dirty="0" err="1">
+                          <a:effectLst/>
+                        </a:rPr>
+                        <a:t>with</a:t>
+                      </a:r>
+                      <a:endParaRPr lang="es-ES" sz="1100" b="0" i="0" u="none" strike="noStrike" dirty="0">
                         <a:solidFill>
                           <a:srgbClr val="000000"/>
                         </a:solidFill>
@@ -11488,12 +12685,18 @@
                         <a:buNone/>
                       </a:pPr>
                       <a:r>
-                        <a:rPr lang="es-ES" sz="1100" u="none" strike="noStrike">
+                        <a:rPr lang="es-ES" sz="1100" u="none" strike="noStrike" dirty="0">
                           <a:effectLst/>
                         </a:rPr>
-                        <a:t>strikes a match with</a:t>
+                        <a:t>strikes a match </a:t>
                       </a:r>
-                      <a:endParaRPr lang="es-ES" sz="1100" b="0" i="0" u="none" strike="noStrike">
+                      <a:r>
+                        <a:rPr lang="es-ES" sz="1100" u="none" strike="noStrike" dirty="0" err="1">
+                          <a:effectLst/>
+                        </a:rPr>
+                        <a:t>with</a:t>
+                      </a:r>
+                      <a:endParaRPr lang="es-ES" sz="1100" b="0" i="0" u="none" strike="noStrike" dirty="0">
                         <a:solidFill>
                           <a:srgbClr val="000000"/>
                         </a:solidFill>
@@ -11745,12 +12948,36 @@
                         <a:buNone/>
                       </a:pPr>
                       <a:r>
-                        <a:rPr lang="es-ES" sz="1100" u="none" strike="noStrike">
+                        <a:rPr lang="es-ES" sz="1100" u="none" strike="noStrike" dirty="0" err="1">
                           <a:effectLst/>
                         </a:rPr>
-                        <a:t>throws a ball with</a:t>
+                        <a:t>throws</a:t>
                       </a:r>
-                      <a:endParaRPr lang="es-ES" sz="1100" b="0" i="0" u="none" strike="noStrike">
+                      <a:r>
+                        <a:rPr lang="es-ES" sz="1100" u="none" strike="noStrike" dirty="0">
+                          <a:effectLst/>
+                        </a:rPr>
+                        <a:t> a </a:t>
+                      </a:r>
+                      <a:r>
+                        <a:rPr lang="es-ES" sz="1100" u="none" strike="noStrike" dirty="0" err="1">
+                          <a:effectLst/>
+                        </a:rPr>
+                        <a:t>ball</a:t>
+                      </a:r>
+                      <a:r>
+                        <a:rPr lang="es-ES" sz="1100" u="none" strike="noStrike" dirty="0">
+                          <a:effectLst/>
+                        </a:rPr>
+                        <a:t> </a:t>
+                      </a:r>
+                      <a:r>
+                        <a:rPr lang="es-ES" sz="1100" u="none" strike="noStrike" dirty="0" err="1">
+                          <a:effectLst/>
+                        </a:rPr>
+                        <a:t>with</a:t>
+                      </a:r>
+                      <a:endParaRPr lang="es-ES" sz="1100" b="0" i="0" u="none" strike="noStrike" dirty="0">
                         <a:solidFill>
                           <a:srgbClr val="000000"/>
                         </a:solidFill>
@@ -12002,12 +13229,30 @@
                         <a:buNone/>
                       </a:pPr>
                       <a:r>
-                        <a:rPr lang="es-ES" sz="1100" u="none" strike="noStrike">
+                        <a:rPr lang="es-ES" sz="1100" u="none" strike="noStrike" dirty="0">
                           <a:effectLst/>
                         </a:rPr>
-                        <a:t>bats a ball with</a:t>
+                        <a:t>bats a </a:t>
                       </a:r>
-                      <a:endParaRPr lang="es-ES" sz="1100" b="0" i="0" u="none" strike="noStrike">
+                      <a:r>
+                        <a:rPr lang="es-ES" sz="1100" u="none" strike="noStrike" dirty="0" err="1">
+                          <a:effectLst/>
+                        </a:rPr>
+                        <a:t>ball</a:t>
+                      </a:r>
+                      <a:r>
+                        <a:rPr lang="es-ES" sz="1100" u="none" strike="noStrike" dirty="0">
+                          <a:effectLst/>
+                        </a:rPr>
+                        <a:t> </a:t>
+                      </a:r>
+                      <a:r>
+                        <a:rPr lang="es-ES" sz="1100" u="none" strike="noStrike" dirty="0" err="1">
+                          <a:effectLst/>
+                        </a:rPr>
+                        <a:t>with</a:t>
+                      </a:r>
+                      <a:endParaRPr lang="es-ES" sz="1100" b="0" i="0" u="none" strike="noStrike" dirty="0">
                         <a:solidFill>
                           <a:srgbClr val="000000"/>
                         </a:solidFill>
@@ -12259,12 +13504,48 @@
                         <a:buNone/>
                       </a:pPr>
                       <a:r>
-                        <a:rPr lang="es-ES" sz="1100" u="none" strike="noStrike">
+                        <a:rPr lang="es-ES" sz="1100" u="none" strike="noStrike" dirty="0" err="1">
                           <a:effectLst/>
                         </a:rPr>
-                        <a:t>handedness brushes teeth with</a:t>
+                        <a:t>handedness</a:t>
                       </a:r>
-                      <a:endParaRPr lang="es-ES" sz="1100" b="0" i="0" u="none" strike="noStrike">
+                      <a:r>
+                        <a:rPr lang="es-ES" sz="1100" u="none" strike="noStrike" dirty="0">
+                          <a:effectLst/>
+                        </a:rPr>
+                        <a:t> </a:t>
+                      </a:r>
+                      <a:r>
+                        <a:rPr lang="es-ES" sz="1100" u="none" strike="noStrike" dirty="0" err="1">
+                          <a:effectLst/>
+                        </a:rPr>
+                        <a:t>brushes</a:t>
+                      </a:r>
+                      <a:r>
+                        <a:rPr lang="es-ES" sz="1100" u="none" strike="noStrike" dirty="0">
+                          <a:effectLst/>
+                        </a:rPr>
+                        <a:t> </a:t>
+                      </a:r>
+                      <a:r>
+                        <a:rPr lang="es-ES" sz="1100" u="none" strike="noStrike" dirty="0" err="1">
+                          <a:effectLst/>
+                        </a:rPr>
+                        <a:t>teeth</a:t>
+                      </a:r>
+                      <a:r>
+                        <a:rPr lang="es-ES" sz="1100" u="none" strike="noStrike" dirty="0">
+                          <a:effectLst/>
+                        </a:rPr>
+                        <a:t> </a:t>
+                      </a:r>
+                      <a:r>
+                        <a:rPr lang="es-ES" sz="1100" u="none" strike="noStrike" dirty="0" err="1">
+                          <a:effectLst/>
+                        </a:rPr>
+                        <a:t>with</a:t>
+                      </a:r>
+                      <a:endParaRPr lang="es-ES" sz="1100" b="0" i="0" u="none" strike="noStrike" dirty="0">
                         <a:solidFill>
                           <a:srgbClr val="000000"/>
                         </a:solidFill>
@@ -12516,12 +13797,12 @@
                         <a:buNone/>
                       </a:pPr>
                       <a:r>
-                        <a:rPr lang="en-US" sz="1100" u="none" strike="noStrike">
+                        <a:rPr lang="en-US" sz="1100" u="none" strike="noStrike" dirty="0">
                           <a:effectLst/>
                         </a:rPr>
                         <a:t>handedness hammers a nail with</a:t>
                       </a:r>
-                      <a:endParaRPr lang="en-US" sz="1100" b="0" i="0" u="none" strike="noStrike">
+                      <a:endParaRPr lang="en-US" sz="1100" b="0" i="0" u="none" strike="noStrike" dirty="0">
                         <a:solidFill>
                           <a:srgbClr val="000000"/>
                         </a:solidFill>
@@ -12773,12 +14054,48 @@
                         <a:buNone/>
                       </a:pPr>
                       <a:r>
-                        <a:rPr lang="es-ES" sz="1100" u="none" strike="noStrike">
+                        <a:rPr lang="es-ES" sz="1100" u="none" strike="noStrike" dirty="0" err="1">
                           <a:effectLst/>
                         </a:rPr>
-                        <a:t>handedness deals cards with</a:t>
+                        <a:t>handedness</a:t>
                       </a:r>
-                      <a:endParaRPr lang="es-ES" sz="1100" b="0" i="0" u="none" strike="noStrike">
+                      <a:r>
+                        <a:rPr lang="es-ES" sz="1100" u="none" strike="noStrike" dirty="0">
+                          <a:effectLst/>
+                        </a:rPr>
+                        <a:t> </a:t>
+                      </a:r>
+                      <a:r>
+                        <a:rPr lang="es-ES" sz="1100" u="none" strike="noStrike" dirty="0" err="1">
+                          <a:effectLst/>
+                        </a:rPr>
+                        <a:t>deals</a:t>
+                      </a:r>
+                      <a:r>
+                        <a:rPr lang="es-ES" sz="1100" u="none" strike="noStrike" dirty="0">
+                          <a:effectLst/>
+                        </a:rPr>
+                        <a:t> </a:t>
+                      </a:r>
+                      <a:r>
+                        <a:rPr lang="es-ES" sz="1100" u="none" strike="noStrike" dirty="0" err="1">
+                          <a:effectLst/>
+                        </a:rPr>
+                        <a:t>cards</a:t>
+                      </a:r>
+                      <a:r>
+                        <a:rPr lang="es-ES" sz="1100" u="none" strike="noStrike" dirty="0">
+                          <a:effectLst/>
+                        </a:rPr>
+                        <a:t> </a:t>
+                      </a:r>
+                      <a:r>
+                        <a:rPr lang="es-ES" sz="1100" u="none" strike="noStrike" dirty="0" err="1">
+                          <a:effectLst/>
+                        </a:rPr>
+                        <a:t>with</a:t>
+                      </a:r>
+                      <a:endParaRPr lang="es-ES" sz="1100" b="0" i="0" u="none" strike="noStrike" dirty="0">
                         <a:solidFill>
                           <a:srgbClr val="000000"/>
                         </a:solidFill>
